--- a/documentation/CoviSpark_Presentation.pptx
+++ b/documentation/CoviSpark_Presentation.pptx
@@ -120,20 +120,20 @@
   <p:extLst>
     <p:ext uri="{521415D9-36F7-43E2-AB2F-B90AF26B5E84}">
       <p14:sectionLst xmlns:p14="http://schemas.microsoft.com/office/powerpoint/2010/main">
-        <p14:section name="Introduction" id="{eb79877b-3d1c-dbcf-0dc9-b2c7482ffae7}">
+        <p14:section name="Introduction" id="{33c8bccf-39aa-c73c-aad2-f460ee23edb8}">
           <p14:sldIdLst>
             <p14:sldId id="256"/>
             <p14:sldId id="257"/>
           </p14:sldIdLst>
         </p14:section>
-        <p14:section name="Architecture" id="{f0cd0352-3f38-0479-0e34-26efa1efab25}">
+        <p14:section name="Architecture" id="{cbd7be2d-095c-158c-9926-0233ba958774}">
           <p14:sldIdLst>
             <p14:sldId id="258"/>
             <p14:sldId id="259"/>
             <p14:sldId id="260"/>
           </p14:sldIdLst>
         </p14:section>
-        <p14:section name="Implementation" id="{0c79a3b4-0ab3-7eb1-f3de-dbb0a9fdfebc}">
+        <p14:section name="Implementation" id="{cbbb9471-b590-b0b3-de1a-d14027036fb6}">
           <p14:sldIdLst>
             <p14:sldId id="261"/>
             <p14:sldId id="262"/>
@@ -141,18 +141,18 @@
             <p14:sldId id="264"/>
           </p14:sldIdLst>
         </p14:section>
-        <p14:section name="Execution" id="{4c7f1b0c-4a68-3eb9-34ef-d564cb5cacc1}">
+        <p14:section name="Execution" id="{82a74f65-20b3-63f2-89f7-8dcf34100fc9}">
           <p14:sldIdLst>
             <p14:sldId id="265"/>
           </p14:sldIdLst>
         </p14:section>
-        <p14:section name="Results" id="{30c8e15b-791a-bda6-df6c-f0b4e2db5cb9}">
+        <p14:section name="Results" id="{2d56550b-0c26-9f96-18c9-bbe3d87b37d0}">
           <p14:sldIdLst>
             <p14:sldId id="266"/>
             <p14:sldId id="267"/>
           </p14:sldIdLst>
         </p14:section>
-        <p14:section name="Wrap-up" id="{3ea26672-089e-df21-9513-d73341771ded}">
+        <p14:section name="Wrap-up" id="{6f8f4d78-f14d-22d5-a918-3ed3b044e6ea}">
           <p14:sldIdLst>
             <p14:sldId id="268"/>
             <p14:sldId id="269"/>
@@ -8107,42 +8107,6 @@
       <p:sp>
         <p:nvSpPr>
           <p:cNvPr id="3" name="Text 1"/>
-          <p:cNvSpPr txBox="1"/>
-          <p:nvPr/>
-        </p:nvSpPr>
-        <p:spPr>
-          <a:xfrm>
-            <a:off x="731520" y="3429000"/>
-            <a:ext cx="8229600" cy="457200"/>
-          </a:xfrm>
-          <a:prstGeom prst="rect">
-            <a:avLst/>
-          </a:prstGeom>
-          <a:noFill/>
-          <a:ln/>
-        </p:spPr>
-        <p:txBody>
-          <a:bodyPr wrap="square" lIns="0" tIns="0" rIns="0" bIns="0" rtlCol="0" anchor="ctr"/>
-          <a:lstStyle/>
-          <a:p>
-            <a:pPr indent="0" marL="0">
-              <a:buNone/>
-            </a:pPr>
-            <a:r>
-              <a:rPr lang="en-US" sz="2000" dirty="0">
-                <a:solidFill>
-                  <a:srgbClr val="CADCFC"/>
-                </a:solidFill>
-              </a:rPr>
-              <a:t>github.com/gauriiiiiiiiiiii/CoviSpark</a:t>
-            </a:r>
-            <a:endParaRPr lang="en-US" sz="2000" dirty="0"/>
-          </a:p>
-        </p:txBody>
-      </p:sp>
-      <p:sp>
-        <p:nvSpPr>
-          <p:cNvPr id="4" name="Text 2"/>
           <p:cNvSpPr txBox="1"/>
           <p:nvPr/>
         </p:nvSpPr>

--- a/documentation/CoviSpark_Presentation.pptx
+++ b/documentation/CoviSpark_Presentation.pptx
@@ -120,20 +120,20 @@
   <p:extLst>
     <p:ext uri="{521415D9-36F7-43E2-AB2F-B90AF26B5E84}">
       <p14:sectionLst xmlns:p14="http://schemas.microsoft.com/office/powerpoint/2010/main">
-        <p14:section name="Introduction" id="{33c8bccf-39aa-c73c-aad2-f460ee23edb8}">
+        <p14:section name="Introduction" id="{681fa2a1-0a1c-0d5a-549b-e6bc49d9e4ac}">
           <p14:sldIdLst>
             <p14:sldId id="256"/>
             <p14:sldId id="257"/>
           </p14:sldIdLst>
         </p14:section>
-        <p14:section name="Architecture" id="{cbd7be2d-095c-158c-9926-0233ba958774}">
+        <p14:section name="Architecture" id="{a5fc62ce-5bf3-21d0-75ed-4f4aa9a00c5b}">
           <p14:sldIdLst>
             <p14:sldId id="258"/>
             <p14:sldId id="259"/>
             <p14:sldId id="260"/>
           </p14:sldIdLst>
         </p14:section>
-        <p14:section name="Implementation" id="{cbbb9471-b590-b0b3-de1a-d14027036fb6}">
+        <p14:section name="Implementation" id="{1a0a2399-adc8-afb9-cc75-76601d9bddea}">
           <p14:sldIdLst>
             <p14:sldId id="261"/>
             <p14:sldId id="262"/>
@@ -141,18 +141,18 @@
             <p14:sldId id="264"/>
           </p14:sldIdLst>
         </p14:section>
-        <p14:section name="Execution" id="{82a74f65-20b3-63f2-89f7-8dcf34100fc9}">
+        <p14:section name="Execution" id="{d0db850e-b186-2314-1ea4-d4a1e9dd85c1}">
           <p14:sldIdLst>
             <p14:sldId id="265"/>
           </p14:sldIdLst>
         </p14:section>
-        <p14:section name="Results" id="{2d56550b-0c26-9f96-18c9-bbe3d87b37d0}">
+        <p14:section name="Results" id="{8e96ef33-325f-3563-fbad-7cadd8c4ebac}">
           <p14:sldIdLst>
             <p14:sldId id="266"/>
             <p14:sldId id="267"/>
           </p14:sldIdLst>
         </p14:section>
-        <p14:section name="Wrap-up" id="{6f8f4d78-f14d-22d5-a918-3ed3b044e6ea}">
+        <p14:section name="Wrap-up" id="{27103fc9-44d3-97bd-557a-db4d5d67aee6}">
           <p14:sldIdLst>
             <p14:sldId id="268"/>
             <p14:sldId id="269"/>
@@ -4130,42 +4130,6 @@
               <a:buNone/>
             </a:pPr>
             <a:endParaRPr lang="en-US" sz="3200" dirty="0"/>
-          </a:p>
-        </p:txBody>
-      </p:sp>
-      <p:sp>
-        <p:nvSpPr>
-          <p:cNvPr id="3" name="Text 0"/>
-          <p:cNvSpPr/>
-          <p:nvPr/>
-        </p:nvSpPr>
-        <p:spPr>
-          <a:xfrm>
-            <a:off x="548640" y="6400800"/>
-            <a:ext cx="4572000" cy="274320"/>
-          </a:xfrm>
-          <a:prstGeom prst="rect">
-            <a:avLst/>
-          </a:prstGeom>
-          <a:noFill/>
-          <a:ln/>
-        </p:spPr>
-        <p:txBody>
-          <a:bodyPr wrap="square" lIns="0" tIns="0" rIns="0" bIns="0" rtlCol="0" anchor="ctr"/>
-          <a:lstStyle/>
-          <a:p>
-            <a:pPr indent="0" marL="0">
-              <a:buNone/>
-            </a:pPr>
-            <a:r>
-              <a:rPr lang="en-US" sz="1000" dirty="0">
-                <a:solidFill>
-                  <a:srgbClr val="6B7686"/>
-                </a:solidFill>
-              </a:rPr>
-              <a:t>CoviSpark · CSBB 422</a:t>
-            </a:r>
-            <a:endParaRPr lang="en-US" sz="1000" dirty="0"/>
           </a:p>
         </p:txBody>
       </p:sp>

--- a/documentation/CoviSpark_Presentation.pptx
+++ b/documentation/CoviSpark_Presentation.pptx
@@ -19,9 +19,11 @@
     <p:sldId id="267" r:id="rId13"/>
     <p:sldId id="268" r:id="rId14"/>
     <p:sldId id="269" r:id="rId15"/>
+    <p:sldId id="270" r:id="rId16"/>
+    <p:sldId id="271" r:id="rId17"/>
   </p:sldIdLst>
   <p:notesMasterIdLst>
-    <p:notesMasterId r:id="rId16"/>
+    <p:notesMasterId r:id="rId18"/>
   </p:notesMasterIdLst>
   <p:sldSz cx="12192000" cy="6858000"/>
   <p:notesSz cx="6858000" cy="12192000"/>
@@ -120,42 +122,44 @@
   <p:extLst>
     <p:ext uri="{521415D9-36F7-43E2-AB2F-B90AF26B5E84}">
       <p14:sectionLst xmlns:p14="http://schemas.microsoft.com/office/powerpoint/2010/main">
-        <p14:section name="Introduction" id="{681fa2a1-0a1c-0d5a-549b-e6bc49d9e4ac}">
+        <p14:section name="Introduction" id="{e7f92998-4dfe-9d1a-8ce6-7973d23e5ba5}">
           <p14:sldIdLst>
             <p14:sldId id="256"/>
             <p14:sldId id="257"/>
           </p14:sldIdLst>
         </p14:section>
-        <p14:section name="Architecture" id="{a5fc62ce-5bf3-21d0-75ed-4f4aa9a00c5b}">
+        <p14:section name="Architecture" id="{d6510357-8c78-5980-18dd-b86902cd0c1d}">
           <p14:sldIdLst>
             <p14:sldId id="258"/>
             <p14:sldId id="259"/>
             <p14:sldId id="260"/>
           </p14:sldIdLst>
         </p14:section>
-        <p14:section name="Implementation" id="{1a0a2399-adc8-afb9-cc75-76601d9bddea}">
+        <p14:section name="Implementation" id="{10a88f8f-e18e-1316-7608-3a1bc8e99305}">
           <p14:sldIdLst>
             <p14:sldId id="261"/>
             <p14:sldId id="262"/>
             <p14:sldId id="263"/>
             <p14:sldId id="264"/>
-          </p14:sldIdLst>
-        </p14:section>
-        <p14:section name="Execution" id="{d0db850e-b186-2314-1ea4-d4a1e9dd85c1}">
-          <p14:sldIdLst>
             <p14:sldId id="265"/>
           </p14:sldIdLst>
         </p14:section>
-        <p14:section name="Results" id="{8e96ef33-325f-3563-fbad-7cadd8c4ebac}">
+        <p14:section name="Execution" id="{837e73c1-6c73-40bb-60fb-1ce793b4dbd9}">
           <p14:sldIdLst>
             <p14:sldId id="266"/>
-            <p14:sldId id="267"/>
           </p14:sldIdLst>
         </p14:section>
-        <p14:section name="Wrap-up" id="{27103fc9-44d3-97bd-557a-db4d5d67aee6}">
+        <p14:section name="Results" id="{1b08690d-d867-bd0d-192e-30c5b9559390}">
           <p14:sldIdLst>
+            <p14:sldId id="267"/>
             <p14:sldId id="268"/>
             <p14:sldId id="269"/>
+          </p14:sldIdLst>
+        </p14:section>
+        <p14:section name="Wrap-up" id="{e3832fd6-79b2-282d-5a52-3296827eb3b6}">
+          <p14:sldIdLst>
+            <p14:sldId id="270"/>
+            <p14:sldId id="271"/>
           </p14:sldIdLst>
         </p14:section>
       </p14:sectionLst>
@@ -2388,6 +2392,2829 @@
 </c:chartSpace>
 </file>
 
+<file path=ppt/charts/chart4.xml><?xml version="1.0" encoding="utf-8"?>
+<c:chartSpace xmlns:c="http://schemas.openxmlformats.org/drawingml/2006/chart" xmlns:a="http://schemas.openxmlformats.org/drawingml/2006/main" xmlns:r="http://schemas.openxmlformats.org/officeDocument/2006/relationships">
+  <c:date1904 val="0"/>
+  <c:roundedCorners val="1"/>
+  <c:chart>
+    <c:autoTitleDeleted val="1"/>
+    <c:plotArea>
+      <c:layout/>
+      <c:lineChart>
+        <c:varyColors val="0"/>
+        <c:ser>
+          <c:idx val="0"/>
+          <c:order val="0"/>
+          <c:tx>
+            <c:strRef>
+              <c:f>Sheet1!$B$1</c:f>
+              <c:strCache>
+                <c:ptCount val="1"/>
+                <c:pt idx="0">
+                  <c:v>Daily cases (weekly samples)</c:v>
+                </c:pt>
+              </c:strCache>
+            </c:strRef>
+          </c:tx>
+          <c:spPr>
+            <a:solidFill>
+              <a:srgbClr val="B9D0EC"/>
+            </a:solidFill>
+            <a:ln w="25400" cap="flat">
+              <a:solidFill>
+                <a:srgbClr val="B9D0EC"/>
+              </a:solidFill>
+              <a:prstDash val="solid"/>
+              <a:round/>
+            </a:ln>
+            <a:effectLst/>
+          </c:spPr>
+          <c:invertIfNegative val="0"/>
+          <c:dLbls>
+            <c:numFmt formatCode="#,##0" sourceLinked="0"/>
+            <c:txPr>
+              <a:bodyPr/>
+              <a:lstStyle/>
+              <a:p>
+                <a:pPr>
+                  <a:defRPr b="0" i="0" strike="noStrike" sz="1200" u="none">
+                    <a:solidFill>
+                      <a:srgbClr val="000000"/>
+                    </a:solidFill>
+                    <a:latin typeface="Arial"/>
+                  </a:defRPr>
+                </a:pPr>
+              </a:p>
+            </c:txPr>
+            <c:showLegendKey val="0"/>
+            <c:showVal val="0"/>
+            <c:showCatName val="0"/>
+            <c:showSerName val="0"/>
+            <c:showPercent val="0"/>
+            <c:showBubbleSize val="0"/>
+            <c:showLeaderLines val="0"/>
+          </c:dLbls>
+          <c:marker>
+            <c:symbol val="none"/>
+            <c:size val="6"/>
+            <c:spPr>
+              <a:solidFill>
+                <a:srgbClr val="B9D0EC"/>
+              </a:solidFill>
+              <a:ln w="9525" cap="flat">
+                <a:solidFill>
+                  <a:srgbClr val="B9D0EC"/>
+                </a:solidFill>
+                <a:prstDash val="solid"/>
+                <a:round/>
+              </a:ln>
+              <a:effectLst/>
+            </c:spPr>
+          </c:marker>
+          <c:cat>
+            <c:multiLvlStrRef>
+              <c:f>Sheet1!$A$2:$A$207</c:f>
+              <c:multiLvlStrCache>
+                <c:ptCount val="206"/>
+                <c:lvl>
+                  <c:pt idx="0">
+                    <c:v>2020</c:v>
+                  </c:pt>
+                  <c:pt idx="1">
+                    <c:v/>
+                  </c:pt>
+                  <c:pt idx="2">
+                    <c:v/>
+                  </c:pt>
+                  <c:pt idx="3">
+                    <c:v/>
+                  </c:pt>
+                  <c:pt idx="4">
+                    <c:v/>
+                  </c:pt>
+                  <c:pt idx="5">
+                    <c:v/>
+                  </c:pt>
+                  <c:pt idx="6">
+                    <c:v/>
+                  </c:pt>
+                  <c:pt idx="7">
+                    <c:v/>
+                  </c:pt>
+                  <c:pt idx="8">
+                    <c:v/>
+                  </c:pt>
+                  <c:pt idx="9">
+                    <c:v/>
+                  </c:pt>
+                  <c:pt idx="10">
+                    <c:v/>
+                  </c:pt>
+                  <c:pt idx="11">
+                    <c:v/>
+                  </c:pt>
+                  <c:pt idx="12">
+                    <c:v/>
+                  </c:pt>
+                  <c:pt idx="13">
+                    <c:v/>
+                  </c:pt>
+                  <c:pt idx="14">
+                    <c:v/>
+                  </c:pt>
+                  <c:pt idx="15">
+                    <c:v/>
+                  </c:pt>
+                  <c:pt idx="16">
+                    <c:v/>
+                  </c:pt>
+                  <c:pt idx="17">
+                    <c:v/>
+                  </c:pt>
+                  <c:pt idx="18">
+                    <c:v/>
+                  </c:pt>
+                  <c:pt idx="19">
+                    <c:v/>
+                  </c:pt>
+                  <c:pt idx="20">
+                    <c:v/>
+                  </c:pt>
+                  <c:pt idx="21">
+                    <c:v/>
+                  </c:pt>
+                  <c:pt idx="22">
+                    <c:v/>
+                  </c:pt>
+                  <c:pt idx="23">
+                    <c:v/>
+                  </c:pt>
+                  <c:pt idx="24">
+                    <c:v/>
+                  </c:pt>
+                  <c:pt idx="25">
+                    <c:v/>
+                  </c:pt>
+                  <c:pt idx="26">
+                    <c:v/>
+                  </c:pt>
+                  <c:pt idx="27">
+                    <c:v/>
+                  </c:pt>
+                  <c:pt idx="28">
+                    <c:v/>
+                  </c:pt>
+                  <c:pt idx="29">
+                    <c:v/>
+                  </c:pt>
+                  <c:pt idx="30">
+                    <c:v/>
+                  </c:pt>
+                  <c:pt idx="31">
+                    <c:v/>
+                  </c:pt>
+                  <c:pt idx="32">
+                    <c:v/>
+                  </c:pt>
+                  <c:pt idx="33">
+                    <c:v/>
+                  </c:pt>
+                  <c:pt idx="34">
+                    <c:v/>
+                  </c:pt>
+                  <c:pt idx="35">
+                    <c:v/>
+                  </c:pt>
+                  <c:pt idx="36">
+                    <c:v/>
+                  </c:pt>
+                  <c:pt idx="37">
+                    <c:v/>
+                  </c:pt>
+                  <c:pt idx="38">
+                    <c:v/>
+                  </c:pt>
+                  <c:pt idx="39">
+                    <c:v/>
+                  </c:pt>
+                  <c:pt idx="40">
+                    <c:v/>
+                  </c:pt>
+                  <c:pt idx="41">
+                    <c:v/>
+                  </c:pt>
+                  <c:pt idx="42">
+                    <c:v/>
+                  </c:pt>
+                  <c:pt idx="43">
+                    <c:v/>
+                  </c:pt>
+                  <c:pt idx="44">
+                    <c:v/>
+                  </c:pt>
+                  <c:pt idx="45">
+                    <c:v/>
+                  </c:pt>
+                  <c:pt idx="46">
+                    <c:v/>
+                  </c:pt>
+                  <c:pt idx="47">
+                    <c:v/>
+                  </c:pt>
+                  <c:pt idx="48">
+                    <c:v/>
+                  </c:pt>
+                  <c:pt idx="49">
+                    <c:v/>
+                  </c:pt>
+                  <c:pt idx="50">
+                    <c:v>2021</c:v>
+                  </c:pt>
+                  <c:pt idx="51">
+                    <c:v/>
+                  </c:pt>
+                  <c:pt idx="52">
+                    <c:v/>
+                  </c:pt>
+                  <c:pt idx="53">
+                    <c:v/>
+                  </c:pt>
+                  <c:pt idx="54">
+                    <c:v/>
+                  </c:pt>
+                  <c:pt idx="55">
+                    <c:v/>
+                  </c:pt>
+                  <c:pt idx="56">
+                    <c:v/>
+                  </c:pt>
+                  <c:pt idx="57">
+                    <c:v/>
+                  </c:pt>
+                  <c:pt idx="58">
+                    <c:v/>
+                  </c:pt>
+                  <c:pt idx="59">
+                    <c:v/>
+                  </c:pt>
+                  <c:pt idx="60">
+                    <c:v/>
+                  </c:pt>
+                  <c:pt idx="61">
+                    <c:v/>
+                  </c:pt>
+                  <c:pt idx="62">
+                    <c:v/>
+                  </c:pt>
+                  <c:pt idx="63">
+                    <c:v/>
+                  </c:pt>
+                  <c:pt idx="64">
+                    <c:v/>
+                  </c:pt>
+                  <c:pt idx="65">
+                    <c:v/>
+                  </c:pt>
+                  <c:pt idx="66">
+                    <c:v/>
+                  </c:pt>
+                  <c:pt idx="67">
+                    <c:v/>
+                  </c:pt>
+                  <c:pt idx="68">
+                    <c:v/>
+                  </c:pt>
+                  <c:pt idx="69">
+                    <c:v/>
+                  </c:pt>
+                  <c:pt idx="70">
+                    <c:v/>
+                  </c:pt>
+                  <c:pt idx="71">
+                    <c:v/>
+                  </c:pt>
+                  <c:pt idx="72">
+                    <c:v/>
+                  </c:pt>
+                  <c:pt idx="73">
+                    <c:v/>
+                  </c:pt>
+                  <c:pt idx="74">
+                    <c:v/>
+                  </c:pt>
+                  <c:pt idx="75">
+                    <c:v/>
+                  </c:pt>
+                  <c:pt idx="76">
+                    <c:v/>
+                  </c:pt>
+                  <c:pt idx="77">
+                    <c:v/>
+                  </c:pt>
+                  <c:pt idx="78">
+                    <c:v/>
+                  </c:pt>
+                  <c:pt idx="79">
+                    <c:v/>
+                  </c:pt>
+                  <c:pt idx="80">
+                    <c:v/>
+                  </c:pt>
+                  <c:pt idx="81">
+                    <c:v/>
+                  </c:pt>
+                  <c:pt idx="82">
+                    <c:v/>
+                  </c:pt>
+                  <c:pt idx="83">
+                    <c:v/>
+                  </c:pt>
+                  <c:pt idx="84">
+                    <c:v/>
+                  </c:pt>
+                  <c:pt idx="85">
+                    <c:v/>
+                  </c:pt>
+                  <c:pt idx="86">
+                    <c:v/>
+                  </c:pt>
+                  <c:pt idx="87">
+                    <c:v/>
+                  </c:pt>
+                  <c:pt idx="88">
+                    <c:v/>
+                  </c:pt>
+                  <c:pt idx="89">
+                    <c:v/>
+                  </c:pt>
+                  <c:pt idx="90">
+                    <c:v/>
+                  </c:pt>
+                  <c:pt idx="91">
+                    <c:v/>
+                  </c:pt>
+                  <c:pt idx="92">
+                    <c:v/>
+                  </c:pt>
+                  <c:pt idx="93">
+                    <c:v/>
+                  </c:pt>
+                  <c:pt idx="94">
+                    <c:v/>
+                  </c:pt>
+                  <c:pt idx="95">
+                    <c:v/>
+                  </c:pt>
+                  <c:pt idx="96">
+                    <c:v/>
+                  </c:pt>
+                  <c:pt idx="97">
+                    <c:v/>
+                  </c:pt>
+                  <c:pt idx="98">
+                    <c:v/>
+                  </c:pt>
+                  <c:pt idx="99">
+                    <c:v/>
+                  </c:pt>
+                  <c:pt idx="100">
+                    <c:v/>
+                  </c:pt>
+                  <c:pt idx="101">
+                    <c:v/>
+                  </c:pt>
+                  <c:pt idx="102">
+                    <c:v>2022</c:v>
+                  </c:pt>
+                  <c:pt idx="103">
+                    <c:v/>
+                  </c:pt>
+                  <c:pt idx="104">
+                    <c:v/>
+                  </c:pt>
+                  <c:pt idx="105">
+                    <c:v/>
+                  </c:pt>
+                  <c:pt idx="106">
+                    <c:v/>
+                  </c:pt>
+                  <c:pt idx="107">
+                    <c:v/>
+                  </c:pt>
+                  <c:pt idx="108">
+                    <c:v/>
+                  </c:pt>
+                  <c:pt idx="109">
+                    <c:v/>
+                  </c:pt>
+                  <c:pt idx="110">
+                    <c:v/>
+                  </c:pt>
+                  <c:pt idx="111">
+                    <c:v/>
+                  </c:pt>
+                  <c:pt idx="112">
+                    <c:v/>
+                  </c:pt>
+                  <c:pt idx="113">
+                    <c:v/>
+                  </c:pt>
+                  <c:pt idx="114">
+                    <c:v/>
+                  </c:pt>
+                  <c:pt idx="115">
+                    <c:v/>
+                  </c:pt>
+                  <c:pt idx="116">
+                    <c:v/>
+                  </c:pt>
+                  <c:pt idx="117">
+                    <c:v/>
+                  </c:pt>
+                  <c:pt idx="118">
+                    <c:v/>
+                  </c:pt>
+                  <c:pt idx="119">
+                    <c:v/>
+                  </c:pt>
+                  <c:pt idx="120">
+                    <c:v/>
+                  </c:pt>
+                  <c:pt idx="121">
+                    <c:v/>
+                  </c:pt>
+                  <c:pt idx="122">
+                    <c:v/>
+                  </c:pt>
+                  <c:pt idx="123">
+                    <c:v/>
+                  </c:pt>
+                  <c:pt idx="124">
+                    <c:v/>
+                  </c:pt>
+                  <c:pt idx="125">
+                    <c:v/>
+                  </c:pt>
+                  <c:pt idx="126">
+                    <c:v/>
+                  </c:pt>
+                  <c:pt idx="127">
+                    <c:v/>
+                  </c:pt>
+                  <c:pt idx="128">
+                    <c:v/>
+                  </c:pt>
+                  <c:pt idx="129">
+                    <c:v/>
+                  </c:pt>
+                  <c:pt idx="130">
+                    <c:v/>
+                  </c:pt>
+                  <c:pt idx="131">
+                    <c:v/>
+                  </c:pt>
+                  <c:pt idx="132">
+                    <c:v/>
+                  </c:pt>
+                  <c:pt idx="133">
+                    <c:v/>
+                  </c:pt>
+                  <c:pt idx="134">
+                    <c:v/>
+                  </c:pt>
+                  <c:pt idx="135">
+                    <c:v/>
+                  </c:pt>
+                  <c:pt idx="136">
+                    <c:v/>
+                  </c:pt>
+                  <c:pt idx="137">
+                    <c:v/>
+                  </c:pt>
+                  <c:pt idx="138">
+                    <c:v/>
+                  </c:pt>
+                  <c:pt idx="139">
+                    <c:v/>
+                  </c:pt>
+                  <c:pt idx="140">
+                    <c:v/>
+                  </c:pt>
+                  <c:pt idx="141">
+                    <c:v/>
+                  </c:pt>
+                  <c:pt idx="142">
+                    <c:v/>
+                  </c:pt>
+                  <c:pt idx="143">
+                    <c:v/>
+                  </c:pt>
+                  <c:pt idx="144">
+                    <c:v/>
+                  </c:pt>
+                  <c:pt idx="145">
+                    <c:v/>
+                  </c:pt>
+                  <c:pt idx="146">
+                    <c:v/>
+                  </c:pt>
+                  <c:pt idx="147">
+                    <c:v/>
+                  </c:pt>
+                  <c:pt idx="148">
+                    <c:v/>
+                  </c:pt>
+                  <c:pt idx="149">
+                    <c:v/>
+                  </c:pt>
+                  <c:pt idx="150">
+                    <c:v/>
+                  </c:pt>
+                  <c:pt idx="151">
+                    <c:v/>
+                  </c:pt>
+                  <c:pt idx="152">
+                    <c:v/>
+                  </c:pt>
+                  <c:pt idx="153">
+                    <c:v/>
+                  </c:pt>
+                  <c:pt idx="154">
+                    <c:v>2023</c:v>
+                  </c:pt>
+                  <c:pt idx="155">
+                    <c:v/>
+                  </c:pt>
+                  <c:pt idx="156">
+                    <c:v/>
+                  </c:pt>
+                  <c:pt idx="157">
+                    <c:v/>
+                  </c:pt>
+                  <c:pt idx="158">
+                    <c:v/>
+                  </c:pt>
+                  <c:pt idx="159">
+                    <c:v/>
+                  </c:pt>
+                  <c:pt idx="160">
+                    <c:v/>
+                  </c:pt>
+                  <c:pt idx="161">
+                    <c:v/>
+                  </c:pt>
+                  <c:pt idx="162">
+                    <c:v/>
+                  </c:pt>
+                  <c:pt idx="163">
+                    <c:v/>
+                  </c:pt>
+                  <c:pt idx="164">
+                    <c:v/>
+                  </c:pt>
+                  <c:pt idx="165">
+                    <c:v/>
+                  </c:pt>
+                  <c:pt idx="166">
+                    <c:v/>
+                  </c:pt>
+                  <c:pt idx="167">
+                    <c:v/>
+                  </c:pt>
+                  <c:pt idx="168">
+                    <c:v/>
+                  </c:pt>
+                  <c:pt idx="169">
+                    <c:v/>
+                  </c:pt>
+                  <c:pt idx="170">
+                    <c:v/>
+                  </c:pt>
+                  <c:pt idx="171">
+                    <c:v/>
+                  </c:pt>
+                  <c:pt idx="172">
+                    <c:v/>
+                  </c:pt>
+                  <c:pt idx="173">
+                    <c:v/>
+                  </c:pt>
+                  <c:pt idx="174">
+                    <c:v/>
+                  </c:pt>
+                  <c:pt idx="175">
+                    <c:v/>
+                  </c:pt>
+                  <c:pt idx="176">
+                    <c:v/>
+                  </c:pt>
+                  <c:pt idx="177">
+                    <c:v/>
+                  </c:pt>
+                  <c:pt idx="178">
+                    <c:v/>
+                  </c:pt>
+                  <c:pt idx="179">
+                    <c:v/>
+                  </c:pt>
+                  <c:pt idx="180">
+                    <c:v/>
+                  </c:pt>
+                  <c:pt idx="181">
+                    <c:v/>
+                  </c:pt>
+                  <c:pt idx="182">
+                    <c:v/>
+                  </c:pt>
+                  <c:pt idx="183">
+                    <c:v/>
+                  </c:pt>
+                  <c:pt idx="184">
+                    <c:v/>
+                  </c:pt>
+                  <c:pt idx="185">
+                    <c:v/>
+                  </c:pt>
+                  <c:pt idx="186">
+                    <c:v/>
+                  </c:pt>
+                  <c:pt idx="187">
+                    <c:v/>
+                  </c:pt>
+                  <c:pt idx="188">
+                    <c:v/>
+                  </c:pt>
+                  <c:pt idx="189">
+                    <c:v/>
+                  </c:pt>
+                  <c:pt idx="190">
+                    <c:v/>
+                  </c:pt>
+                  <c:pt idx="191">
+                    <c:v/>
+                  </c:pt>
+                  <c:pt idx="192">
+                    <c:v/>
+                  </c:pt>
+                  <c:pt idx="193">
+                    <c:v/>
+                  </c:pt>
+                  <c:pt idx="194">
+                    <c:v/>
+                  </c:pt>
+                  <c:pt idx="195">
+                    <c:v/>
+                  </c:pt>
+                  <c:pt idx="196">
+                    <c:v/>
+                  </c:pt>
+                  <c:pt idx="197">
+                    <c:v/>
+                  </c:pt>
+                  <c:pt idx="198">
+                    <c:v/>
+                  </c:pt>
+                  <c:pt idx="199">
+                    <c:v/>
+                  </c:pt>
+                  <c:pt idx="200">
+                    <c:v/>
+                  </c:pt>
+                  <c:pt idx="201">
+                    <c:v/>
+                  </c:pt>
+                  <c:pt idx="202">
+                    <c:v/>
+                  </c:pt>
+                  <c:pt idx="203">
+                    <c:v/>
+                  </c:pt>
+                  <c:pt idx="204">
+                    <c:v/>
+                  </c:pt>
+                  <c:pt idx="205">
+                    <c:v/>
+                  </c:pt>
+                </c:lvl>
+              </c:multiLvlStrCache>
+            </c:multiLvlStrRef>
+          </c:cat>
+          <c:val>
+            <c:numRef>
+              <c:f>Sheet1!$B$2:$B$207</c:f>
+              <c:numCache>
+                <c:formatCode>General</c:formatCode>
+                <c:ptCount val="206"/>
+                <c:pt idx="0">
+                  <c:v>1231748</c:v>
+                </c:pt>
+                <c:pt idx="1">
+                  <c:v>1256521</c:v>
+                </c:pt>
+                <c:pt idx="2">
+                  <c:v>1373362</c:v>
+                </c:pt>
+                <c:pt idx="3">
+                  <c:v>1421948</c:v>
+                </c:pt>
+                <c:pt idx="4">
+                  <c:v>1744732</c:v>
+                </c:pt>
+                <c:pt idx="5">
+                  <c:v>1825499</c:v>
+                </c:pt>
+                <c:pt idx="6">
+                  <c:v>1772190</c:v>
+                </c:pt>
+                <c:pt idx="7">
+                  <c:v>1932171</c:v>
+                </c:pt>
+                <c:pt idx="8">
+                  <c:v>1972893</c:v>
+                </c:pt>
+                <c:pt idx="9">
+                  <c:v>2255306</c:v>
+                </c:pt>
+                <c:pt idx="10">
+                  <c:v>2259112</c:v>
+                </c:pt>
+                <c:pt idx="11">
+                  <c:v>2416113</c:v>
+                </c:pt>
+                <c:pt idx="12">
+                  <c:v>2521683</c:v>
+                </c:pt>
+                <c:pt idx="13">
+                  <c:v>2303029</c:v>
+                </c:pt>
+                <c:pt idx="14">
+                  <c:v>2608567</c:v>
+                </c:pt>
+                <c:pt idx="15">
+                  <c:v>2512518</c:v>
+                </c:pt>
+                <c:pt idx="16">
+                  <c:v>2303422</c:v>
+                </c:pt>
+                <c:pt idx="17">
+                  <c:v>2455973</c:v>
+                </c:pt>
+                <c:pt idx="18">
+                  <c:v>2583942</c:v>
+                </c:pt>
+                <c:pt idx="19">
+                  <c:v>2257050</c:v>
+                </c:pt>
+                <c:pt idx="20">
+                  <c:v>2448540</c:v>
+                </c:pt>
+                <c:pt idx="21">
+                  <c:v>2575019</c:v>
+                </c:pt>
+                <c:pt idx="22">
+                  <c:v>2261697</c:v>
+                </c:pt>
+                <c:pt idx="23">
+                  <c:v>2159903</c:v>
+                </c:pt>
+                <c:pt idx="24">
+                  <c:v>2130594</c:v>
+                </c:pt>
+                <c:pt idx="25">
+                  <c:v>2032985</c:v>
+                </c:pt>
+                <c:pt idx="26">
+                  <c:v>1923908</c:v>
+                </c:pt>
+                <c:pt idx="27">
+                  <c:v>1728939</c:v>
+                </c:pt>
+                <c:pt idx="28">
+                  <c:v>1788653</c:v>
+                </c:pt>
+                <c:pt idx="29">
+                  <c:v>1603236</c:v>
+                </c:pt>
+                <c:pt idx="30">
+                  <c:v>1567491</c:v>
+                </c:pt>
+                <c:pt idx="31">
+                  <c:v>1304181</c:v>
+                </c:pt>
+                <c:pt idx="32">
+                  <c:v>1296422</c:v>
+                </c:pt>
+                <c:pt idx="33">
+                  <c:v>1192133</c:v>
+                </c:pt>
+                <c:pt idx="34">
+                  <c:v>1043671</c:v>
+                </c:pt>
+                <c:pt idx="35">
+                  <c:v>842761</c:v>
+                </c:pt>
+                <c:pt idx="36">
+                  <c:v>813197</c:v>
+                </c:pt>
+                <c:pt idx="37">
+                  <c:v>774778</c:v>
+                </c:pt>
+                <c:pt idx="38">
+                  <c:v>658215</c:v>
+                </c:pt>
+                <c:pt idx="39">
+                  <c:v>654357</c:v>
+                </c:pt>
+                <c:pt idx="40">
+                  <c:v>560448</c:v>
+                </c:pt>
+                <c:pt idx="41">
+                  <c:v>612921</c:v>
+                </c:pt>
+                <c:pt idx="42">
+                  <c:v>604641</c:v>
+                </c:pt>
+                <c:pt idx="43">
+                  <c:v>502314</c:v>
+                </c:pt>
+                <c:pt idx="44">
+                  <c:v>534741</c:v>
+                </c:pt>
+                <c:pt idx="45">
+                  <c:v>586195</c:v>
+                </c:pt>
+                <c:pt idx="46">
+                  <c:v>604779</c:v>
+                </c:pt>
+                <c:pt idx="47">
+                  <c:v>694927</c:v>
+                </c:pt>
+                <c:pt idx="48">
+                  <c:v>746523</c:v>
+                </c:pt>
+                <c:pt idx="49">
+                  <c:v>792377</c:v>
+                </c:pt>
+                <c:pt idx="50">
+                  <c:v>788941</c:v>
+                </c:pt>
+                <c:pt idx="51">
+                  <c:v>962415</c:v>
+                </c:pt>
+                <c:pt idx="52">
+                  <c:v>970174</c:v>
+                </c:pt>
+                <c:pt idx="53">
+                  <c:v>1137781</c:v>
+                </c:pt>
+                <c:pt idx="54">
+                  <c:v>1149630</c:v>
+                </c:pt>
+                <c:pt idx="55">
+                  <c:v>1308437</c:v>
+                </c:pt>
+                <c:pt idx="56">
+                  <c:v>1587123</c:v>
+                </c:pt>
+                <c:pt idx="57">
+                  <c:v>1602953</c:v>
+                </c:pt>
+                <c:pt idx="58">
+                  <c:v>1701204</c:v>
+                </c:pt>
+                <c:pt idx="59">
+                  <c:v>1703807</c:v>
+                </c:pt>
+                <c:pt idx="60">
+                  <c:v>2002322</c:v>
+                </c:pt>
+                <c:pt idx="61">
+                  <c:v>2089970</c:v>
+                </c:pt>
+                <c:pt idx="62">
+                  <c:v>1970980</c:v>
+                </c:pt>
+                <c:pt idx="63">
+                  <c:v>2110359</c:v>
+                </c:pt>
+                <c:pt idx="64">
+                  <c:v>2078657</c:v>
+                </c:pt>
+                <c:pt idx="65">
+                  <c:v>2234845</c:v>
+                </c:pt>
+                <c:pt idx="66">
+                  <c:v>2503100</c:v>
+                </c:pt>
+                <c:pt idx="67">
+                  <c:v>2365800</c:v>
+                </c:pt>
+                <c:pt idx="68">
+                  <c:v>2140637</c:v>
+                </c:pt>
+                <c:pt idx="69">
+                  <c:v>2590972</c:v>
+                </c:pt>
+                <c:pt idx="70">
+                  <c:v>2406759</c:v>
+                </c:pt>
+                <c:pt idx="71">
+                  <c:v>2545683</c:v>
+                </c:pt>
+                <c:pt idx="72">
+                  <c:v>2444238</c:v>
+                </c:pt>
+                <c:pt idx="73">
+                  <c:v>2289424</c:v>
+                </c:pt>
+                <c:pt idx="74">
+                  <c:v>2130720</c:v>
+                </c:pt>
+                <c:pt idx="75">
+                  <c:v>2426104</c:v>
+                </c:pt>
+                <c:pt idx="76">
+                  <c:v>2150546</c:v>
+                </c:pt>
+                <c:pt idx="77">
+                  <c:v>2158660</c:v>
+                </c:pt>
+                <c:pt idx="78">
+                  <c:v>2113568</c:v>
+                </c:pt>
+                <c:pt idx="79">
+                  <c:v>2012329</c:v>
+                </c:pt>
+                <c:pt idx="80">
+                  <c:v>2118468</c:v>
+                </c:pt>
+                <c:pt idx="81">
+                  <c:v>1880020</c:v>
+                </c:pt>
+                <c:pt idx="82">
+                  <c:v>1768299</c:v>
+                </c:pt>
+                <c:pt idx="83">
+                  <c:v>1657992</c:v>
+                </c:pt>
+                <c:pt idx="84">
+                  <c:v>1466589</c:v>
+                </c:pt>
+                <c:pt idx="85">
+                  <c:v>1384846</c:v>
+                </c:pt>
+                <c:pt idx="86">
+                  <c:v>1199553</c:v>
+                </c:pt>
+                <c:pt idx="87">
+                  <c:v>1212294</c:v>
+                </c:pt>
+                <c:pt idx="88">
+                  <c:v>1030042</c:v>
+                </c:pt>
+                <c:pt idx="89">
+                  <c:v>903699</c:v>
+                </c:pt>
+                <c:pt idx="90">
+                  <c:v>811171</c:v>
+                </c:pt>
+                <c:pt idx="91">
+                  <c:v>837627</c:v>
+                </c:pt>
+                <c:pt idx="92">
+                  <c:v>700490</c:v>
+                </c:pt>
+                <c:pt idx="93">
+                  <c:v>598628</c:v>
+                </c:pt>
+                <c:pt idx="94">
+                  <c:v>635737</c:v>
+                </c:pt>
+                <c:pt idx="95">
+                  <c:v>572698</c:v>
+                </c:pt>
+                <c:pt idx="96">
+                  <c:v>539577</c:v>
+                </c:pt>
+                <c:pt idx="97">
+                  <c:v>521695</c:v>
+                </c:pt>
+                <c:pt idx="98">
+                  <c:v>472384</c:v>
+                </c:pt>
+                <c:pt idx="99">
+                  <c:v>659457</c:v>
+                </c:pt>
+                <c:pt idx="100">
+                  <c:v>505031</c:v>
+                </c:pt>
+                <c:pt idx="101">
+                  <c:v>678356</c:v>
+                </c:pt>
+                <c:pt idx="102">
+                  <c:v>760271</c:v>
+                </c:pt>
+                <c:pt idx="103">
+                  <c:v>769687</c:v>
+                </c:pt>
+                <c:pt idx="104">
+                  <c:v>939332</c:v>
+                </c:pt>
+                <c:pt idx="105">
+                  <c:v>885131</c:v>
+                </c:pt>
+                <c:pt idx="106">
+                  <c:v>946065</c:v>
+                </c:pt>
+                <c:pt idx="107">
+                  <c:v>1019909</c:v>
+                </c:pt>
+                <c:pt idx="108">
+                  <c:v>1372824</c:v>
+                </c:pt>
+                <c:pt idx="109">
+                  <c:v>1389790</c:v>
+                </c:pt>
+                <c:pt idx="110">
+                  <c:v>1461555</c:v>
+                </c:pt>
+                <c:pt idx="111">
+                  <c:v>1582402</c:v>
+                </c:pt>
+                <c:pt idx="112">
+                  <c:v>1738543</c:v>
+                </c:pt>
+                <c:pt idx="113">
+                  <c:v>1844644</c:v>
+                </c:pt>
+                <c:pt idx="114">
+                  <c:v>1933303</c:v>
+                </c:pt>
+                <c:pt idx="115">
+                  <c:v>2150186</c:v>
+                </c:pt>
+                <c:pt idx="116">
+                  <c:v>2155240</c:v>
+                </c:pt>
+                <c:pt idx="117">
+                  <c:v>2233044</c:v>
+                </c:pt>
+                <c:pt idx="118">
+                  <c:v>2069135</c:v>
+                </c:pt>
+                <c:pt idx="119">
+                  <c:v>2315121</c:v>
+                </c:pt>
+                <c:pt idx="120">
+                  <c:v>2530194</c:v>
+                </c:pt>
+                <c:pt idx="121">
+                  <c:v>2400308</c:v>
+                </c:pt>
+                <c:pt idx="122">
+                  <c:v>2285307</c:v>
+                </c:pt>
+                <c:pt idx="123">
+                  <c:v>2259858</c:v>
+                </c:pt>
+                <c:pt idx="124">
+                  <c:v>2369209</c:v>
+                </c:pt>
+                <c:pt idx="125">
+                  <c:v>2631326</c:v>
+                </c:pt>
+                <c:pt idx="126">
+                  <c:v>2541690</c:v>
+                </c:pt>
+                <c:pt idx="127">
+                  <c:v>2471653</c:v>
+                </c:pt>
+                <c:pt idx="128">
+                  <c:v>2386617</c:v>
+                </c:pt>
+                <c:pt idx="129">
+                  <c:v>2366050</c:v>
+                </c:pt>
+                <c:pt idx="130">
+                  <c:v>2226022</c:v>
+                </c:pt>
+                <c:pt idx="131">
+                  <c:v>2224689</c:v>
+                </c:pt>
+                <c:pt idx="132">
+                  <c:v>1916333</c:v>
+                </c:pt>
+                <c:pt idx="133">
+                  <c:v>2123730</c:v>
+                </c:pt>
+                <c:pt idx="134">
+                  <c:v>1842790</c:v>
+                </c:pt>
+                <c:pt idx="135">
+                  <c:v>1711997</c:v>
+                </c:pt>
+                <c:pt idx="136">
+                  <c:v>1635090</c:v>
+                </c:pt>
+                <c:pt idx="137">
+                  <c:v>1646011</c:v>
+                </c:pt>
+                <c:pt idx="138">
+                  <c:v>1454936</c:v>
+                </c:pt>
+                <c:pt idx="139">
+                  <c:v>1305619</c:v>
+                </c:pt>
+                <c:pt idx="140">
+                  <c:v>1225634</c:v>
+                </c:pt>
+                <c:pt idx="141">
+                  <c:v>1164355</c:v>
+                </c:pt>
+                <c:pt idx="142">
+                  <c:v>1041623</c:v>
+                </c:pt>
+                <c:pt idx="143">
+                  <c:v>979730</c:v>
+                </c:pt>
+                <c:pt idx="144">
+                  <c:v>728584</c:v>
+                </c:pt>
+                <c:pt idx="145">
+                  <c:v>711636</c:v>
+                </c:pt>
+                <c:pt idx="146">
+                  <c:v>634713</c:v>
+                </c:pt>
+                <c:pt idx="147">
+                  <c:v>607107</c:v>
+                </c:pt>
+                <c:pt idx="148">
+                  <c:v>584946</c:v>
+                </c:pt>
+                <c:pt idx="149">
+                  <c:v>547163</c:v>
+                </c:pt>
+                <c:pt idx="150">
+                  <c:v>567256</c:v>
+                </c:pt>
+                <c:pt idx="151">
+                  <c:v>553340</c:v>
+                </c:pt>
+                <c:pt idx="152">
+                  <c:v>558660</c:v>
+                </c:pt>
+                <c:pt idx="153">
+                  <c:v>597452</c:v>
+                </c:pt>
+                <c:pt idx="154">
+                  <c:v>637221</c:v>
+                </c:pt>
+                <c:pt idx="155">
+                  <c:v>601975</c:v>
+                </c:pt>
+                <c:pt idx="156">
+                  <c:v>760694</c:v>
+                </c:pt>
+                <c:pt idx="157">
+                  <c:v>692800</c:v>
+                </c:pt>
+                <c:pt idx="158">
+                  <c:v>893815</c:v>
+                </c:pt>
+                <c:pt idx="159">
+                  <c:v>965126</c:v>
+                </c:pt>
+                <c:pt idx="160">
+                  <c:v>1104277</c:v>
+                </c:pt>
+                <c:pt idx="161">
+                  <c:v>1113555</c:v>
+                </c:pt>
+                <c:pt idx="162">
+                  <c:v>1218399</c:v>
+                </c:pt>
+                <c:pt idx="163">
+                  <c:v>1252926</c:v>
+                </c:pt>
+                <c:pt idx="164">
+                  <c:v>1471150</c:v>
+                </c:pt>
+                <c:pt idx="165">
+                  <c:v>1666640</c:v>
+                </c:pt>
+                <c:pt idx="166">
+                  <c:v>1638161</c:v>
+                </c:pt>
+                <c:pt idx="167">
+                  <c:v>1818373</c:v>
+                </c:pt>
+                <c:pt idx="168">
+                  <c:v>1905663</c:v>
+                </c:pt>
+                <c:pt idx="169">
+                  <c:v>1748806</c:v>
+                </c:pt>
+                <c:pt idx="170">
+                  <c:v>2154920</c:v>
+                </c:pt>
+                <c:pt idx="171">
+                  <c:v>2179144</c:v>
+                </c:pt>
+                <c:pt idx="172">
+                  <c:v>2175904</c:v>
+                </c:pt>
+                <c:pt idx="173">
+                  <c:v>2442952</c:v>
+                </c:pt>
+                <c:pt idx="174">
+                  <c:v>2277791</c:v>
+                </c:pt>
+                <c:pt idx="175">
+                  <c:v>2260572</c:v>
+                </c:pt>
+                <c:pt idx="176">
+                  <c:v>2312268</c:v>
+                </c:pt>
+                <c:pt idx="177">
+                  <c:v>2589391</c:v>
+                </c:pt>
+                <c:pt idx="178">
+                  <c:v>2494546</c:v>
+                </c:pt>
+                <c:pt idx="179">
+                  <c:v>2568028</c:v>
+                </c:pt>
+                <c:pt idx="180">
+                  <c:v>2309171</c:v>
+                </c:pt>
+                <c:pt idx="181">
+                  <c:v>2473909</c:v>
+                </c:pt>
+                <c:pt idx="182">
+                  <c:v>2468796</c:v>
+                </c:pt>
+                <c:pt idx="183">
+                  <c:v>2197396</c:v>
+                </c:pt>
+                <c:pt idx="184">
+                  <c:v>2187003</c:v>
+                </c:pt>
+                <c:pt idx="185">
+                  <c:v>2343884</c:v>
+                </c:pt>
+                <c:pt idx="186">
+                  <c:v>1957161</c:v>
+                </c:pt>
+                <c:pt idx="187">
+                  <c:v>1835883</c:v>
+                </c:pt>
+                <c:pt idx="188">
+                  <c:v>1942065</c:v>
+                </c:pt>
+                <c:pt idx="189">
+                  <c:v>1703690</c:v>
+                </c:pt>
+                <c:pt idx="190">
+                  <c:v>1595036</c:v>
+                </c:pt>
+                <c:pt idx="191">
+                  <c:v>1477403</c:v>
+                </c:pt>
+                <c:pt idx="192">
+                  <c:v>1378487</c:v>
+                </c:pt>
+                <c:pt idx="193">
+                  <c:v>1281694</c:v>
+                </c:pt>
+                <c:pt idx="194">
+                  <c:v>1151541</c:v>
+                </c:pt>
+                <c:pt idx="195">
+                  <c:v>1136383</c:v>
+                </c:pt>
+                <c:pt idx="196">
+                  <c:v>1033384</c:v>
+                </c:pt>
+                <c:pt idx="197">
+                  <c:v>929897</c:v>
+                </c:pt>
+                <c:pt idx="198">
+                  <c:v>879716</c:v>
+                </c:pt>
+                <c:pt idx="199">
+                  <c:v>673066</c:v>
+                </c:pt>
+                <c:pt idx="200">
+                  <c:v>683109</c:v>
+                </c:pt>
+                <c:pt idx="201">
+                  <c:v>611762</c:v>
+                </c:pt>
+                <c:pt idx="202">
+                  <c:v>600141</c:v>
+                </c:pt>
+                <c:pt idx="203">
+                  <c:v>570956</c:v>
+                </c:pt>
+                <c:pt idx="204">
+                  <c:v>595300</c:v>
+                </c:pt>
+                <c:pt idx="205">
+                  <c:v>602722</c:v>
+                </c:pt>
+              </c:numCache>
+            </c:numRef>
+          </c:val>
+          <c:smooth val="0"/>
+        </c:ser>
+        <c:ser>
+          <c:idx val="1"/>
+          <c:order val="1"/>
+          <c:tx>
+            <c:strRef>
+              <c:f>Sheet1!$C$1</c:f>
+              <c:strCache>
+                <c:ptCount val="1"/>
+                <c:pt idx="0">
+                  <c:v>7-day average</c:v>
+                </c:pt>
+              </c:strCache>
+            </c:strRef>
+          </c:tx>
+          <c:spPr>
+            <a:solidFill>
+              <a:srgbClr val="2F6DB5"/>
+            </a:solidFill>
+            <a:ln w="25400" cap="flat">
+              <a:solidFill>
+                <a:srgbClr val="2F6DB5"/>
+              </a:solidFill>
+              <a:prstDash val="solid"/>
+              <a:round/>
+            </a:ln>
+            <a:effectLst/>
+          </c:spPr>
+          <c:invertIfNegative val="0"/>
+          <c:dLbls>
+            <c:numFmt formatCode="#,##0" sourceLinked="0"/>
+            <c:txPr>
+              <a:bodyPr/>
+              <a:lstStyle/>
+              <a:p>
+                <a:pPr>
+                  <a:defRPr b="0" i="0" strike="noStrike" sz="1200" u="none">
+                    <a:solidFill>
+                      <a:srgbClr val="000000"/>
+                    </a:solidFill>
+                    <a:latin typeface="Arial"/>
+                  </a:defRPr>
+                </a:pPr>
+              </a:p>
+            </c:txPr>
+            <c:showLegendKey val="0"/>
+            <c:showVal val="0"/>
+            <c:showCatName val="0"/>
+            <c:showSerName val="0"/>
+            <c:showPercent val="0"/>
+            <c:showBubbleSize val="0"/>
+            <c:showLeaderLines val="0"/>
+          </c:dLbls>
+          <c:marker>
+            <c:symbol val="none"/>
+            <c:size val="6"/>
+            <c:spPr>
+              <a:solidFill>
+                <a:srgbClr val="2F6DB5"/>
+              </a:solidFill>
+              <a:ln w="9525" cap="flat">
+                <a:solidFill>
+                  <a:srgbClr val="2F6DB5"/>
+                </a:solidFill>
+                <a:prstDash val="solid"/>
+                <a:round/>
+              </a:ln>
+              <a:effectLst/>
+            </c:spPr>
+          </c:marker>
+          <c:cat>
+            <c:multiLvlStrRef>
+              <c:f>Sheet1!$A$2:$A$207</c:f>
+              <c:multiLvlStrCache>
+                <c:ptCount val="206"/>
+                <c:lvl>
+                  <c:pt idx="0">
+                    <c:v>2020</c:v>
+                  </c:pt>
+                  <c:pt idx="1">
+                    <c:v/>
+                  </c:pt>
+                  <c:pt idx="2">
+                    <c:v/>
+                  </c:pt>
+                  <c:pt idx="3">
+                    <c:v/>
+                  </c:pt>
+                  <c:pt idx="4">
+                    <c:v/>
+                  </c:pt>
+                  <c:pt idx="5">
+                    <c:v/>
+                  </c:pt>
+                  <c:pt idx="6">
+                    <c:v/>
+                  </c:pt>
+                  <c:pt idx="7">
+                    <c:v/>
+                  </c:pt>
+                  <c:pt idx="8">
+                    <c:v/>
+                  </c:pt>
+                  <c:pt idx="9">
+                    <c:v/>
+                  </c:pt>
+                  <c:pt idx="10">
+                    <c:v/>
+                  </c:pt>
+                  <c:pt idx="11">
+                    <c:v/>
+                  </c:pt>
+                  <c:pt idx="12">
+                    <c:v/>
+                  </c:pt>
+                  <c:pt idx="13">
+                    <c:v/>
+                  </c:pt>
+                  <c:pt idx="14">
+                    <c:v/>
+                  </c:pt>
+                  <c:pt idx="15">
+                    <c:v/>
+                  </c:pt>
+                  <c:pt idx="16">
+                    <c:v/>
+                  </c:pt>
+                  <c:pt idx="17">
+                    <c:v/>
+                  </c:pt>
+                  <c:pt idx="18">
+                    <c:v/>
+                  </c:pt>
+                  <c:pt idx="19">
+                    <c:v/>
+                  </c:pt>
+                  <c:pt idx="20">
+                    <c:v/>
+                  </c:pt>
+                  <c:pt idx="21">
+                    <c:v/>
+                  </c:pt>
+                  <c:pt idx="22">
+                    <c:v/>
+                  </c:pt>
+                  <c:pt idx="23">
+                    <c:v/>
+                  </c:pt>
+                  <c:pt idx="24">
+                    <c:v/>
+                  </c:pt>
+                  <c:pt idx="25">
+                    <c:v/>
+                  </c:pt>
+                  <c:pt idx="26">
+                    <c:v/>
+                  </c:pt>
+                  <c:pt idx="27">
+                    <c:v/>
+                  </c:pt>
+                  <c:pt idx="28">
+                    <c:v/>
+                  </c:pt>
+                  <c:pt idx="29">
+                    <c:v/>
+                  </c:pt>
+                  <c:pt idx="30">
+                    <c:v/>
+                  </c:pt>
+                  <c:pt idx="31">
+                    <c:v/>
+                  </c:pt>
+                  <c:pt idx="32">
+                    <c:v/>
+                  </c:pt>
+                  <c:pt idx="33">
+                    <c:v/>
+                  </c:pt>
+                  <c:pt idx="34">
+                    <c:v/>
+                  </c:pt>
+                  <c:pt idx="35">
+                    <c:v/>
+                  </c:pt>
+                  <c:pt idx="36">
+                    <c:v/>
+                  </c:pt>
+                  <c:pt idx="37">
+                    <c:v/>
+                  </c:pt>
+                  <c:pt idx="38">
+                    <c:v/>
+                  </c:pt>
+                  <c:pt idx="39">
+                    <c:v/>
+                  </c:pt>
+                  <c:pt idx="40">
+                    <c:v/>
+                  </c:pt>
+                  <c:pt idx="41">
+                    <c:v/>
+                  </c:pt>
+                  <c:pt idx="42">
+                    <c:v/>
+                  </c:pt>
+                  <c:pt idx="43">
+                    <c:v/>
+                  </c:pt>
+                  <c:pt idx="44">
+                    <c:v/>
+                  </c:pt>
+                  <c:pt idx="45">
+                    <c:v/>
+                  </c:pt>
+                  <c:pt idx="46">
+                    <c:v/>
+                  </c:pt>
+                  <c:pt idx="47">
+                    <c:v/>
+                  </c:pt>
+                  <c:pt idx="48">
+                    <c:v/>
+                  </c:pt>
+                  <c:pt idx="49">
+                    <c:v/>
+                  </c:pt>
+                  <c:pt idx="50">
+                    <c:v>2021</c:v>
+                  </c:pt>
+                  <c:pt idx="51">
+                    <c:v/>
+                  </c:pt>
+                  <c:pt idx="52">
+                    <c:v/>
+                  </c:pt>
+                  <c:pt idx="53">
+                    <c:v/>
+                  </c:pt>
+                  <c:pt idx="54">
+                    <c:v/>
+                  </c:pt>
+                  <c:pt idx="55">
+                    <c:v/>
+                  </c:pt>
+                  <c:pt idx="56">
+                    <c:v/>
+                  </c:pt>
+                  <c:pt idx="57">
+                    <c:v/>
+                  </c:pt>
+                  <c:pt idx="58">
+                    <c:v/>
+                  </c:pt>
+                  <c:pt idx="59">
+                    <c:v/>
+                  </c:pt>
+                  <c:pt idx="60">
+                    <c:v/>
+                  </c:pt>
+                  <c:pt idx="61">
+                    <c:v/>
+                  </c:pt>
+                  <c:pt idx="62">
+                    <c:v/>
+                  </c:pt>
+                  <c:pt idx="63">
+                    <c:v/>
+                  </c:pt>
+                  <c:pt idx="64">
+                    <c:v/>
+                  </c:pt>
+                  <c:pt idx="65">
+                    <c:v/>
+                  </c:pt>
+                  <c:pt idx="66">
+                    <c:v/>
+                  </c:pt>
+                  <c:pt idx="67">
+                    <c:v/>
+                  </c:pt>
+                  <c:pt idx="68">
+                    <c:v/>
+                  </c:pt>
+                  <c:pt idx="69">
+                    <c:v/>
+                  </c:pt>
+                  <c:pt idx="70">
+                    <c:v/>
+                  </c:pt>
+                  <c:pt idx="71">
+                    <c:v/>
+                  </c:pt>
+                  <c:pt idx="72">
+                    <c:v/>
+                  </c:pt>
+                  <c:pt idx="73">
+                    <c:v/>
+                  </c:pt>
+                  <c:pt idx="74">
+                    <c:v/>
+                  </c:pt>
+                  <c:pt idx="75">
+                    <c:v/>
+                  </c:pt>
+                  <c:pt idx="76">
+                    <c:v/>
+                  </c:pt>
+                  <c:pt idx="77">
+                    <c:v/>
+                  </c:pt>
+                  <c:pt idx="78">
+                    <c:v/>
+                  </c:pt>
+                  <c:pt idx="79">
+                    <c:v/>
+                  </c:pt>
+                  <c:pt idx="80">
+                    <c:v/>
+                  </c:pt>
+                  <c:pt idx="81">
+                    <c:v/>
+                  </c:pt>
+                  <c:pt idx="82">
+                    <c:v/>
+                  </c:pt>
+                  <c:pt idx="83">
+                    <c:v/>
+                  </c:pt>
+                  <c:pt idx="84">
+                    <c:v/>
+                  </c:pt>
+                  <c:pt idx="85">
+                    <c:v/>
+                  </c:pt>
+                  <c:pt idx="86">
+                    <c:v/>
+                  </c:pt>
+                  <c:pt idx="87">
+                    <c:v/>
+                  </c:pt>
+                  <c:pt idx="88">
+                    <c:v/>
+                  </c:pt>
+                  <c:pt idx="89">
+                    <c:v/>
+                  </c:pt>
+                  <c:pt idx="90">
+                    <c:v/>
+                  </c:pt>
+                  <c:pt idx="91">
+                    <c:v/>
+                  </c:pt>
+                  <c:pt idx="92">
+                    <c:v/>
+                  </c:pt>
+                  <c:pt idx="93">
+                    <c:v/>
+                  </c:pt>
+                  <c:pt idx="94">
+                    <c:v/>
+                  </c:pt>
+                  <c:pt idx="95">
+                    <c:v/>
+                  </c:pt>
+                  <c:pt idx="96">
+                    <c:v/>
+                  </c:pt>
+                  <c:pt idx="97">
+                    <c:v/>
+                  </c:pt>
+                  <c:pt idx="98">
+                    <c:v/>
+                  </c:pt>
+                  <c:pt idx="99">
+                    <c:v/>
+                  </c:pt>
+                  <c:pt idx="100">
+                    <c:v/>
+                  </c:pt>
+                  <c:pt idx="101">
+                    <c:v/>
+                  </c:pt>
+                  <c:pt idx="102">
+                    <c:v>2022</c:v>
+                  </c:pt>
+                  <c:pt idx="103">
+                    <c:v/>
+                  </c:pt>
+                  <c:pt idx="104">
+                    <c:v/>
+                  </c:pt>
+                  <c:pt idx="105">
+                    <c:v/>
+                  </c:pt>
+                  <c:pt idx="106">
+                    <c:v/>
+                  </c:pt>
+                  <c:pt idx="107">
+                    <c:v/>
+                  </c:pt>
+                  <c:pt idx="108">
+                    <c:v/>
+                  </c:pt>
+                  <c:pt idx="109">
+                    <c:v/>
+                  </c:pt>
+                  <c:pt idx="110">
+                    <c:v/>
+                  </c:pt>
+                  <c:pt idx="111">
+                    <c:v/>
+                  </c:pt>
+                  <c:pt idx="112">
+                    <c:v/>
+                  </c:pt>
+                  <c:pt idx="113">
+                    <c:v/>
+                  </c:pt>
+                  <c:pt idx="114">
+                    <c:v/>
+                  </c:pt>
+                  <c:pt idx="115">
+                    <c:v/>
+                  </c:pt>
+                  <c:pt idx="116">
+                    <c:v/>
+                  </c:pt>
+                  <c:pt idx="117">
+                    <c:v/>
+                  </c:pt>
+                  <c:pt idx="118">
+                    <c:v/>
+                  </c:pt>
+                  <c:pt idx="119">
+                    <c:v/>
+                  </c:pt>
+                  <c:pt idx="120">
+                    <c:v/>
+                  </c:pt>
+                  <c:pt idx="121">
+                    <c:v/>
+                  </c:pt>
+                  <c:pt idx="122">
+                    <c:v/>
+                  </c:pt>
+                  <c:pt idx="123">
+                    <c:v/>
+                  </c:pt>
+                  <c:pt idx="124">
+                    <c:v/>
+                  </c:pt>
+                  <c:pt idx="125">
+                    <c:v/>
+                  </c:pt>
+                  <c:pt idx="126">
+                    <c:v/>
+                  </c:pt>
+                  <c:pt idx="127">
+                    <c:v/>
+                  </c:pt>
+                  <c:pt idx="128">
+                    <c:v/>
+                  </c:pt>
+                  <c:pt idx="129">
+                    <c:v/>
+                  </c:pt>
+                  <c:pt idx="130">
+                    <c:v/>
+                  </c:pt>
+                  <c:pt idx="131">
+                    <c:v/>
+                  </c:pt>
+                  <c:pt idx="132">
+                    <c:v/>
+                  </c:pt>
+                  <c:pt idx="133">
+                    <c:v/>
+                  </c:pt>
+                  <c:pt idx="134">
+                    <c:v/>
+                  </c:pt>
+                  <c:pt idx="135">
+                    <c:v/>
+                  </c:pt>
+                  <c:pt idx="136">
+                    <c:v/>
+                  </c:pt>
+                  <c:pt idx="137">
+                    <c:v/>
+                  </c:pt>
+                  <c:pt idx="138">
+                    <c:v/>
+                  </c:pt>
+                  <c:pt idx="139">
+                    <c:v/>
+                  </c:pt>
+                  <c:pt idx="140">
+                    <c:v/>
+                  </c:pt>
+                  <c:pt idx="141">
+                    <c:v/>
+                  </c:pt>
+                  <c:pt idx="142">
+                    <c:v/>
+                  </c:pt>
+                  <c:pt idx="143">
+                    <c:v/>
+                  </c:pt>
+                  <c:pt idx="144">
+                    <c:v/>
+                  </c:pt>
+                  <c:pt idx="145">
+                    <c:v/>
+                  </c:pt>
+                  <c:pt idx="146">
+                    <c:v/>
+                  </c:pt>
+                  <c:pt idx="147">
+                    <c:v/>
+                  </c:pt>
+                  <c:pt idx="148">
+                    <c:v/>
+                  </c:pt>
+                  <c:pt idx="149">
+                    <c:v/>
+                  </c:pt>
+                  <c:pt idx="150">
+                    <c:v/>
+                  </c:pt>
+                  <c:pt idx="151">
+                    <c:v/>
+                  </c:pt>
+                  <c:pt idx="152">
+                    <c:v/>
+                  </c:pt>
+                  <c:pt idx="153">
+                    <c:v/>
+                  </c:pt>
+                  <c:pt idx="154">
+                    <c:v>2023</c:v>
+                  </c:pt>
+                  <c:pt idx="155">
+                    <c:v/>
+                  </c:pt>
+                  <c:pt idx="156">
+                    <c:v/>
+                  </c:pt>
+                  <c:pt idx="157">
+                    <c:v/>
+                  </c:pt>
+                  <c:pt idx="158">
+                    <c:v/>
+                  </c:pt>
+                  <c:pt idx="159">
+                    <c:v/>
+                  </c:pt>
+                  <c:pt idx="160">
+                    <c:v/>
+                  </c:pt>
+                  <c:pt idx="161">
+                    <c:v/>
+                  </c:pt>
+                  <c:pt idx="162">
+                    <c:v/>
+                  </c:pt>
+                  <c:pt idx="163">
+                    <c:v/>
+                  </c:pt>
+                  <c:pt idx="164">
+                    <c:v/>
+                  </c:pt>
+                  <c:pt idx="165">
+                    <c:v/>
+                  </c:pt>
+                  <c:pt idx="166">
+                    <c:v/>
+                  </c:pt>
+                  <c:pt idx="167">
+                    <c:v/>
+                  </c:pt>
+                  <c:pt idx="168">
+                    <c:v/>
+                  </c:pt>
+                  <c:pt idx="169">
+                    <c:v/>
+                  </c:pt>
+                  <c:pt idx="170">
+                    <c:v/>
+                  </c:pt>
+                  <c:pt idx="171">
+                    <c:v/>
+                  </c:pt>
+                  <c:pt idx="172">
+                    <c:v/>
+                  </c:pt>
+                  <c:pt idx="173">
+                    <c:v/>
+                  </c:pt>
+                  <c:pt idx="174">
+                    <c:v/>
+                  </c:pt>
+                  <c:pt idx="175">
+                    <c:v/>
+                  </c:pt>
+                  <c:pt idx="176">
+                    <c:v/>
+                  </c:pt>
+                  <c:pt idx="177">
+                    <c:v/>
+                  </c:pt>
+                  <c:pt idx="178">
+                    <c:v/>
+                  </c:pt>
+                  <c:pt idx="179">
+                    <c:v/>
+                  </c:pt>
+                  <c:pt idx="180">
+                    <c:v/>
+                  </c:pt>
+                  <c:pt idx="181">
+                    <c:v/>
+                  </c:pt>
+                  <c:pt idx="182">
+                    <c:v/>
+                  </c:pt>
+                  <c:pt idx="183">
+                    <c:v/>
+                  </c:pt>
+                  <c:pt idx="184">
+                    <c:v/>
+                  </c:pt>
+                  <c:pt idx="185">
+                    <c:v/>
+                  </c:pt>
+                  <c:pt idx="186">
+                    <c:v/>
+                  </c:pt>
+                  <c:pt idx="187">
+                    <c:v/>
+                  </c:pt>
+                  <c:pt idx="188">
+                    <c:v/>
+                  </c:pt>
+                  <c:pt idx="189">
+                    <c:v/>
+                  </c:pt>
+                  <c:pt idx="190">
+                    <c:v/>
+                  </c:pt>
+                  <c:pt idx="191">
+                    <c:v/>
+                  </c:pt>
+                  <c:pt idx="192">
+                    <c:v/>
+                  </c:pt>
+                  <c:pt idx="193">
+                    <c:v/>
+                  </c:pt>
+                  <c:pt idx="194">
+                    <c:v/>
+                  </c:pt>
+                  <c:pt idx="195">
+                    <c:v/>
+                  </c:pt>
+                  <c:pt idx="196">
+                    <c:v/>
+                  </c:pt>
+                  <c:pt idx="197">
+                    <c:v/>
+                  </c:pt>
+                  <c:pt idx="198">
+                    <c:v/>
+                  </c:pt>
+                  <c:pt idx="199">
+                    <c:v/>
+                  </c:pt>
+                  <c:pt idx="200">
+                    <c:v/>
+                  </c:pt>
+                  <c:pt idx="201">
+                    <c:v/>
+                  </c:pt>
+                  <c:pt idx="202">
+                    <c:v/>
+                  </c:pt>
+                  <c:pt idx="203">
+                    <c:v/>
+                  </c:pt>
+                  <c:pt idx="204">
+                    <c:v/>
+                  </c:pt>
+                  <c:pt idx="205">
+                    <c:v/>
+                  </c:pt>
+                </c:lvl>
+              </c:multiLvlStrCache>
+            </c:multiLvlStrRef>
+          </c:cat>
+          <c:val>
+            <c:numRef>
+              <c:f>Sheet1!$C$2:$C$207</c:f>
+              <c:numCache>
+                <c:formatCode>General</c:formatCode>
+                <c:ptCount val="206"/>
+                <c:pt idx="0">
+                  <c:v>1266956</c:v>
+                </c:pt>
+                <c:pt idx="1">
+                  <c:v>1265154.7</c:v>
+                </c:pt>
+                <c:pt idx="2">
+                  <c:v>1401649.9</c:v>
+                </c:pt>
+                <c:pt idx="3">
+                  <c:v>1492100.3</c:v>
+                </c:pt>
+                <c:pt idx="4">
+                  <c:v>1628468.3</c:v>
+                </c:pt>
+                <c:pt idx="5">
+                  <c:v>1779237</c:v>
+                </c:pt>
+                <c:pt idx="6">
+                  <c:v>1816180.6</c:v>
+                </c:pt>
+                <c:pt idx="7">
+                  <c:v>1922583.7</c:v>
+                </c:pt>
+                <c:pt idx="8">
+                  <c:v>2035817</c:v>
+                </c:pt>
+                <c:pt idx="9">
+                  <c:v>2192868.9</c:v>
+                </c:pt>
+                <c:pt idx="10">
+                  <c:v>2232935.7</c:v>
+                </c:pt>
+                <c:pt idx="11">
+                  <c:v>2246073.6</c:v>
+                </c:pt>
+                <c:pt idx="12">
+                  <c:v>2298248</c:v>
+                </c:pt>
+                <c:pt idx="13">
+                  <c:v>2339015.9</c:v>
+                </c:pt>
+                <c:pt idx="14">
+                  <c:v>2338395.4</c:v>
+                </c:pt>
+                <c:pt idx="15">
+                  <c:v>2413914</c:v>
+                </c:pt>
+                <c:pt idx="16">
+                  <c:v>2383797.1</c:v>
+                </c:pt>
+                <c:pt idx="17">
+                  <c:v>2345578.9</c:v>
+                </c:pt>
+                <c:pt idx="18">
+                  <c:v>2426120.6</c:v>
+                </c:pt>
+                <c:pt idx="19">
+                  <c:v>2352426.9</c:v>
+                </c:pt>
+                <c:pt idx="20">
+                  <c:v>2280174.9</c:v>
+                </c:pt>
+                <c:pt idx="21">
+                  <c:v>2366632.7</c:v>
+                </c:pt>
+                <c:pt idx="22">
+                  <c:v>2199280.9</c:v>
+                </c:pt>
+                <c:pt idx="23">
+                  <c:v>2198263.1</c:v>
+                </c:pt>
+                <c:pt idx="24">
+                  <c:v>2078844.6</c:v>
+                </c:pt>
+                <c:pt idx="25">
+                  <c:v>2014620</c:v>
+                </c:pt>
+                <c:pt idx="26">
+                  <c:v>1897394.9</c:v>
+                </c:pt>
+                <c:pt idx="27">
+                  <c:v>1818230</c:v>
+                </c:pt>
+                <c:pt idx="28">
+                  <c:v>1729445.9</c:v>
+                </c:pt>
+                <c:pt idx="29">
+                  <c:v>1561231.7</c:v>
+                </c:pt>
+                <c:pt idx="30">
+                  <c:v>1492941.7</c:v>
+                </c:pt>
+                <c:pt idx="31">
+                  <c:v>1372115</c:v>
+                </c:pt>
+                <c:pt idx="32">
+                  <c:v>1266913.3</c:v>
+                </c:pt>
+                <c:pt idx="33">
+                  <c:v>1110834.6</c:v>
+                </c:pt>
+                <c:pt idx="34">
+                  <c:v>1055302.1</c:v>
+                </c:pt>
+                <c:pt idx="35">
+                  <c:v>943707.7</c:v>
+                </c:pt>
+                <c:pt idx="36">
+                  <c:v>830556.1</c:v>
+                </c:pt>
+                <c:pt idx="37">
+                  <c:v>766048.3</c:v>
+                </c:pt>
+                <c:pt idx="38">
+                  <c:v>708498.3</c:v>
+                </c:pt>
+                <c:pt idx="39">
+                  <c:v>667834.9</c:v>
+                </c:pt>
+                <c:pt idx="40">
+                  <c:v>621207</c:v>
+                </c:pt>
+                <c:pt idx="41">
+                  <c:v>588747.4</c:v>
+                </c:pt>
+                <c:pt idx="42">
+                  <c:v>564737.1</c:v>
+                </c:pt>
+                <c:pt idx="43">
+                  <c:v>552208.4</c:v>
+                </c:pt>
+                <c:pt idx="44">
+                  <c:v>542460.3</c:v>
+                </c:pt>
+                <c:pt idx="45">
+                  <c:v>579334.3</c:v>
+                </c:pt>
+                <c:pt idx="46">
+                  <c:v>594223.6</c:v>
+                </c:pt>
+                <c:pt idx="47">
+                  <c:v>668621.1</c:v>
+                </c:pt>
+                <c:pt idx="48">
+                  <c:v>689478</c:v>
+                </c:pt>
+                <c:pt idx="49">
+                  <c:v>757219.1</c:v>
+                </c:pt>
+                <c:pt idx="50">
+                  <c:v>826572.6</c:v>
+                </c:pt>
+                <c:pt idx="51">
+                  <c:v>929944.7</c:v>
+                </c:pt>
+                <c:pt idx="52">
+                  <c:v>1000641.6</c:v>
+                </c:pt>
+                <c:pt idx="53">
+                  <c:v>1099921.3</c:v>
+                </c:pt>
+                <c:pt idx="54">
+                  <c:v>1223043.1</c:v>
+                </c:pt>
+                <c:pt idx="55">
+                  <c:v>1363047.9</c:v>
+                </c:pt>
+                <c:pt idx="56">
+                  <c:v>1463906.9</c:v>
+                </c:pt>
+                <c:pt idx="57">
+                  <c:v>1542009.4</c:v>
+                </c:pt>
+                <c:pt idx="58">
+                  <c:v>1671440.7</c:v>
+                </c:pt>
+                <c:pt idx="59">
+                  <c:v>1676757.3</c:v>
+                </c:pt>
+                <c:pt idx="60">
+                  <c:v>1829110.1</c:v>
+                </c:pt>
+                <c:pt idx="61">
+                  <c:v>1968409</c:v>
+                </c:pt>
+                <c:pt idx="62">
+                  <c:v>2040638.7</c:v>
+                </c:pt>
+                <c:pt idx="63">
+                  <c:v>2189055</c:v>
+                </c:pt>
+                <c:pt idx="64">
+                  <c:v>2144189.1</c:v>
+                </c:pt>
+                <c:pt idx="65">
+                  <c:v>2342142.9</c:v>
+                </c:pt>
+                <c:pt idx="66">
+                  <c:v>2279885.4</c:v>
+                </c:pt>
+                <c:pt idx="67">
+                  <c:v>2439174</c:v>
+                </c:pt>
+                <c:pt idx="68">
+                  <c:v>2359511.7</c:v>
+                </c:pt>
+                <c:pt idx="69">
+                  <c:v>2445524.6</c:v>
+                </c:pt>
+                <c:pt idx="70">
+                  <c:v>2392373.1</c:v>
+                </c:pt>
+                <c:pt idx="71">
+                  <c:v>2444874.1</c:v>
+                </c:pt>
+                <c:pt idx="72">
+                  <c:v>2362560</c:v>
+                </c:pt>
+                <c:pt idx="73">
+                  <c:v>2377290.1</c:v>
+                </c:pt>
+                <c:pt idx="74">
+                  <c:v>2299905.7</c:v>
+                </c:pt>
+                <c:pt idx="75">
+                  <c:v>2273529.1</c:v>
+                </c:pt>
+                <c:pt idx="76">
+                  <c:v>2285482.3</c:v>
+                </c:pt>
+                <c:pt idx="77">
+                  <c:v>2246259.3</c:v>
+                </c:pt>
+                <c:pt idx="78">
+                  <c:v>2070971.6</c:v>
+                </c:pt>
+                <c:pt idx="79">
+                  <c:v>1899355.1</c:v>
+                </c:pt>
+                <c:pt idx="80">
+                  <c:v>1922554.6</c:v>
+                </c:pt>
+                <c:pt idx="81">
+                  <c:v>1771523.3</c:v>
+                </c:pt>
+                <c:pt idx="82">
+                  <c:v>1664940.7</c:v>
+                </c:pt>
+                <c:pt idx="83">
+                  <c:v>1580867</c:v>
+                </c:pt>
+                <c:pt idx="84">
+                  <c:v>1459916.4</c:v>
+                </c:pt>
+                <c:pt idx="85">
+                  <c:v>1331173.3</c:v>
+                </c:pt>
+                <c:pt idx="86">
+                  <c:v>1224257.7</c:v>
+                </c:pt>
+                <c:pt idx="87">
+                  <c:v>1180585.6</c:v>
+                </c:pt>
+                <c:pt idx="88">
+                  <c:v>1004915.4</c:v>
+                </c:pt>
+                <c:pt idx="89">
+                  <c:v>953017.6</c:v>
+                </c:pt>
+                <c:pt idx="90">
+                  <c:v>846540.3</c:v>
+                </c:pt>
+                <c:pt idx="91">
+                  <c:v>771766.6</c:v>
+                </c:pt>
+                <c:pt idx="92">
+                  <c:v>712962.4</c:v>
+                </c:pt>
+                <c:pt idx="93">
+                  <c:v>644580.4</c:v>
+                </c:pt>
+                <c:pt idx="94">
+                  <c:v>622661.4</c:v>
+                </c:pt>
+                <c:pt idx="95">
+                  <c:v>571966.9</c:v>
+                </c:pt>
+                <c:pt idx="96">
+                  <c:v>547681</c:v>
+                </c:pt>
+                <c:pt idx="97">
+                  <c:v>553965.3</c:v>
+                </c:pt>
+                <c:pt idx="98">
+                  <c:v>536247.1</c:v>
+                </c:pt>
+                <c:pt idx="99">
+                  <c:v>606809.1</c:v>
+                </c:pt>
+                <c:pt idx="100">
+                  <c:v>593418.4</c:v>
+                </c:pt>
+                <c:pt idx="101">
+                  <c:v>686308.6</c:v>
+                </c:pt>
+                <c:pt idx="102">
+                  <c:v>706451.4</c:v>
+                </c:pt>
+                <c:pt idx="103">
+                  <c:v>769075.6</c:v>
+                </c:pt>
+                <c:pt idx="104">
+                  <c:v>837447.7</c:v>
+                </c:pt>
+                <c:pt idx="105">
+                  <c:v>938926.4</c:v>
+                </c:pt>
+                <c:pt idx="106">
+                  <c:v>1034504.6</c:v>
+                </c:pt>
+                <c:pt idx="107">
+                  <c:v>1121548.7</c:v>
+                </c:pt>
+                <c:pt idx="108">
+                  <c:v>1211959</c:v>
+                </c:pt>
+                <c:pt idx="109">
+                  <c:v>1319676.3</c:v>
+                </c:pt>
+                <c:pt idx="110">
+                  <c:v>1484567.6</c:v>
+                </c:pt>
+                <c:pt idx="111">
+                  <c:v>1561965</c:v>
+                </c:pt>
+                <c:pt idx="112">
+                  <c:v>1668209.3</c:v>
+                </c:pt>
+                <c:pt idx="113">
+                  <c:v>1725529.3</c:v>
+                </c:pt>
+                <c:pt idx="114">
+                  <c:v>1809608</c:v>
+                </c:pt>
+                <c:pt idx="115">
+                  <c:v>2032017.7</c:v>
+                </c:pt>
+                <c:pt idx="116">
+                  <c:v>2091561.6</c:v>
+                </c:pt>
+                <c:pt idx="117">
+                  <c:v>2199606.7</c:v>
+                </c:pt>
+                <c:pt idx="118">
+                  <c:v>2213870.1</c:v>
+                </c:pt>
+                <c:pt idx="119">
+                  <c:v>2323908.9</c:v>
+                </c:pt>
+                <c:pt idx="120">
+                  <c:v>2307755</c:v>
+                </c:pt>
+                <c:pt idx="121">
+                  <c:v>2404526.6</c:v>
+                </c:pt>
+                <c:pt idx="122">
+                  <c:v>2359805.6</c:v>
+                </c:pt>
+                <c:pt idx="123">
+                  <c:v>2393910.6</c:v>
+                </c:pt>
+                <c:pt idx="124">
+                  <c:v>2347784.7</c:v>
+                </c:pt>
+                <c:pt idx="125">
+                  <c:v>2466130.1</c:v>
+                </c:pt>
+                <c:pt idx="126">
+                  <c:v>2422673</c:v>
+                </c:pt>
+                <c:pt idx="127">
+                  <c:v>2428828.3</c:v>
+                </c:pt>
+                <c:pt idx="128">
+                  <c:v>2351022.7</c:v>
+                </c:pt>
+                <c:pt idx="129">
+                  <c:v>2231521.1</c:v>
+                </c:pt>
+                <c:pt idx="130">
+                  <c:v>2208327</c:v>
+                </c:pt>
+                <c:pt idx="131">
+                  <c:v>2186186.7</c:v>
+                </c:pt>
+                <c:pt idx="132">
+                  <c:v>1989114.4</c:v>
+                </c:pt>
+                <c:pt idx="133">
+                  <c:v>1909366.1</c:v>
+                </c:pt>
+                <c:pt idx="134">
+                  <c:v>1831939.7</c:v>
+                </c:pt>
+                <c:pt idx="135">
+                  <c:v>1771601</c:v>
+                </c:pt>
+                <c:pt idx="136">
+                  <c:v>1673750.3</c:v>
+                </c:pt>
+                <c:pt idx="137">
+                  <c:v>1570603.3</c:v>
+                </c:pt>
+                <c:pt idx="138">
+                  <c:v>1490546</c:v>
+                </c:pt>
+                <c:pt idx="139">
+                  <c:v>1332809.9</c:v>
+                </c:pt>
+                <c:pt idx="140">
+                  <c:v>1246751.1</c:v>
+                </c:pt>
+                <c:pt idx="141">
+                  <c:v>1122168.3</c:v>
+                </c:pt>
+                <c:pt idx="142">
+                  <c:v>997341.4</c:v>
+                </c:pt>
+                <c:pt idx="143">
+                  <c:v>917990.4</c:v>
+                </c:pt>
+                <c:pt idx="144">
+                  <c:v>824229.4</c:v>
+                </c:pt>
+                <c:pt idx="145">
+                  <c:v>775463.4</c:v>
+                </c:pt>
+                <c:pt idx="146">
+                  <c:v>702397.6</c:v>
+                </c:pt>
+                <c:pt idx="147">
+                  <c:v>634480</c:v>
+                </c:pt>
+                <c:pt idx="148">
+                  <c:v>603080.4</c:v>
+                </c:pt>
+                <c:pt idx="149">
+                  <c:v>588590.9</c:v>
+                </c:pt>
+                <c:pt idx="150">
+                  <c:v>551402.3</c:v>
+                </c:pt>
+                <c:pt idx="151">
+                  <c:v>560025.4</c:v>
+                </c:pt>
+                <c:pt idx="152">
+                  <c:v>559120.7</c:v>
+                </c:pt>
+                <c:pt idx="153">
+                  <c:v>562154.7</c:v>
+                </c:pt>
+                <c:pt idx="154">
+                  <c:v>626742.1</c:v>
+                </c:pt>
+                <c:pt idx="155">
+                  <c:v>656718.9</c:v>
+                </c:pt>
+                <c:pt idx="156">
+                  <c:v>748588.6</c:v>
+                </c:pt>
+                <c:pt idx="157">
+                  <c:v>749353.9</c:v>
+                </c:pt>
+                <c:pt idx="158">
+                  <c:v>850508.9</c:v>
+                </c:pt>
+                <c:pt idx="159">
+                  <c:v>975436.9</c:v>
+                </c:pt>
+                <c:pt idx="160">
+                  <c:v>1074803.4</c:v>
+                </c:pt>
+                <c:pt idx="161">
+                  <c:v>1105937.9</c:v>
+                </c:pt>
+                <c:pt idx="162">
+                  <c:v>1236256</c:v>
+                </c:pt>
+                <c:pt idx="163">
+                  <c:v>1375126.6</c:v>
+                </c:pt>
+                <c:pt idx="164">
+                  <c:v>1431839.9</c:v>
+                </c:pt>
+                <c:pt idx="165">
+                  <c:v>1587752.9</c:v>
+                </c:pt>
+                <c:pt idx="166">
+                  <c:v>1749109.7</c:v>
+                </c:pt>
+                <c:pt idx="167">
+                  <c:v>1762950.4</c:v>
+                </c:pt>
+                <c:pt idx="168">
+                  <c:v>1819682.4</c:v>
+                </c:pt>
+                <c:pt idx="169">
+                  <c:v>1959078.9</c:v>
+                </c:pt>
+                <c:pt idx="170">
+                  <c:v>2081411.1</c:v>
+                </c:pt>
+                <c:pt idx="171">
+                  <c:v>2151410</c:v>
+                </c:pt>
+                <c:pt idx="172">
+                  <c:v>2239716.1</c:v>
+                </c:pt>
+                <c:pt idx="173">
+                  <c:v>2323205.6</c:v>
+                </c:pt>
+                <c:pt idx="174">
+                  <c:v>2359941.6</c:v>
+                </c:pt>
+                <c:pt idx="175">
+                  <c:v>2265162.4</c:v>
+                </c:pt>
+                <c:pt idx="176">
+                  <c:v>2358540.1</c:v>
+                </c:pt>
+                <c:pt idx="177">
+                  <c:v>2451547.4</c:v>
+                </c:pt>
+                <c:pt idx="178">
+                  <c:v>2479569</c:v>
+                </c:pt>
+                <c:pt idx="179">
+                  <c:v>2447961.1</c:v>
+                </c:pt>
+                <c:pt idx="180">
+                  <c:v>2450734.3</c:v>
+                </c:pt>
+                <c:pt idx="181">
+                  <c:v>2384373.4</c:v>
+                </c:pt>
+                <c:pt idx="182">
+                  <c:v>2374030.4</c:v>
+                </c:pt>
+                <c:pt idx="183">
+                  <c:v>2249653.7</c:v>
+                </c:pt>
+                <c:pt idx="184">
+                  <c:v>2250179.9</c:v>
+                </c:pt>
+                <c:pt idx="185">
+                  <c:v>2158632</c:v>
+                </c:pt>
+                <c:pt idx="186">
+                  <c:v>2067869</c:v>
+                </c:pt>
+                <c:pt idx="187">
+                  <c:v>1952002.4</c:v>
+                </c:pt>
+                <c:pt idx="188">
+                  <c:v>1872628</c:v>
+                </c:pt>
+                <c:pt idx="189">
+                  <c:v>1768658.1</c:v>
+                </c:pt>
+                <c:pt idx="190">
+                  <c:v>1644170.9</c:v>
+                </c:pt>
+                <c:pt idx="191">
+                  <c:v>1547310.3</c:v>
+                </c:pt>
+                <c:pt idx="192">
+                  <c:v>1379433.6</c:v>
+                </c:pt>
+                <c:pt idx="193">
+                  <c:v>1316697.3</c:v>
+                </c:pt>
+                <c:pt idx="194">
+                  <c:v>1185364</c:v>
+                </c:pt>
+                <c:pt idx="195">
+                  <c:v>1097426.6</c:v>
+                </c:pt>
+                <c:pt idx="196">
+                  <c:v>1043915.7</c:v>
+                </c:pt>
+                <c:pt idx="197">
+                  <c:v>927449.3</c:v>
+                </c:pt>
+                <c:pt idx="198">
+                  <c:v>838158.1</c:v>
+                </c:pt>
+                <c:pt idx="199">
+                  <c:v>738511.7</c:v>
+                </c:pt>
+                <c:pt idx="200">
+                  <c:v>697783.9</c:v>
+                </c:pt>
+                <c:pt idx="201">
+                  <c:v>634426.1</c:v>
+                </c:pt>
+                <c:pt idx="202">
+                  <c:v>609528.7</c:v>
+                </c:pt>
+                <c:pt idx="203">
+                  <c:v>548204.7</c:v>
+                </c:pt>
+                <c:pt idx="204">
+                  <c:v>555120.9</c:v>
+                </c:pt>
+                <c:pt idx="205">
+                  <c:v>576677</c:v>
+                </c:pt>
+              </c:numCache>
+            </c:numRef>
+          </c:val>
+          <c:smooth val="0"/>
+        </c:ser>
+        <c:dLbls>
+          <c:numFmt formatCode="#,##0" sourceLinked="0"/>
+          <c:txPr>
+            <a:bodyPr/>
+            <a:lstStyle/>
+            <a:p>
+              <a:pPr>
+                <a:defRPr b="0" i="0" strike="noStrike" sz="1200" u="none">
+                  <a:solidFill>
+                    <a:srgbClr val="000000"/>
+                  </a:solidFill>
+                  <a:latin typeface="Arial"/>
+                </a:defRPr>
+              </a:pPr>
+            </a:p>
+          </c:txPr>
+          <c:showLegendKey val="0"/>
+          <c:showVal val="0"/>
+          <c:showCatName val="0"/>
+          <c:showSerName val="0"/>
+          <c:showPercent val="0"/>
+          <c:showBubbleSize val="0"/>
+          <c:showLeaderLines val="0"/>
+        </c:dLbls>
+        <c:marker val="1"/>
+        <c:axId val="2094734554"/>
+        <c:axId val="2094734552"/>
+        <c:axId val="2094734556"/>
+      </c:lineChart>
+      <c:catAx>
+        <c:axId val="2094734554"/>
+        <c:scaling>
+          <c:orientation val="minMax"/>
+        </c:scaling>
+        <c:delete val="0"/>
+        <c:axPos val="b"/>
+        <c:numFmt formatCode="General" sourceLinked="1"/>
+        <c:majorTickMark val="out"/>
+        <c:minorTickMark val="none"/>
+        <c:tickLblPos val="low"/>
+        <c:spPr>
+          <a:ln w="12700" cap="flat">
+            <a:noFill/>
+            <a:prstDash val="solid"/>
+            <a:round/>
+          </a:ln>
+        </c:spPr>
+        <c:txPr>
+          <a:bodyPr/>
+          <a:lstStyle/>
+          <a:p>
+            <a:pPr>
+              <a:defRPr sz="1200" b="0" i="0" u="none" strike="noStrike">
+                <a:solidFill>
+                  <a:srgbClr val="6B7686"/>
+                </a:solidFill>
+                <a:latin typeface="+mn-lt"/>
+              </a:defRPr>
+            </a:pPr>
+            <a:endParaRPr lang="en-US"/>
+          </a:p>
+        </c:txPr>
+        <c:crossAx val="2094734552"/>
+        <c:crosses val="autoZero"/>
+        <c:auto val="1"/>
+        <c:lblAlgn val="ctr"/>
+        <c:noMultiLvlLbl val="1"/>
+        <c:tickLblSkip val="1"/>
+      </c:catAx>
+      <c:valAx>
+        <c:axId val="2094734552"/>
+        <c:scaling>
+          <c:orientation val="minMax"/>
+        </c:scaling>
+        <c:delete val="0"/>
+        <c:axPos val="l"/>
+        <c:majorGridlines>
+          <c:spPr>
+            <a:ln w="6350" cap="flat">
+              <a:solidFill>
+                <a:srgbClr val="E3E8EE"/>
+              </a:solidFill>
+              <a:prstDash val="solid"/>
+              <a:round/>
+            </a:ln>
+          </c:spPr>
+        </c:majorGridlines>
+        <c:numFmt formatCode="0.0,,&quot;M&quot;" sourceLinked="0"/>
+        <c:majorTickMark val="out"/>
+        <c:minorTickMark val="none"/>
+        <c:tickLblPos val="nextTo"/>
+        <c:spPr>
+          <a:ln w="12700" cap="flat">
+            <a:noFill/>
+            <a:prstDash val="solid"/>
+            <a:round/>
+          </a:ln>
+        </c:spPr>
+        <c:txPr>
+          <a:bodyPr/>
+          <a:lstStyle/>
+          <a:p>
+            <a:pPr>
+              <a:defRPr sz="1100" b="0" i="0" u="none" strike="noStrike">
+                <a:solidFill>
+                  <a:srgbClr val="6B7686"/>
+                </a:solidFill>
+                <a:latin typeface="+mn-lt"/>
+              </a:defRPr>
+            </a:pPr>
+            <a:endParaRPr lang="en-US"/>
+          </a:p>
+        </c:txPr>
+        <c:crossAx val="2094734554"/>
+        <c:crosses val="autoZero"/>
+        <c:crossBetween val="between"/>
+      </c:valAx>
+      <c:spPr>
+        <a:noFill/>
+        <a:ln>
+          <a:noFill/>
+        </a:ln>
+        <a:effectLst/>
+      </c:spPr>
+    </c:plotArea>
+    <c:legend>
+      <c:legendPos val="t"/>
+      <c:overlay val="0"/>
+      <c:txPr>
+        <a:bodyPr/>
+        <a:lstStyle/>
+        <a:p>
+          <a:pPr>
+            <a:defRPr sz="1200">
+              <a:solidFill>
+                <a:srgbClr val="1B2533"/>
+              </a:solidFill>
+              <a:latin typeface="+mn-lt"/>
+              <a:cs typeface="+mn-lt"/>
+            </a:defRPr>
+          </a:pPr>
+          <a:endParaRPr lang="en-US"/>
+        </a:p>
+      </c:txPr>
+    </c:legend>
+    <c:plotVisOnly val="1"/>
+    <c:dispBlanksAs val="span"/>
+  </c:chart>
+  <c:spPr>
+    <a:noFill/>
+    <a:ln>
+      <a:noFill/>
+    </a:ln>
+    <a:effectLst/>
+  </c:spPr>
+  <c:externalData r:id="rId1">
+    <c:autoUpdate val="0"/>
+  </c:externalData>
+</c:chartSpace>
+</file>
+
 <file path=ppt/notesMasters/notesMaster1.xml><?xml version="1.0" encoding="utf-8"?>
 <p:notesMaster xmlns:a="http://schemas.openxmlformats.org/drawingml/2006/main" xmlns:r="http://schemas.openxmlformats.org/officeDocument/2006/relationships" xmlns:p="http://schemas.openxmlformats.org/presentationml/2006/main">
   <p:cSld>
@@ -2959,7 +5786,7 @@
           <a:p>
             <a:r>
               <a:rPr lang="en-US" dirty="0"/>
-              <a:t>Numbers come from the generated dataset, not real statistics. Highest CFR: IRN at 2.475%. Peak of the smoothed global curve: 2023-06-22.</a:t>
+              <a:t/>
             </a:r>
             <a:endParaRPr lang="en-US" dirty="0"/>
           </a:p>
@@ -3047,7 +5874,7 @@
           <a:p>
             <a:r>
               <a:rPr lang="en-US" dirty="0"/>
-              <a:t/>
+              <a:t>Numbers come from the generated dataset, not real statistics. Highest CFR: IRN at 2.475%. Peak of the smoothed global curve: 2023-06-22.</a:t>
             </a:r>
             <a:endParaRPr lang="en-US" dirty="0"/>
           </a:p>
@@ -3135,7 +5962,7 @@
           <a:p>
             <a:r>
               <a:rPr lang="en-US" dirty="0"/>
-              <a:t/>
+              <a:t>Daily global cases from the generated dataset with Spark's centred 7-day rolling average. The generator uses a 60-day sine period, which shows up as one wave a year over 1,440 days.</a:t>
             </a:r>
             <a:endParaRPr lang="en-US" dirty="0"/>
           </a:p>
@@ -3247,6 +6074,182 @@
             <a:fld id="{F7021451-1387-4CA6-816F-3879F97B5CBC}" type="slidenum">
               <a:rPr lang="en-US"/>
               <a:t>14</a:t>
+            </a:fld>
+            <a:endParaRPr lang="en-US"/>
+          </a:p>
+        </p:txBody>
+      </p:sp>
+    </p:spTree>
+    <p:extLst>
+      <p:ext uri="{BB962C8B-B14F-4D97-AF65-F5344CB8AC3E}">
+        <p14:creationId xmlns:p14="http://schemas.microsoft.com/office/powerpoint/2010/main" val="1024086991"/>
+      </p:ext>
+    </p:extLst>
+  </p:cSld>
+  <p:clrMapOvr>
+    <a:masterClrMapping/>
+  </p:clrMapOvr>
+</p:notes>
+</file>
+
+<file path=ppt/notesSlides/notesSlide15.xml><?xml version="1.0" encoding="utf-8"?>
+<p:notes xmlns:a="http://schemas.openxmlformats.org/drawingml/2006/main" xmlns:r="http://schemas.openxmlformats.org/officeDocument/2006/relationships" xmlns:p="http://schemas.openxmlformats.org/presentationml/2006/main">
+  <p:cSld>
+    <p:spTree>
+      <p:nvGrpSpPr>
+        <p:cNvPr id="1" name=""/>
+        <p:cNvGrpSpPr/>
+        <p:nvPr/>
+      </p:nvGrpSpPr>
+      <p:grpSpPr>
+        <a:xfrm>
+          <a:off x="0" y="0"/>
+          <a:ext cx="0" cy="0"/>
+          <a:chOff x="0" y="0"/>
+          <a:chExt cx="0" cy="0"/>
+        </a:xfrm>
+      </p:grpSpPr>
+      <p:sp>
+        <p:nvSpPr>
+          <p:cNvPr id="2" name="Slide Image Placeholder 1"/>
+          <p:cNvSpPr>
+            <a:spLocks noGrp="1" noRot="1" noChangeAspect="1"/>
+          </p:cNvSpPr>
+          <p:nvPr>
+            <p:ph type="sldImg"/>
+          </p:nvPr>
+        </p:nvSpPr>
+        <p:spPr/>
+      </p:sp>
+      <p:sp>
+        <p:nvSpPr>
+          <p:cNvPr id="3" name="Notes Placeholder 2"/>
+          <p:cNvSpPr>
+            <a:spLocks noGrp="1"/>
+          </p:cNvSpPr>
+          <p:nvPr>
+            <p:ph type="body" idx="1"/>
+          </p:nvPr>
+        </p:nvSpPr>
+        <p:spPr/>
+        <p:txBody>
+          <a:bodyPr/>
+          <a:lstStyle/>
+          <a:p>
+            <a:r>
+              <a:rPr lang="en-US" dirty="0"/>
+              <a:t/>
+            </a:r>
+            <a:endParaRPr lang="en-US" dirty="0"/>
+          </a:p>
+        </p:txBody>
+      </p:sp>
+      <p:sp>
+        <p:nvSpPr>
+          <p:cNvPr id="4" name="Slide Number Placeholder 3"/>
+          <p:cNvSpPr>
+            <a:spLocks noGrp="1"/>
+          </p:cNvSpPr>
+          <p:nvPr>
+            <p:ph type="sldNum" sz="quarter" idx="10"/>
+          </p:nvPr>
+        </p:nvSpPr>
+        <p:spPr/>
+        <p:txBody>
+          <a:bodyPr/>
+          <a:lstStyle/>
+          <a:p>
+            <a:fld id="{F7021451-1387-4CA6-816F-3879F97B5CBC}" type="slidenum">
+              <a:rPr lang="en-US"/>
+              <a:t>15</a:t>
+            </a:fld>
+            <a:endParaRPr lang="en-US"/>
+          </a:p>
+        </p:txBody>
+      </p:sp>
+    </p:spTree>
+    <p:extLst>
+      <p:ext uri="{BB962C8B-B14F-4D97-AF65-F5344CB8AC3E}">
+        <p14:creationId xmlns:p14="http://schemas.microsoft.com/office/powerpoint/2010/main" val="1024086991"/>
+      </p:ext>
+    </p:extLst>
+  </p:cSld>
+  <p:clrMapOvr>
+    <a:masterClrMapping/>
+  </p:clrMapOvr>
+</p:notes>
+</file>
+
+<file path=ppt/notesSlides/notesSlide16.xml><?xml version="1.0" encoding="utf-8"?>
+<p:notes xmlns:a="http://schemas.openxmlformats.org/drawingml/2006/main" xmlns:r="http://schemas.openxmlformats.org/officeDocument/2006/relationships" xmlns:p="http://schemas.openxmlformats.org/presentationml/2006/main">
+  <p:cSld>
+    <p:spTree>
+      <p:nvGrpSpPr>
+        <p:cNvPr id="1" name=""/>
+        <p:cNvGrpSpPr/>
+        <p:nvPr/>
+      </p:nvGrpSpPr>
+      <p:grpSpPr>
+        <a:xfrm>
+          <a:off x="0" y="0"/>
+          <a:ext cx="0" cy="0"/>
+          <a:chOff x="0" y="0"/>
+          <a:chExt cx="0" cy="0"/>
+        </a:xfrm>
+      </p:grpSpPr>
+      <p:sp>
+        <p:nvSpPr>
+          <p:cNvPr id="2" name="Slide Image Placeholder 1"/>
+          <p:cNvSpPr>
+            <a:spLocks noGrp="1" noRot="1" noChangeAspect="1"/>
+          </p:cNvSpPr>
+          <p:nvPr>
+            <p:ph type="sldImg"/>
+          </p:nvPr>
+        </p:nvSpPr>
+        <p:spPr/>
+      </p:sp>
+      <p:sp>
+        <p:nvSpPr>
+          <p:cNvPr id="3" name="Notes Placeholder 2"/>
+          <p:cNvSpPr>
+            <a:spLocks noGrp="1"/>
+          </p:cNvSpPr>
+          <p:nvPr>
+            <p:ph type="body" idx="1"/>
+          </p:nvPr>
+        </p:nvSpPr>
+        <p:spPr/>
+        <p:txBody>
+          <a:bodyPr/>
+          <a:lstStyle/>
+          <a:p>
+            <a:r>
+              <a:rPr lang="en-US" dirty="0"/>
+              <a:t/>
+            </a:r>
+            <a:endParaRPr lang="en-US" dirty="0"/>
+          </a:p>
+        </p:txBody>
+      </p:sp>
+      <p:sp>
+        <p:nvSpPr>
+          <p:cNvPr id="4" name="Slide Number Placeholder 3"/>
+          <p:cNvSpPr>
+            <a:spLocks noGrp="1"/>
+          </p:cNvSpPr>
+          <p:nvPr>
+            <p:ph type="sldNum" sz="quarter" idx="10"/>
+          </p:nvPr>
+        </p:nvSpPr>
+        <p:spPr/>
+        <p:txBody>
+          <a:bodyPr/>
+          <a:lstStyle/>
+          <a:p>
+            <a:fld id="{F7021451-1387-4CA6-816F-3879F97B5CBC}" type="slidenum">
+              <a:rPr lang="en-US"/>
+              <a:t>16</a:t>
             </a:fld>
             <a:endParaRPr lang="en-US"/>
           </a:p>
@@ -4601,15 +7604,39 @@
           </a:p>
         </p:txBody>
       </p:sp>
-      <p:sp>
-        <p:nvSpPr>
-          <p:cNvPr id="4" name="Text 2"/>
+      <p:pic>
+        <p:nvPicPr>
+          <p:cNvPr id="4" name="Image 0" descr="Global 7-day average curve">    </p:cNvPr>
+          <p:cNvPicPr>
+            <a:picLocks noChangeAspect="1"/>
+          </p:cNvPicPr>
+          <p:nvPr/>
+        </p:nvPicPr>
+        <p:blipFill>
+          <a:blip r:embed="rId1"/>
+          <a:stretch>
+            <a:fillRect/>
+          </a:stretch>
+        </p:blipFill>
+        <p:spPr>
+          <a:xfrm>
+            <a:off x="0" y="4499799"/>
+            <a:ext cx="12188952" cy="2358201"/>
+          </a:xfrm>
+          <a:prstGeom prst="rect">
+            <a:avLst/>
+          </a:prstGeom>
+        </p:spPr>
+      </p:pic>
+      <p:sp>
+        <p:nvSpPr>
+          <p:cNvPr id="5" name="Text 2"/>
           <p:cNvSpPr txBox="1"/>
           <p:nvPr/>
         </p:nvSpPr>
         <p:spPr>
           <a:xfrm>
-            <a:off x="731520" y="5760720"/>
+            <a:off x="731520" y="548640"/>
             <a:ext cx="7315200" cy="365760"/>
           </a:xfrm>
           <a:prstGeom prst="rect">
@@ -4639,7 +7666,7 @@
       </p:sp>
       <p:sp>
         <p:nvSpPr>
-          <p:cNvPr id="5" name="Shape 3"/>
+          <p:cNvPr id="6" name="Shape 3"/>
           <p:cNvSpPr/>
           <p:nvPr/>
         </p:nvSpPr>
@@ -4664,14 +7691,14 @@
       </p:sp>
       <p:pic>
         <p:nvPicPr>
-          <p:cNvPr id="6" name="Image 0" descr="preencoded.png">    </p:cNvPr>
+          <p:cNvPr id="7" name="Image 1" descr="preencoded.png">    </p:cNvPr>
           <p:cNvPicPr>
             <a:picLocks noChangeAspect="1"/>
           </p:cNvPicPr>
           <p:nvPr/>
         </p:nvPicPr>
         <p:blipFill>
-          <a:blip r:embed="rId1"/>
+          <a:blip r:embed="rId2"/>
           <a:stretch>
             <a:fillRect/>
           </a:stretch>
@@ -4688,7 +7715,7 @@
       </p:pic>
       <p:sp>
         <p:nvSpPr>
-          <p:cNvPr id="7" name="Text 4"/>
+          <p:cNvPr id="8" name="Text 4"/>
           <p:cNvSpPr txBox="1"/>
           <p:nvPr/>
         </p:nvSpPr>
@@ -4724,7 +7751,7 @@
       </p:sp>
       <p:sp>
         <p:nvSpPr>
-          <p:cNvPr id="8" name="Shape 5"/>
+          <p:cNvPr id="9" name="Shape 5"/>
           <p:cNvSpPr/>
           <p:nvPr/>
         </p:nvSpPr>
@@ -4749,14 +7776,14 @@
       </p:sp>
       <p:pic>
         <p:nvPicPr>
-          <p:cNvPr id="9" name="Image 1" descr="preencoded.png">    </p:cNvPr>
+          <p:cNvPr id="10" name="Image 2" descr="preencoded.png">    </p:cNvPr>
           <p:cNvPicPr>
             <a:picLocks noChangeAspect="1"/>
           </p:cNvPicPr>
           <p:nvPr/>
         </p:nvPicPr>
         <p:blipFill>
-          <a:blip r:embed="rId2"/>
+          <a:blip r:embed="rId3"/>
           <a:stretch>
             <a:fillRect/>
           </a:stretch>
@@ -4773,7 +7800,7 @@
       </p:pic>
       <p:sp>
         <p:nvSpPr>
-          <p:cNvPr id="10" name="Text 6"/>
+          <p:cNvPr id="11" name="Text 6"/>
           <p:cNvSpPr txBox="1"/>
           <p:nvPr/>
         </p:nvSpPr>
@@ -4809,7 +7836,7 @@
       </p:sp>
       <p:sp>
         <p:nvSpPr>
-          <p:cNvPr id="11" name="Shape 7"/>
+          <p:cNvPr id="12" name="Shape 7"/>
           <p:cNvSpPr/>
           <p:nvPr/>
         </p:nvSpPr>
@@ -4834,14 +7861,14 @@
       </p:sp>
       <p:pic>
         <p:nvPicPr>
-          <p:cNvPr id="12" name="Image 2" descr="preencoded.png">    </p:cNvPr>
+          <p:cNvPr id="13" name="Image 3" descr="preencoded.png">    </p:cNvPr>
           <p:cNvPicPr>
             <a:picLocks noChangeAspect="1"/>
           </p:cNvPicPr>
           <p:nvPr/>
         </p:nvPicPr>
         <p:blipFill>
-          <a:blip r:embed="rId3"/>
+          <a:blip r:embed="rId4"/>
           <a:stretch>
             <a:fillRect/>
           </a:stretch>
@@ -4858,7 +7885,7 @@
       </p:pic>
       <p:sp>
         <p:nvSpPr>
-          <p:cNvPr id="13" name="Text 8"/>
+          <p:cNvPr id="14" name="Text 8"/>
           <p:cNvSpPr txBox="1"/>
           <p:nvPr/>
         </p:nvSpPr>
@@ -4949,803 +7976,36 @@
                   <a:srgbClr val="1B2533"/>
                 </a:solidFill>
               </a:rPr>
-              <a:t>Running it end to end</a:t>
+              <a:t>Four more views</a:t>
             </a:r>
             <a:endParaRPr lang="en-US" sz="3200" dirty="0"/>
           </a:p>
         </p:txBody>
       </p:sp>
-      <p:sp>
-        <p:nvSpPr>
-          <p:cNvPr id="3" name="Shape 1"/>
-          <p:cNvSpPr/>
-          <p:nvPr/>
-        </p:nvSpPr>
-        <p:spPr>
-          <a:xfrm>
-            <a:off x="868680" y="1600200"/>
-            <a:ext cx="0" cy="3383280"/>
-          </a:xfrm>
-          <a:prstGeom prst="line">
-            <a:avLst/>
-          </a:prstGeom>
-          <a:noFill/>
-          <a:ln w="25400">
-            <a:solidFill>
-              <a:srgbClr val="C9D1DB"/>
-            </a:solidFill>
-            <a:prstDash val="solid"/>
-          </a:ln>
-        </p:spPr>
-      </p:sp>
-      <p:sp>
-        <p:nvSpPr>
-          <p:cNvPr id="4" name="Shape 2"/>
-          <p:cNvSpPr/>
-          <p:nvPr/>
-        </p:nvSpPr>
-        <p:spPr>
-          <a:xfrm>
-            <a:off x="594360" y="1325880"/>
-            <a:ext cx="548640" cy="548640"/>
-          </a:xfrm>
-          <a:prstGeom prst="ellipse">
-            <a:avLst/>
-          </a:prstGeom>
-          <a:solidFill>
-            <a:srgbClr val="12355B"/>
-          </a:solidFill>
-          <a:ln w="25400">
-            <a:solidFill>
-              <a:srgbClr val="FFFFFF"/>
-            </a:solidFill>
-            <a:prstDash val="solid"/>
-          </a:ln>
-        </p:spPr>
-      </p:sp>
-      <p:sp>
-        <p:nvSpPr>
-          <p:cNvPr id="5" name="Text 3"/>
-          <p:cNvSpPr txBox="1"/>
-          <p:nvPr/>
-        </p:nvSpPr>
-        <p:spPr>
-          <a:xfrm>
-            <a:off x="594360" y="1325880"/>
-            <a:ext cx="548640" cy="548640"/>
-          </a:xfrm>
-          <a:prstGeom prst="rect">
-            <a:avLst/>
-          </a:prstGeom>
-          <a:noFill/>
-          <a:ln/>
-        </p:spPr>
-        <p:txBody>
-          <a:bodyPr wrap="square" lIns="0" tIns="0" rIns="0" bIns="0" rtlCol="0" anchor="ctr"/>
-          <a:lstStyle/>
-          <a:p>
-            <a:pPr algn="ctr" indent="0" marL="0">
-              <a:buNone/>
-            </a:pPr>
-            <a:r>
-              <a:rPr lang="en-US" sz="1500" b="1" dirty="0">
-                <a:solidFill>
-                  <a:srgbClr val="FFFFFF"/>
-                </a:solidFill>
-              </a:rPr>
-              <a:t>1</a:t>
-            </a:r>
-            <a:endParaRPr lang="en-US" sz="1500" dirty="0"/>
-          </a:p>
-        </p:txBody>
-      </p:sp>
-      <p:sp>
-        <p:nvSpPr>
-          <p:cNvPr id="6" name="Text 4"/>
-          <p:cNvSpPr txBox="1"/>
-          <p:nvPr/>
-        </p:nvSpPr>
-        <p:spPr>
-          <a:xfrm>
-            <a:off x="1371600" y="1234440"/>
-            <a:ext cx="5029200" cy="777240"/>
-          </a:xfrm>
-          <a:prstGeom prst="rect">
-            <a:avLst/>
-          </a:prstGeom>
-          <a:noFill/>
-          <a:ln/>
-        </p:spPr>
-        <p:txBody>
-          <a:bodyPr wrap="square" lIns="0" tIns="0" rIns="0" bIns="0" rtlCol="0" anchor="ctr"/>
-          <a:lstStyle/>
-          <a:p>
-            <a:pPr indent="0" marL="0">
-              <a:buNone/>
-            </a:pPr>
-            <a:r>
-              <a:rPr lang="en-US" sz="1500" b="1" dirty="0">
-                <a:solidFill>
-                  <a:srgbClr val="1B2533"/>
-                </a:solidFill>
-                <a:latin typeface="Courier New" pitchFamily="34" charset="0"/>
-                <a:ea typeface="Courier New" pitchFamily="34" charset="-122"/>
-                <a:cs typeface="Courier New" pitchFamily="34" charset="-120"/>
-              </a:rPr>
-              <a:t>01_start_cluster.sh</a:t>
-            </a:r>
-            <a:endParaRPr lang="en-US" sz="1500" dirty="0"/>
-          </a:p>
-          <a:p>
-            <a:pPr indent="0" marL="0">
-              <a:buNone/>
-            </a:pPr>
-            <a:r>
-              <a:rPr lang="en-US" sz="1400" dirty="0">
-                <a:solidFill>
-                  <a:srgbClr val="6B7686"/>
-                </a:solidFill>
-              </a:rPr>
-              <a:t>docker-compose up -d · wait for HDFS</a:t>
-            </a:r>
-            <a:endParaRPr lang="en-US" sz="1500" dirty="0"/>
-          </a:p>
-        </p:txBody>
-      </p:sp>
-      <p:sp>
-        <p:nvSpPr>
-          <p:cNvPr id="7" name="Shape 5"/>
-          <p:cNvSpPr/>
-          <p:nvPr/>
-        </p:nvSpPr>
-        <p:spPr>
-          <a:xfrm>
-            <a:off x="594360" y="2423160"/>
-            <a:ext cx="548640" cy="548640"/>
-          </a:xfrm>
-          <a:prstGeom prst="ellipse">
-            <a:avLst/>
-          </a:prstGeom>
-          <a:solidFill>
-            <a:srgbClr val="12355B"/>
-          </a:solidFill>
-          <a:ln w="25400">
-            <a:solidFill>
-              <a:srgbClr val="FFFFFF"/>
-            </a:solidFill>
-            <a:prstDash val="solid"/>
-          </a:ln>
-        </p:spPr>
-      </p:sp>
-      <p:sp>
-        <p:nvSpPr>
-          <p:cNvPr id="8" name="Text 6"/>
-          <p:cNvSpPr txBox="1"/>
-          <p:nvPr/>
-        </p:nvSpPr>
-        <p:spPr>
-          <a:xfrm>
-            <a:off x="594360" y="2423160"/>
-            <a:ext cx="548640" cy="548640"/>
-          </a:xfrm>
-          <a:prstGeom prst="rect">
-            <a:avLst/>
-          </a:prstGeom>
-          <a:noFill/>
-          <a:ln/>
-        </p:spPr>
-        <p:txBody>
-          <a:bodyPr wrap="square" lIns="0" tIns="0" rIns="0" bIns="0" rtlCol="0" anchor="ctr"/>
-          <a:lstStyle/>
-          <a:p>
-            <a:pPr algn="ctr" indent="0" marL="0">
-              <a:buNone/>
-            </a:pPr>
-            <a:r>
-              <a:rPr lang="en-US" sz="1500" b="1" dirty="0">
-                <a:solidFill>
-                  <a:srgbClr val="FFFFFF"/>
-                </a:solidFill>
-              </a:rPr>
-              <a:t>2</a:t>
-            </a:r>
-            <a:endParaRPr lang="en-US" sz="1500" dirty="0"/>
-          </a:p>
-        </p:txBody>
-      </p:sp>
-      <p:sp>
-        <p:nvSpPr>
-          <p:cNvPr id="9" name="Text 7"/>
-          <p:cNvSpPr txBox="1"/>
-          <p:nvPr/>
-        </p:nvSpPr>
-        <p:spPr>
-          <a:xfrm>
-            <a:off x="1371600" y="2331720"/>
-            <a:ext cx="5029200" cy="777240"/>
-          </a:xfrm>
-          <a:prstGeom prst="rect">
-            <a:avLst/>
-          </a:prstGeom>
-          <a:noFill/>
-          <a:ln/>
-        </p:spPr>
-        <p:txBody>
-          <a:bodyPr wrap="square" lIns="0" tIns="0" rIns="0" bIns="0" rtlCol="0" anchor="ctr"/>
-          <a:lstStyle/>
-          <a:p>
-            <a:pPr indent="0" marL="0">
-              <a:buNone/>
-            </a:pPr>
-            <a:r>
-              <a:rPr lang="en-US" sz="1500" b="1" dirty="0">
-                <a:solidFill>
-                  <a:srgbClr val="1B2533"/>
-                </a:solidFill>
-                <a:latin typeface="Courier New" pitchFamily="34" charset="0"/>
-                <a:ea typeface="Courier New" pitchFamily="34" charset="-122"/>
-                <a:cs typeface="Courier New" pitchFamily="34" charset="-120"/>
-              </a:rPr>
-              <a:t>02_upload_data.sh</a:t>
-            </a:r>
-            <a:endParaRPr lang="en-US" sz="1500" dirty="0"/>
-          </a:p>
-          <a:p>
-            <a:pPr indent="0" marL="0">
-              <a:buNone/>
-            </a:pPr>
-            <a:r>
-              <a:rPr lang="en-US" sz="1400" dirty="0">
-                <a:solidFill>
-                  <a:srgbClr val="6B7686"/>
-                </a:solidFill>
-              </a:rPr>
-              <a:t>generate CSV if missing · hdfs dfs -put</a:t>
-            </a:r>
-            <a:endParaRPr lang="en-US" sz="1500" dirty="0"/>
-          </a:p>
-        </p:txBody>
-      </p:sp>
-      <p:sp>
-        <p:nvSpPr>
-          <p:cNvPr id="10" name="Shape 8"/>
-          <p:cNvSpPr/>
-          <p:nvPr/>
-        </p:nvSpPr>
-        <p:spPr>
-          <a:xfrm>
-            <a:off x="594360" y="3520440"/>
-            <a:ext cx="548640" cy="548640"/>
-          </a:xfrm>
-          <a:prstGeom prst="ellipse">
-            <a:avLst/>
-          </a:prstGeom>
-          <a:solidFill>
-            <a:srgbClr val="12355B"/>
-          </a:solidFill>
-          <a:ln w="25400">
-            <a:solidFill>
-              <a:srgbClr val="FFFFFF"/>
-            </a:solidFill>
-            <a:prstDash val="solid"/>
-          </a:ln>
-        </p:spPr>
-      </p:sp>
-      <p:sp>
-        <p:nvSpPr>
-          <p:cNvPr id="11" name="Text 9"/>
-          <p:cNvSpPr txBox="1"/>
-          <p:nvPr/>
-        </p:nvSpPr>
-        <p:spPr>
-          <a:xfrm>
-            <a:off x="594360" y="3520440"/>
-            <a:ext cx="548640" cy="548640"/>
-          </a:xfrm>
-          <a:prstGeom prst="rect">
-            <a:avLst/>
-          </a:prstGeom>
-          <a:noFill/>
-          <a:ln/>
-        </p:spPr>
-        <p:txBody>
-          <a:bodyPr wrap="square" lIns="0" tIns="0" rIns="0" bIns="0" rtlCol="0" anchor="ctr"/>
-          <a:lstStyle/>
-          <a:p>
-            <a:pPr algn="ctr" indent="0" marL="0">
-              <a:buNone/>
-            </a:pPr>
-            <a:r>
-              <a:rPr lang="en-US" sz="1500" b="1" dirty="0">
-                <a:solidFill>
-                  <a:srgbClr val="FFFFFF"/>
-                </a:solidFill>
-              </a:rPr>
-              <a:t>3</a:t>
-            </a:r>
-            <a:endParaRPr lang="en-US" sz="1500" dirty="0"/>
-          </a:p>
-        </p:txBody>
-      </p:sp>
-      <p:sp>
-        <p:nvSpPr>
-          <p:cNvPr id="12" name="Text 10"/>
-          <p:cNvSpPr txBox="1"/>
-          <p:nvPr/>
-        </p:nvSpPr>
-        <p:spPr>
-          <a:xfrm>
-            <a:off x="1371600" y="3429000"/>
-            <a:ext cx="5029200" cy="777240"/>
-          </a:xfrm>
-          <a:prstGeom prst="rect">
-            <a:avLst/>
-          </a:prstGeom>
-          <a:noFill/>
-          <a:ln/>
-        </p:spPr>
-        <p:txBody>
-          <a:bodyPr wrap="square" lIns="0" tIns="0" rIns="0" bIns="0" rtlCol="0" anchor="ctr"/>
-          <a:lstStyle/>
-          <a:p>
-            <a:pPr indent="0" marL="0">
-              <a:buNone/>
-            </a:pPr>
-            <a:r>
-              <a:rPr lang="en-US" sz="1500" b="1" dirty="0">
-                <a:solidFill>
-                  <a:srgbClr val="1B2533"/>
-                </a:solidFill>
-                <a:latin typeface="Courier New" pitchFamily="34" charset="0"/>
-                <a:ea typeface="Courier New" pitchFamily="34" charset="-122"/>
-                <a:cs typeface="Courier New" pitchFamily="34" charset="-120"/>
-              </a:rPr>
-              <a:t>03_run_mapreduce.sh</a:t>
-            </a:r>
-            <a:endParaRPr lang="en-US" sz="1500" dirty="0"/>
-          </a:p>
-          <a:p>
-            <a:pPr indent="0" marL="0">
-              <a:buNone/>
-            </a:pPr>
-            <a:r>
-              <a:rPr lang="en-US" sz="1400" dirty="0">
-                <a:solidFill>
-                  <a:srgbClr val="6B7686"/>
-                </a:solidFill>
-              </a:rPr>
-              <a:t>streaming job on YARN · export CSV</a:t>
-            </a:r>
-            <a:endParaRPr lang="en-US" sz="1500" dirty="0"/>
-          </a:p>
-        </p:txBody>
-      </p:sp>
-      <p:sp>
-        <p:nvSpPr>
-          <p:cNvPr id="13" name="Shape 11"/>
-          <p:cNvSpPr/>
-          <p:nvPr/>
-        </p:nvSpPr>
-        <p:spPr>
-          <a:xfrm>
-            <a:off x="594360" y="4617720"/>
-            <a:ext cx="548640" cy="548640"/>
-          </a:xfrm>
-          <a:prstGeom prst="ellipse">
-            <a:avLst/>
-          </a:prstGeom>
-          <a:solidFill>
-            <a:srgbClr val="12355B"/>
-          </a:solidFill>
-          <a:ln w="25400">
-            <a:solidFill>
-              <a:srgbClr val="FFFFFF"/>
-            </a:solidFill>
-            <a:prstDash val="solid"/>
-          </a:ln>
-        </p:spPr>
-      </p:sp>
-      <p:sp>
-        <p:nvSpPr>
-          <p:cNvPr id="14" name="Text 12"/>
-          <p:cNvSpPr txBox="1"/>
-          <p:nvPr/>
-        </p:nvSpPr>
-        <p:spPr>
-          <a:xfrm>
-            <a:off x="594360" y="4617720"/>
-            <a:ext cx="548640" cy="548640"/>
-          </a:xfrm>
-          <a:prstGeom prst="rect">
-            <a:avLst/>
-          </a:prstGeom>
-          <a:noFill/>
-          <a:ln/>
-        </p:spPr>
-        <p:txBody>
-          <a:bodyPr wrap="square" lIns="0" tIns="0" rIns="0" bIns="0" rtlCol="0" anchor="ctr"/>
-          <a:lstStyle/>
-          <a:p>
-            <a:pPr algn="ctr" indent="0" marL="0">
-              <a:buNone/>
-            </a:pPr>
-            <a:r>
-              <a:rPr lang="en-US" sz="1500" b="1" dirty="0">
-                <a:solidFill>
-                  <a:srgbClr val="FFFFFF"/>
-                </a:solidFill>
-              </a:rPr>
-              <a:t>4</a:t>
-            </a:r>
-            <a:endParaRPr lang="en-US" sz="1500" dirty="0"/>
-          </a:p>
-        </p:txBody>
-      </p:sp>
-      <p:sp>
-        <p:nvSpPr>
-          <p:cNvPr id="15" name="Text 13"/>
-          <p:cNvSpPr txBox="1"/>
-          <p:nvPr/>
-        </p:nvSpPr>
-        <p:spPr>
-          <a:xfrm>
-            <a:off x="1371600" y="4526280"/>
-            <a:ext cx="5029200" cy="777240"/>
-          </a:xfrm>
-          <a:prstGeom prst="rect">
-            <a:avLst/>
-          </a:prstGeom>
-          <a:noFill/>
-          <a:ln/>
-        </p:spPr>
-        <p:txBody>
-          <a:bodyPr wrap="square" lIns="0" tIns="0" rIns="0" bIns="0" rtlCol="0" anchor="ctr"/>
-          <a:lstStyle/>
-          <a:p>
-            <a:pPr indent="0" marL="0">
-              <a:buNone/>
-            </a:pPr>
-            <a:r>
-              <a:rPr lang="en-US" sz="1500" b="1" dirty="0">
-                <a:solidFill>
-                  <a:srgbClr val="1B2533"/>
-                </a:solidFill>
-                <a:latin typeface="Courier New" pitchFamily="34" charset="0"/>
-                <a:ea typeface="Courier New" pitchFamily="34" charset="-122"/>
-                <a:cs typeface="Courier New" pitchFamily="34" charset="-120"/>
-              </a:rPr>
-              <a:t>04_run_spark.sh</a:t>
-            </a:r>
-            <a:endParaRPr lang="en-US" sz="1500" dirty="0"/>
-          </a:p>
-          <a:p>
-            <a:pPr indent="0" marL="0">
-              <a:buNone/>
-            </a:pPr>
-            <a:r>
-              <a:rPr lang="en-US" sz="1400" dirty="0">
-                <a:solidFill>
-                  <a:srgbClr val="6B7686"/>
-                </a:solidFill>
-              </a:rPr>
-              <a:t>spark-submit to spark-master:7077</a:t>
-            </a:r>
-            <a:endParaRPr lang="en-US" sz="1500" dirty="0"/>
-          </a:p>
-        </p:txBody>
-      </p:sp>
-      <p:sp>
-        <p:nvSpPr>
-          <p:cNvPr id="16" name="Shape 14"/>
-          <p:cNvSpPr/>
-          <p:nvPr/>
-        </p:nvSpPr>
-        <p:spPr>
-          <a:xfrm>
-            <a:off x="6858000" y="1325880"/>
-            <a:ext cx="4754880" cy="1691640"/>
-          </a:xfrm>
-          <a:prstGeom prst="roundRect">
-            <a:avLst>
-              <a:gd name="adj" fmla="val 5405"/>
-            </a:avLst>
-          </a:prstGeom>
-          <a:solidFill>
-            <a:srgbClr val="E6ECF3"/>
-          </a:solidFill>
-          <a:ln w="15875">
-            <a:solidFill>
-              <a:srgbClr val="12355B"/>
-            </a:solidFill>
-            <a:prstDash val="solid"/>
-          </a:ln>
-        </p:spPr>
-      </p:sp>
-      <p:sp>
-        <p:nvSpPr>
-          <p:cNvPr id="17" name="Text 15"/>
-          <p:cNvSpPr txBox="1"/>
-          <p:nvPr/>
-        </p:nvSpPr>
-        <p:spPr>
-          <a:xfrm>
-            <a:off x="7086600" y="1463040"/>
-            <a:ext cx="4389120" cy="411480"/>
-          </a:xfrm>
-          <a:prstGeom prst="rect">
-            <a:avLst/>
-          </a:prstGeom>
-          <a:noFill/>
-          <a:ln/>
-        </p:spPr>
-        <p:txBody>
-          <a:bodyPr wrap="square" lIns="0" tIns="0" rIns="0" bIns="0" rtlCol="0" anchor="ctr"/>
-          <a:lstStyle/>
-          <a:p>
-            <a:pPr indent="0" marL="0">
-              <a:buNone/>
-            </a:pPr>
-            <a:r>
-              <a:rPr lang="en-US" sz="1800" b="1" dirty="0">
-                <a:solidFill>
-                  <a:srgbClr val="1B2533"/>
-                </a:solidFill>
-              </a:rPr>
-              <a:t>Cluster mode</a:t>
-            </a:r>
-            <a:endParaRPr lang="en-US" sz="1800" dirty="0"/>
-          </a:p>
-        </p:txBody>
-      </p:sp>
-      <p:sp>
-        <p:nvSpPr>
-          <p:cNvPr id="18" name="Text 16"/>
-          <p:cNvSpPr txBox="1"/>
-          <p:nvPr/>
-        </p:nvSpPr>
-        <p:spPr>
-          <a:xfrm>
-            <a:off x="7086600" y="1920240"/>
-            <a:ext cx="4389120" cy="365760"/>
-          </a:xfrm>
-          <a:prstGeom prst="rect">
-            <a:avLst/>
-          </a:prstGeom>
-          <a:noFill/>
-          <a:ln/>
-        </p:spPr>
-        <p:txBody>
-          <a:bodyPr wrap="square" lIns="0" tIns="0" rIns="0" bIns="0" rtlCol="0" anchor="ctr"/>
-          <a:lstStyle/>
-          <a:p>
-            <a:pPr indent="0" marL="0">
-              <a:buNone/>
-            </a:pPr>
-            <a:r>
-              <a:rPr lang="en-US" sz="1400" dirty="0">
-                <a:solidFill>
-                  <a:srgbClr val="12355B"/>
-                </a:solidFill>
-                <a:latin typeface="Courier New" pitchFamily="34" charset="0"/>
-                <a:ea typeface="Courier New" pitchFamily="34" charset="-122"/>
-                <a:cs typeface="Courier New" pitchFamily="34" charset="-120"/>
-              </a:rPr>
-              <a:t>bash run_all.sh</a:t>
-            </a:r>
-            <a:endParaRPr lang="en-US" sz="1400" dirty="0"/>
-          </a:p>
-        </p:txBody>
-      </p:sp>
-      <p:sp>
-        <p:nvSpPr>
-          <p:cNvPr id="19" name="Text 17"/>
-          <p:cNvSpPr txBox="1"/>
-          <p:nvPr/>
-        </p:nvSpPr>
-        <p:spPr>
-          <a:xfrm>
-            <a:off x="7086600" y="2331720"/>
-            <a:ext cx="4389120" cy="548640"/>
-          </a:xfrm>
-          <a:prstGeom prst="rect">
-            <a:avLst/>
-          </a:prstGeom>
-          <a:noFill/>
-          <a:ln/>
-        </p:spPr>
-        <p:txBody>
-          <a:bodyPr wrap="square" lIns="0" tIns="0" rIns="0" bIns="0" rtlCol="0" anchor="t"/>
-          <a:lstStyle/>
-          <a:p>
-            <a:pPr indent="0" marL="0">
-              <a:buNone/>
-            </a:pPr>
-            <a:r>
-              <a:rPr lang="en-US" sz="1400" dirty="0">
-                <a:solidFill>
-                  <a:srgbClr val="6B7686"/>
-                </a:solidFill>
-              </a:rPr>
-              <a:t>HDFS, YARN and Spark in 10 containers</a:t>
-            </a:r>
-            <a:endParaRPr lang="en-US" sz="1400" dirty="0"/>
-          </a:p>
-        </p:txBody>
-      </p:sp>
-      <p:sp>
-        <p:nvSpPr>
-          <p:cNvPr id="20" name="Shape 18"/>
-          <p:cNvSpPr/>
-          <p:nvPr/>
-        </p:nvSpPr>
-        <p:spPr>
-          <a:xfrm>
-            <a:off x="6858000" y="3291840"/>
-            <a:ext cx="4754880" cy="1691640"/>
-          </a:xfrm>
-          <a:prstGeom prst="roundRect">
-            <a:avLst>
-              <a:gd name="adj" fmla="val 5405"/>
-            </a:avLst>
-          </a:prstGeom>
-          <a:solidFill>
-            <a:srgbClr val="E3F4F1"/>
-          </a:solidFill>
-          <a:ln w="15875">
-            <a:solidFill>
-              <a:srgbClr val="1B998B"/>
-            </a:solidFill>
-            <a:prstDash val="solid"/>
-          </a:ln>
-        </p:spPr>
-      </p:sp>
-      <p:sp>
-        <p:nvSpPr>
-          <p:cNvPr id="21" name="Text 19"/>
-          <p:cNvSpPr txBox="1"/>
-          <p:nvPr/>
-        </p:nvSpPr>
-        <p:spPr>
-          <a:xfrm>
-            <a:off x="7086600" y="3429000"/>
-            <a:ext cx="4389120" cy="411480"/>
-          </a:xfrm>
-          <a:prstGeom prst="rect">
-            <a:avLst/>
-          </a:prstGeom>
-          <a:noFill/>
-          <a:ln/>
-        </p:spPr>
-        <p:txBody>
-          <a:bodyPr wrap="square" lIns="0" tIns="0" rIns="0" bIns="0" rtlCol="0" anchor="ctr"/>
-          <a:lstStyle/>
-          <a:p>
-            <a:pPr indent="0" marL="0">
-              <a:buNone/>
-            </a:pPr>
-            <a:r>
-              <a:rPr lang="en-US" sz="1800" b="1" dirty="0">
-                <a:solidFill>
-                  <a:srgbClr val="1B2533"/>
-                </a:solidFill>
-              </a:rPr>
-              <a:t>Local mode</a:t>
-            </a:r>
-            <a:endParaRPr lang="en-US" sz="1800" dirty="0"/>
-          </a:p>
-        </p:txBody>
-      </p:sp>
-      <p:sp>
-        <p:nvSpPr>
-          <p:cNvPr id="22" name="Text 20"/>
-          <p:cNvSpPr txBox="1"/>
-          <p:nvPr/>
-        </p:nvSpPr>
-        <p:spPr>
-          <a:xfrm>
-            <a:off x="7086600" y="3886200"/>
-            <a:ext cx="4389120" cy="365760"/>
-          </a:xfrm>
-          <a:prstGeom prst="rect">
-            <a:avLst/>
-          </a:prstGeom>
-          <a:noFill/>
-          <a:ln/>
-        </p:spPr>
-        <p:txBody>
-          <a:bodyPr wrap="square" lIns="0" tIns="0" rIns="0" bIns="0" rtlCol="0" anchor="ctr"/>
-          <a:lstStyle/>
-          <a:p>
-            <a:pPr indent="0" marL="0">
-              <a:buNone/>
-            </a:pPr>
-            <a:r>
-              <a:rPr lang="en-US" sz="1400" dirty="0">
-                <a:solidFill>
-                  <a:srgbClr val="1B998B"/>
-                </a:solidFill>
-                <a:latin typeface="Courier New" pitchFamily="34" charset="0"/>
-                <a:ea typeface="Courier New" pitchFamily="34" charset="-122"/>
-                <a:cs typeface="Courier New" pitchFamily="34" charset="-120"/>
-              </a:rPr>
-              <a:t>bash scripts/05_run_local.sh</a:t>
-            </a:r>
-            <a:endParaRPr lang="en-US" sz="1400" dirty="0"/>
-          </a:p>
-        </p:txBody>
-      </p:sp>
-      <p:sp>
-        <p:nvSpPr>
-          <p:cNvPr id="23" name="Text 21"/>
-          <p:cNvSpPr txBox="1"/>
-          <p:nvPr/>
-        </p:nvSpPr>
-        <p:spPr>
-          <a:xfrm>
-            <a:off x="7086600" y="4297680"/>
-            <a:ext cx="4389120" cy="548640"/>
-          </a:xfrm>
-          <a:prstGeom prst="rect">
-            <a:avLst/>
-          </a:prstGeom>
-          <a:noFill/>
-          <a:ln/>
-        </p:spPr>
-        <p:txBody>
-          <a:bodyPr wrap="square" lIns="0" tIns="0" rIns="0" bIns="0" rtlCol="0" anchor="t"/>
-          <a:lstStyle/>
-          <a:p>
-            <a:pPr indent="0" marL="0">
-              <a:buNone/>
-            </a:pPr>
-            <a:r>
-              <a:rPr lang="en-US" sz="1400" dirty="0">
-                <a:solidFill>
-                  <a:srgbClr val="6B7686"/>
-                </a:solidFill>
-              </a:rPr>
-              <a:t>Same jobs on the host; MapReduce as mapper | sort | reducer</a:t>
-            </a:r>
-            <a:endParaRPr lang="en-US" sz="1400" dirty="0"/>
-          </a:p>
-        </p:txBody>
-      </p:sp>
-      <p:sp>
-        <p:nvSpPr>
-          <p:cNvPr id="24" name="Text 22"/>
-          <p:cNvSpPr txBox="1"/>
-          <p:nvPr/>
-        </p:nvSpPr>
-        <p:spPr>
-          <a:xfrm>
-            <a:off x="548640" y="5669280"/>
-            <a:ext cx="5943600" cy="365760"/>
-          </a:xfrm>
-          <a:prstGeom prst="rect">
-            <a:avLst/>
-          </a:prstGeom>
-          <a:noFill/>
-          <a:ln/>
-        </p:spPr>
-        <p:txBody>
-          <a:bodyPr wrap="square" lIns="0" tIns="0" rIns="0" bIns="0" rtlCol="0" anchor="ctr"/>
-          <a:lstStyle/>
-          <a:p>
-            <a:pPr indent="0" marL="0">
-              <a:buNone/>
-            </a:pPr>
-            <a:r>
-              <a:rPr lang="en-US" sz="1500" dirty="0">
-                <a:solidFill>
-                  <a:srgbClr val="6B7686"/>
-                </a:solidFill>
-              </a:rPr>
-              <a:t>Then open http://localhost:5000</a:t>
-            </a:r>
-            <a:endParaRPr lang="en-US" sz="1500" dirty="0"/>
-          </a:p>
-        </p:txBody>
-      </p:sp>
+      <p:pic>
+        <p:nvPicPr>
+          <p:cNvPr id="3" name="Image 0" descr="Countries, Infection wave, Case fatality and Pipeline views">    </p:cNvPr>
+          <p:cNvPicPr>
+            <a:picLocks noChangeAspect="1"/>
+          </p:cNvPicPr>
+          <p:nvPr/>
+        </p:nvPicPr>
+        <p:blipFill>
+          <a:blip r:embed="rId1"/>
+          <a:stretch>
+            <a:fillRect/>
+          </a:stretch>
+        </p:blipFill>
+        <p:spPr>
+          <a:xfrm>
+            <a:off x="1613810" y="1097280"/>
+            <a:ext cx="8961331" cy="5257800"/>
+          </a:xfrm>
+          <a:prstGeom prst="rect">
+            <a:avLst/>
+          </a:prstGeom>
+        </p:spPr>
+      </p:pic>
       <p:sp>
         <p:nvSpPr>
           <p:cNvPr id="25" name="Slide Number Placeholder 0"/>
@@ -5848,7 +8108,7 @@
                   <a:srgbClr val="1B2533"/>
                 </a:solidFill>
               </a:rPr>
-              <a:t>What the pipeline found</a:t>
+              <a:t>Running it end to end</a:t>
             </a:r>
             <a:endParaRPr lang="en-US" sz="3200" dirty="0"/>
           </a:p>
@@ -5856,75 +8116,51 @@
       </p:sp>
       <p:sp>
         <p:nvSpPr>
-          <p:cNvPr id="3" name="Text 1"/>
-          <p:cNvSpPr txBox="1"/>
-          <p:nvPr/>
-        </p:nvSpPr>
-        <p:spPr>
-          <a:xfrm>
-            <a:off x="548640" y="1143000"/>
-            <a:ext cx="2560320" cy="685800"/>
-          </a:xfrm>
-          <a:prstGeom prst="rect">
-            <a:avLst/>
-          </a:prstGeom>
-          <a:noFill/>
-          <a:ln/>
-        </p:spPr>
-        <p:txBody>
-          <a:bodyPr wrap="square" lIns="0" tIns="0" rIns="0" bIns="0" rtlCol="0" anchor="ctr"/>
-          <a:lstStyle/>
-          <a:p>
-            <a:pPr indent="0" marL="0">
-              <a:buNone/>
-            </a:pPr>
-            <a:r>
-              <a:rPr lang="en-US" sz="3600" b="1" dirty="0">
-                <a:solidFill>
-                  <a:srgbClr val="12355B"/>
-                </a:solidFill>
-              </a:rPr>
-              <a:t>2.20B</a:t>
-            </a:r>
-            <a:endParaRPr lang="en-US" sz="3600" dirty="0"/>
-          </a:p>
-        </p:txBody>
-      </p:sp>
-      <p:sp>
-        <p:nvSpPr>
-          <p:cNvPr id="4" name="Text 2"/>
-          <p:cNvSpPr txBox="1"/>
-          <p:nvPr/>
-        </p:nvSpPr>
-        <p:spPr>
-          <a:xfrm>
-            <a:off x="548640" y="1783080"/>
-            <a:ext cx="2560320" cy="320040"/>
-          </a:xfrm>
-          <a:prstGeom prst="rect">
-            <a:avLst/>
-          </a:prstGeom>
-          <a:noFill/>
-          <a:ln/>
-        </p:spPr>
-        <p:txBody>
-          <a:bodyPr wrap="square" lIns="0" tIns="0" rIns="0" bIns="0" rtlCol="0" anchor="ctr"/>
-          <a:lstStyle/>
-          <a:p>
-            <a:pPr indent="0" marL="0">
-              <a:buNone/>
-            </a:pPr>
-            <a:r>
-              <a:rPr lang="en-US" sz="1400" dirty="0">
-                <a:solidFill>
-                  <a:srgbClr val="6B7686"/>
-                </a:solidFill>
-              </a:rPr>
-              <a:t>cases</a:t>
-            </a:r>
-            <a:endParaRPr lang="en-US" sz="1400" dirty="0"/>
-          </a:p>
-        </p:txBody>
+          <p:cNvPr id="3" name="Shape 1"/>
+          <p:cNvSpPr/>
+          <p:nvPr/>
+        </p:nvSpPr>
+        <p:spPr>
+          <a:xfrm>
+            <a:off x="868680" y="1600200"/>
+            <a:ext cx="0" cy="3383280"/>
+          </a:xfrm>
+          <a:prstGeom prst="line">
+            <a:avLst/>
+          </a:prstGeom>
+          <a:noFill/>
+          <a:ln w="25400">
+            <a:solidFill>
+              <a:srgbClr val="C9D1DB"/>
+            </a:solidFill>
+            <a:prstDash val="solid"/>
+          </a:ln>
+        </p:spPr>
+      </p:sp>
+      <p:sp>
+        <p:nvSpPr>
+          <p:cNvPr id="4" name="Shape 2"/>
+          <p:cNvSpPr/>
+          <p:nvPr/>
+        </p:nvSpPr>
+        <p:spPr>
+          <a:xfrm>
+            <a:off x="594360" y="1325880"/>
+            <a:ext cx="548640" cy="548640"/>
+          </a:xfrm>
+          <a:prstGeom prst="ellipse">
+            <a:avLst/>
+          </a:prstGeom>
+          <a:solidFill>
+            <a:srgbClr val="12355B"/>
+          </a:solidFill>
+          <a:ln w="25400">
+            <a:solidFill>
+              <a:srgbClr val="FFFFFF"/>
+            </a:solidFill>
+            <a:prstDash val="solid"/>
+          </a:ln>
+        </p:spPr>
       </p:sp>
       <p:sp>
         <p:nvSpPr>
@@ -5934,8 +8170,8 @@
         </p:nvSpPr>
         <p:spPr>
           <a:xfrm>
-            <a:off x="3364992" y="1143000"/>
-            <a:ext cx="2560320" cy="685800"/>
+            <a:off x="594360" y="1325880"/>
+            <a:ext cx="548640" cy="548640"/>
           </a:xfrm>
           <a:prstGeom prst="rect">
             <a:avLst/>
@@ -5947,18 +8183,18 @@
           <a:bodyPr wrap="square" lIns="0" tIns="0" rIns="0" bIns="0" rtlCol="0" anchor="ctr"/>
           <a:lstStyle/>
           <a:p>
-            <a:pPr indent="0" marL="0">
-              <a:buNone/>
-            </a:pPr>
-            <a:r>
-              <a:rPr lang="en-US" sz="3600" b="1" dirty="0">
-                <a:solidFill>
-                  <a:srgbClr val="D1495B"/>
-                </a:solidFill>
-              </a:rPr>
-              <a:t>34.1M</a:t>
-            </a:r>
-            <a:endParaRPr lang="en-US" sz="3600" dirty="0"/>
+            <a:pPr algn="ctr" indent="0" marL="0">
+              <a:buNone/>
+            </a:pPr>
+            <a:r>
+              <a:rPr lang="en-US" sz="1500" b="1" dirty="0">
+                <a:solidFill>
+                  <a:srgbClr val="FFFFFF"/>
+                </a:solidFill>
+              </a:rPr>
+              <a:t>1</a:t>
+            </a:r>
+            <a:endParaRPr lang="en-US" sz="1500" dirty="0"/>
           </a:p>
         </p:txBody>
       </p:sp>
@@ -5970,8 +8206,8 @@
         </p:nvSpPr>
         <p:spPr>
           <a:xfrm>
-            <a:off x="3364992" y="1783080"/>
-            <a:ext cx="2560320" cy="320040"/>
+            <a:off x="1371600" y="1234440"/>
+            <a:ext cx="5029200" cy="777240"/>
           </a:xfrm>
           <a:prstGeom prst="rect">
             <a:avLst/>
@@ -5987,52 +8223,58 @@
               <a:buNone/>
             </a:pPr>
             <a:r>
+              <a:rPr lang="en-US" sz="1500" b="1" dirty="0">
+                <a:solidFill>
+                  <a:srgbClr val="1B2533"/>
+                </a:solidFill>
+                <a:latin typeface="Courier New" pitchFamily="34" charset="0"/>
+                <a:ea typeface="Courier New" pitchFamily="34" charset="-122"/>
+                <a:cs typeface="Courier New" pitchFamily="34" charset="-120"/>
+              </a:rPr>
+              <a:t>01_start_cluster.sh</a:t>
+            </a:r>
+            <a:endParaRPr lang="en-US" sz="1500" dirty="0"/>
+          </a:p>
+          <a:p>
+            <a:pPr indent="0" marL="0">
+              <a:buNone/>
+            </a:pPr>
+            <a:r>
               <a:rPr lang="en-US" sz="1400" dirty="0">
                 <a:solidFill>
                   <a:srgbClr val="6B7686"/>
                 </a:solidFill>
               </a:rPr>
-              <a:t>deaths</a:t>
-            </a:r>
-            <a:endParaRPr lang="en-US" sz="1400" dirty="0"/>
-          </a:p>
-        </p:txBody>
-      </p:sp>
-      <p:sp>
-        <p:nvSpPr>
-          <p:cNvPr id="7" name="Text 5"/>
-          <p:cNvSpPr txBox="1"/>
-          <p:nvPr/>
-        </p:nvSpPr>
-        <p:spPr>
-          <a:xfrm>
-            <a:off x="6181344" y="1143000"/>
-            <a:ext cx="2560320" cy="685800"/>
-          </a:xfrm>
-          <a:prstGeom prst="rect">
-            <a:avLst/>
-          </a:prstGeom>
-          <a:noFill/>
-          <a:ln/>
-        </p:spPr>
-        <p:txBody>
-          <a:bodyPr wrap="square" lIns="0" tIns="0" rIns="0" bIns="0" rtlCol="0" anchor="ctr"/>
-          <a:lstStyle/>
-          <a:p>
-            <a:pPr indent="0" marL="0">
-              <a:buNone/>
-            </a:pPr>
-            <a:r>
-              <a:rPr lang="en-US" sz="3600" b="1" dirty="0">
-                <a:solidFill>
-                  <a:srgbClr val="12355B"/>
-                </a:solidFill>
-              </a:rPr>
-              <a:t>1.55%</a:t>
-            </a:r>
-            <a:endParaRPr lang="en-US" sz="3600" dirty="0"/>
-          </a:p>
-        </p:txBody>
+              <a:t>docker-compose up -d · wait for HDFS</a:t>
+            </a:r>
+            <a:endParaRPr lang="en-US" sz="1500" dirty="0"/>
+          </a:p>
+        </p:txBody>
+      </p:sp>
+      <p:sp>
+        <p:nvSpPr>
+          <p:cNvPr id="7" name="Shape 5"/>
+          <p:cNvSpPr/>
+          <p:nvPr/>
+        </p:nvSpPr>
+        <p:spPr>
+          <a:xfrm>
+            <a:off x="594360" y="2423160"/>
+            <a:ext cx="548640" cy="548640"/>
+          </a:xfrm>
+          <a:prstGeom prst="ellipse">
+            <a:avLst/>
+          </a:prstGeom>
+          <a:solidFill>
+            <a:srgbClr val="12355B"/>
+          </a:solidFill>
+          <a:ln w="25400">
+            <a:solidFill>
+              <a:srgbClr val="FFFFFF"/>
+            </a:solidFill>
+            <a:prstDash val="solid"/>
+          </a:ln>
+        </p:spPr>
       </p:sp>
       <p:sp>
         <p:nvSpPr>
@@ -6042,8 +8284,8 @@
         </p:nvSpPr>
         <p:spPr>
           <a:xfrm>
-            <a:off x="6181344" y="1783080"/>
-            <a:ext cx="2560320" cy="320040"/>
+            <a:off x="594360" y="2423160"/>
+            <a:ext cx="548640" cy="548640"/>
           </a:xfrm>
           <a:prstGeom prst="rect">
             <a:avLst/>
@@ -6055,18 +8297,18 @@
           <a:bodyPr wrap="square" lIns="0" tIns="0" rIns="0" bIns="0" rtlCol="0" anchor="ctr"/>
           <a:lstStyle/>
           <a:p>
-            <a:pPr indent="0" marL="0">
-              <a:buNone/>
-            </a:pPr>
-            <a:r>
-              <a:rPr lang="en-US" sz="1400" dirty="0">
-                <a:solidFill>
-                  <a:srgbClr val="6B7686"/>
-                </a:solidFill>
-              </a:rPr>
-              <a:t>global CFR</a:t>
-            </a:r>
-            <a:endParaRPr lang="en-US" sz="1400" dirty="0"/>
+            <a:pPr algn="ctr" indent="0" marL="0">
+              <a:buNone/>
+            </a:pPr>
+            <a:r>
+              <a:rPr lang="en-US" sz="1500" b="1" dirty="0">
+                <a:solidFill>
+                  <a:srgbClr val="FFFFFF"/>
+                </a:solidFill>
+              </a:rPr>
+              <a:t>2</a:t>
+            </a:r>
+            <a:endParaRPr lang="en-US" sz="1500" dirty="0"/>
           </a:p>
         </p:txBody>
       </p:sp>
@@ -6078,8 +8320,8 @@
         </p:nvSpPr>
         <p:spPr>
           <a:xfrm>
-            <a:off x="8997696" y="1143000"/>
-            <a:ext cx="2560320" cy="685800"/>
+            <a:off x="1371600" y="2331720"/>
+            <a:ext cx="5029200" cy="777240"/>
           </a:xfrm>
           <a:prstGeom prst="rect">
             <a:avLst/>
@@ -6095,27 +8337,374 @@
               <a:buNone/>
             </a:pPr>
             <a:r>
-              <a:rPr lang="en-US" sz="3600" b="1" dirty="0">
+              <a:rPr lang="en-US" sz="1500" b="1" dirty="0">
+                <a:solidFill>
+                  <a:srgbClr val="1B2533"/>
+                </a:solidFill>
+                <a:latin typeface="Courier New" pitchFamily="34" charset="0"/>
+                <a:ea typeface="Courier New" pitchFamily="34" charset="-122"/>
+                <a:cs typeface="Courier New" pitchFamily="34" charset="-120"/>
+              </a:rPr>
+              <a:t>02_upload_data.sh</a:t>
+            </a:r>
+            <a:endParaRPr lang="en-US" sz="1500" dirty="0"/>
+          </a:p>
+          <a:p>
+            <a:pPr indent="0" marL="0">
+              <a:buNone/>
+            </a:pPr>
+            <a:r>
+              <a:rPr lang="en-US" sz="1400" dirty="0">
+                <a:solidFill>
+                  <a:srgbClr val="6B7686"/>
+                </a:solidFill>
+              </a:rPr>
+              <a:t>generate CSV if missing · hdfs dfs -put</a:t>
+            </a:r>
+            <a:endParaRPr lang="en-US" sz="1500" dirty="0"/>
+          </a:p>
+        </p:txBody>
+      </p:sp>
+      <p:sp>
+        <p:nvSpPr>
+          <p:cNvPr id="10" name="Shape 8"/>
+          <p:cNvSpPr/>
+          <p:nvPr/>
+        </p:nvSpPr>
+        <p:spPr>
+          <a:xfrm>
+            <a:off x="594360" y="3520440"/>
+            <a:ext cx="548640" cy="548640"/>
+          </a:xfrm>
+          <a:prstGeom prst="ellipse">
+            <a:avLst/>
+          </a:prstGeom>
+          <a:solidFill>
+            <a:srgbClr val="12355B"/>
+          </a:solidFill>
+          <a:ln w="25400">
+            <a:solidFill>
+              <a:srgbClr val="FFFFFF"/>
+            </a:solidFill>
+            <a:prstDash val="solid"/>
+          </a:ln>
+        </p:spPr>
+      </p:sp>
+      <p:sp>
+        <p:nvSpPr>
+          <p:cNvPr id="11" name="Text 9"/>
+          <p:cNvSpPr txBox="1"/>
+          <p:nvPr/>
+        </p:nvSpPr>
+        <p:spPr>
+          <a:xfrm>
+            <a:off x="594360" y="3520440"/>
+            <a:ext cx="548640" cy="548640"/>
+          </a:xfrm>
+          <a:prstGeom prst="rect">
+            <a:avLst/>
+          </a:prstGeom>
+          <a:noFill/>
+          <a:ln/>
+        </p:spPr>
+        <p:txBody>
+          <a:bodyPr wrap="square" lIns="0" tIns="0" rIns="0" bIns="0" rtlCol="0" anchor="ctr"/>
+          <a:lstStyle/>
+          <a:p>
+            <a:pPr algn="ctr" indent="0" marL="0">
+              <a:buNone/>
+            </a:pPr>
+            <a:r>
+              <a:rPr lang="en-US" sz="1500" b="1" dirty="0">
+                <a:solidFill>
+                  <a:srgbClr val="FFFFFF"/>
+                </a:solidFill>
+              </a:rPr>
+              <a:t>3</a:t>
+            </a:r>
+            <a:endParaRPr lang="en-US" sz="1500" dirty="0"/>
+          </a:p>
+        </p:txBody>
+      </p:sp>
+      <p:sp>
+        <p:nvSpPr>
+          <p:cNvPr id="12" name="Text 10"/>
+          <p:cNvSpPr txBox="1"/>
+          <p:nvPr/>
+        </p:nvSpPr>
+        <p:spPr>
+          <a:xfrm>
+            <a:off x="1371600" y="3429000"/>
+            <a:ext cx="5029200" cy="777240"/>
+          </a:xfrm>
+          <a:prstGeom prst="rect">
+            <a:avLst/>
+          </a:prstGeom>
+          <a:noFill/>
+          <a:ln/>
+        </p:spPr>
+        <p:txBody>
+          <a:bodyPr wrap="square" lIns="0" tIns="0" rIns="0" bIns="0" rtlCol="0" anchor="ctr"/>
+          <a:lstStyle/>
+          <a:p>
+            <a:pPr indent="0" marL="0">
+              <a:buNone/>
+            </a:pPr>
+            <a:r>
+              <a:rPr lang="en-US" sz="1500" b="1" dirty="0">
+                <a:solidFill>
+                  <a:srgbClr val="1B2533"/>
+                </a:solidFill>
+                <a:latin typeface="Courier New" pitchFamily="34" charset="0"/>
+                <a:ea typeface="Courier New" pitchFamily="34" charset="-122"/>
+                <a:cs typeface="Courier New" pitchFamily="34" charset="-120"/>
+              </a:rPr>
+              <a:t>03_run_mapreduce.sh</a:t>
+            </a:r>
+            <a:endParaRPr lang="en-US" sz="1500" dirty="0"/>
+          </a:p>
+          <a:p>
+            <a:pPr indent="0" marL="0">
+              <a:buNone/>
+            </a:pPr>
+            <a:r>
+              <a:rPr lang="en-US" sz="1400" dirty="0">
+                <a:solidFill>
+                  <a:srgbClr val="6B7686"/>
+                </a:solidFill>
+              </a:rPr>
+              <a:t>streaming job on YARN · export CSV</a:t>
+            </a:r>
+            <a:endParaRPr lang="en-US" sz="1500" dirty="0"/>
+          </a:p>
+        </p:txBody>
+      </p:sp>
+      <p:sp>
+        <p:nvSpPr>
+          <p:cNvPr id="13" name="Shape 11"/>
+          <p:cNvSpPr/>
+          <p:nvPr/>
+        </p:nvSpPr>
+        <p:spPr>
+          <a:xfrm>
+            <a:off x="594360" y="4617720"/>
+            <a:ext cx="548640" cy="548640"/>
+          </a:xfrm>
+          <a:prstGeom prst="ellipse">
+            <a:avLst/>
+          </a:prstGeom>
+          <a:solidFill>
+            <a:srgbClr val="12355B"/>
+          </a:solidFill>
+          <a:ln w="25400">
+            <a:solidFill>
+              <a:srgbClr val="FFFFFF"/>
+            </a:solidFill>
+            <a:prstDash val="solid"/>
+          </a:ln>
+        </p:spPr>
+      </p:sp>
+      <p:sp>
+        <p:nvSpPr>
+          <p:cNvPr id="14" name="Text 12"/>
+          <p:cNvSpPr txBox="1"/>
+          <p:nvPr/>
+        </p:nvSpPr>
+        <p:spPr>
+          <a:xfrm>
+            <a:off x="594360" y="4617720"/>
+            <a:ext cx="548640" cy="548640"/>
+          </a:xfrm>
+          <a:prstGeom prst="rect">
+            <a:avLst/>
+          </a:prstGeom>
+          <a:noFill/>
+          <a:ln/>
+        </p:spPr>
+        <p:txBody>
+          <a:bodyPr wrap="square" lIns="0" tIns="0" rIns="0" bIns="0" rtlCol="0" anchor="ctr"/>
+          <a:lstStyle/>
+          <a:p>
+            <a:pPr algn="ctr" indent="0" marL="0">
+              <a:buNone/>
+            </a:pPr>
+            <a:r>
+              <a:rPr lang="en-US" sz="1500" b="1" dirty="0">
+                <a:solidFill>
+                  <a:srgbClr val="FFFFFF"/>
+                </a:solidFill>
+              </a:rPr>
+              <a:t>4</a:t>
+            </a:r>
+            <a:endParaRPr lang="en-US" sz="1500" dirty="0"/>
+          </a:p>
+        </p:txBody>
+      </p:sp>
+      <p:sp>
+        <p:nvSpPr>
+          <p:cNvPr id="15" name="Text 13"/>
+          <p:cNvSpPr txBox="1"/>
+          <p:nvPr/>
+        </p:nvSpPr>
+        <p:spPr>
+          <a:xfrm>
+            <a:off x="1371600" y="4526280"/>
+            <a:ext cx="5029200" cy="777240"/>
+          </a:xfrm>
+          <a:prstGeom prst="rect">
+            <a:avLst/>
+          </a:prstGeom>
+          <a:noFill/>
+          <a:ln/>
+        </p:spPr>
+        <p:txBody>
+          <a:bodyPr wrap="square" lIns="0" tIns="0" rIns="0" bIns="0" rtlCol="0" anchor="ctr"/>
+          <a:lstStyle/>
+          <a:p>
+            <a:pPr indent="0" marL="0">
+              <a:buNone/>
+            </a:pPr>
+            <a:r>
+              <a:rPr lang="en-US" sz="1500" b="1" dirty="0">
+                <a:solidFill>
+                  <a:srgbClr val="1B2533"/>
+                </a:solidFill>
+                <a:latin typeface="Courier New" pitchFamily="34" charset="0"/>
+                <a:ea typeface="Courier New" pitchFamily="34" charset="-122"/>
+                <a:cs typeface="Courier New" pitchFamily="34" charset="-120"/>
+              </a:rPr>
+              <a:t>04_run_spark.sh</a:t>
+            </a:r>
+            <a:endParaRPr lang="en-US" sz="1500" dirty="0"/>
+          </a:p>
+          <a:p>
+            <a:pPr indent="0" marL="0">
+              <a:buNone/>
+            </a:pPr>
+            <a:r>
+              <a:rPr lang="en-US" sz="1400" dirty="0">
+                <a:solidFill>
+                  <a:srgbClr val="6B7686"/>
+                </a:solidFill>
+              </a:rPr>
+              <a:t>spark-submit to spark-master:7077</a:t>
+            </a:r>
+            <a:endParaRPr lang="en-US" sz="1500" dirty="0"/>
+          </a:p>
+        </p:txBody>
+      </p:sp>
+      <p:sp>
+        <p:nvSpPr>
+          <p:cNvPr id="16" name="Shape 14"/>
+          <p:cNvSpPr/>
+          <p:nvPr/>
+        </p:nvSpPr>
+        <p:spPr>
+          <a:xfrm>
+            <a:off x="6858000" y="1325880"/>
+            <a:ext cx="4754880" cy="1691640"/>
+          </a:xfrm>
+          <a:prstGeom prst="roundRect">
+            <a:avLst>
+              <a:gd name="adj" fmla="val 5405"/>
+            </a:avLst>
+          </a:prstGeom>
+          <a:solidFill>
+            <a:srgbClr val="E6ECF3"/>
+          </a:solidFill>
+          <a:ln w="15875">
+            <a:solidFill>
+              <a:srgbClr val="12355B"/>
+            </a:solidFill>
+            <a:prstDash val="solid"/>
+          </a:ln>
+        </p:spPr>
+      </p:sp>
+      <p:sp>
+        <p:nvSpPr>
+          <p:cNvPr id="17" name="Text 15"/>
+          <p:cNvSpPr txBox="1"/>
+          <p:nvPr/>
+        </p:nvSpPr>
+        <p:spPr>
+          <a:xfrm>
+            <a:off x="7086600" y="1463040"/>
+            <a:ext cx="4389120" cy="411480"/>
+          </a:xfrm>
+          <a:prstGeom prst="rect">
+            <a:avLst/>
+          </a:prstGeom>
+          <a:noFill/>
+          <a:ln/>
+        </p:spPr>
+        <p:txBody>
+          <a:bodyPr wrap="square" lIns="0" tIns="0" rIns="0" bIns="0" rtlCol="0" anchor="ctr"/>
+          <a:lstStyle/>
+          <a:p>
+            <a:pPr indent="0" marL="0">
+              <a:buNone/>
+            </a:pPr>
+            <a:r>
+              <a:rPr lang="en-US" sz="1800" b="1" dirty="0">
+                <a:solidFill>
+                  <a:srgbClr val="1B2533"/>
+                </a:solidFill>
+              </a:rPr>
+              <a:t>Cluster mode</a:t>
+            </a:r>
+            <a:endParaRPr lang="en-US" sz="1800" dirty="0"/>
+          </a:p>
+        </p:txBody>
+      </p:sp>
+      <p:sp>
+        <p:nvSpPr>
+          <p:cNvPr id="18" name="Text 16"/>
+          <p:cNvSpPr txBox="1"/>
+          <p:nvPr/>
+        </p:nvSpPr>
+        <p:spPr>
+          <a:xfrm>
+            <a:off x="7086600" y="1920240"/>
+            <a:ext cx="4389120" cy="365760"/>
+          </a:xfrm>
+          <a:prstGeom prst="rect">
+            <a:avLst/>
+          </a:prstGeom>
+          <a:noFill/>
+          <a:ln/>
+        </p:spPr>
+        <p:txBody>
+          <a:bodyPr wrap="square" lIns="0" tIns="0" rIns="0" bIns="0" rtlCol="0" anchor="ctr"/>
+          <a:lstStyle/>
+          <a:p>
+            <a:pPr indent="0" marL="0">
+              <a:buNone/>
+            </a:pPr>
+            <a:r>
+              <a:rPr lang="en-US" sz="1400" dirty="0">
                 <a:solidFill>
                   <a:srgbClr val="12355B"/>
                 </a:solidFill>
-              </a:rPr>
-              <a:t>2.5M</a:t>
-            </a:r>
-            <a:endParaRPr lang="en-US" sz="3600" dirty="0"/>
-          </a:p>
-        </p:txBody>
-      </p:sp>
-      <p:sp>
-        <p:nvSpPr>
-          <p:cNvPr id="10" name="Text 8"/>
+                <a:latin typeface="Courier New" pitchFamily="34" charset="0"/>
+                <a:ea typeface="Courier New" pitchFamily="34" charset="-122"/>
+                <a:cs typeface="Courier New" pitchFamily="34" charset="-120"/>
+              </a:rPr>
+              <a:t>bash run_all.sh</a:t>
+            </a:r>
+            <a:endParaRPr lang="en-US" sz="1400" dirty="0"/>
+          </a:p>
+        </p:txBody>
+      </p:sp>
+      <p:sp>
+        <p:nvSpPr>
+          <p:cNvPr id="19" name="Text 17"/>
           <p:cNvSpPr txBox="1"/>
           <p:nvPr/>
         </p:nvSpPr>
         <p:spPr>
           <a:xfrm>
-            <a:off x="8997696" y="1783080"/>
-            <a:ext cx="2560320" cy="320040"/>
+            <a:off x="7086600" y="2331720"/>
+            <a:ext cx="4389120" cy="548640"/>
           </a:xfrm>
           <a:prstGeom prst="rect">
             <a:avLst/>
@@ -6124,6 +8713,69 @@
           <a:ln/>
         </p:spPr>
         <p:txBody>
+          <a:bodyPr wrap="square" lIns="0" tIns="0" rIns="0" bIns="0" rtlCol="0" anchor="t"/>
+          <a:lstStyle/>
+          <a:p>
+            <a:pPr indent="0" marL="0">
+              <a:buNone/>
+            </a:pPr>
+            <a:r>
+              <a:rPr lang="en-US" sz="1400" dirty="0">
+                <a:solidFill>
+                  <a:srgbClr val="6B7686"/>
+                </a:solidFill>
+              </a:rPr>
+              <a:t>HDFS, YARN and Spark in 10 containers</a:t>
+            </a:r>
+            <a:endParaRPr lang="en-US" sz="1400" dirty="0"/>
+          </a:p>
+        </p:txBody>
+      </p:sp>
+      <p:sp>
+        <p:nvSpPr>
+          <p:cNvPr id="20" name="Shape 18"/>
+          <p:cNvSpPr/>
+          <p:nvPr/>
+        </p:nvSpPr>
+        <p:spPr>
+          <a:xfrm>
+            <a:off x="6858000" y="3291840"/>
+            <a:ext cx="4754880" cy="1691640"/>
+          </a:xfrm>
+          <a:prstGeom prst="roundRect">
+            <a:avLst>
+              <a:gd name="adj" fmla="val 5405"/>
+            </a:avLst>
+          </a:prstGeom>
+          <a:solidFill>
+            <a:srgbClr val="E3F4F1"/>
+          </a:solidFill>
+          <a:ln w="15875">
+            <a:solidFill>
+              <a:srgbClr val="1B998B"/>
+            </a:solidFill>
+            <a:prstDash val="solid"/>
+          </a:ln>
+        </p:spPr>
+      </p:sp>
+      <p:sp>
+        <p:nvSpPr>
+          <p:cNvPr id="21" name="Text 19"/>
+          <p:cNvSpPr txBox="1"/>
+          <p:nvPr/>
+        </p:nvSpPr>
+        <p:spPr>
+          <a:xfrm>
+            <a:off x="7086600" y="3429000"/>
+            <a:ext cx="4389120" cy="411480"/>
+          </a:xfrm>
+          <a:prstGeom prst="rect">
+            <a:avLst/>
+          </a:prstGeom>
+          <a:noFill/>
+          <a:ln/>
+        </p:spPr>
+        <p:txBody>
           <a:bodyPr wrap="square" lIns="0" tIns="0" rIns="0" bIns="0" rtlCol="0" anchor="ctr"/>
           <a:lstStyle/>
           <a:p>
@@ -6131,49 +8783,128 @@
               <a:buNone/>
             </a:pPr>
             <a:r>
+              <a:rPr lang="en-US" sz="1800" b="1" dirty="0">
+                <a:solidFill>
+                  <a:srgbClr val="1B2533"/>
+                </a:solidFill>
+              </a:rPr>
+              <a:t>Local mode</a:t>
+            </a:r>
+            <a:endParaRPr lang="en-US" sz="1800" dirty="0"/>
+          </a:p>
+        </p:txBody>
+      </p:sp>
+      <p:sp>
+        <p:nvSpPr>
+          <p:cNvPr id="22" name="Text 20"/>
+          <p:cNvSpPr txBox="1"/>
+          <p:nvPr/>
+        </p:nvSpPr>
+        <p:spPr>
+          <a:xfrm>
+            <a:off x="7086600" y="3886200"/>
+            <a:ext cx="4389120" cy="365760"/>
+          </a:xfrm>
+          <a:prstGeom prst="rect">
+            <a:avLst/>
+          </a:prstGeom>
+          <a:noFill/>
+          <a:ln/>
+        </p:spPr>
+        <p:txBody>
+          <a:bodyPr wrap="square" lIns="0" tIns="0" rIns="0" bIns="0" rtlCol="0" anchor="ctr"/>
+          <a:lstStyle/>
+          <a:p>
+            <a:pPr indent="0" marL="0">
+              <a:buNone/>
+            </a:pPr>
+            <a:r>
               <a:rPr lang="en-US" sz="1400" dirty="0">
                 <a:solidFill>
+                  <a:srgbClr val="1B998B"/>
+                </a:solidFill>
+                <a:latin typeface="Courier New" pitchFamily="34" charset="0"/>
+                <a:ea typeface="Courier New" pitchFamily="34" charset="-122"/>
+                <a:cs typeface="Courier New" pitchFamily="34" charset="-120"/>
+              </a:rPr>
+              <a:t>bash scripts/05_run_local.sh</a:t>
+            </a:r>
+            <a:endParaRPr lang="en-US" sz="1400" dirty="0"/>
+          </a:p>
+        </p:txBody>
+      </p:sp>
+      <p:sp>
+        <p:nvSpPr>
+          <p:cNvPr id="23" name="Text 21"/>
+          <p:cNvSpPr txBox="1"/>
+          <p:nvPr/>
+        </p:nvSpPr>
+        <p:spPr>
+          <a:xfrm>
+            <a:off x="7086600" y="4297680"/>
+            <a:ext cx="4389120" cy="548640"/>
+          </a:xfrm>
+          <a:prstGeom prst="rect">
+            <a:avLst/>
+          </a:prstGeom>
+          <a:noFill/>
+          <a:ln/>
+        </p:spPr>
+        <p:txBody>
+          <a:bodyPr wrap="square" lIns="0" tIns="0" rIns="0" bIns="0" rtlCol="0" anchor="t"/>
+          <a:lstStyle/>
+          <a:p>
+            <a:pPr indent="0" marL="0">
+              <a:buNone/>
+            </a:pPr>
+            <a:r>
+              <a:rPr lang="en-US" sz="1400" dirty="0">
+                <a:solidFill>
                   <a:srgbClr val="6B7686"/>
                 </a:solidFill>
               </a:rPr>
-              <a:t>peak 7-day avg</a:t>
+              <a:t>Same jobs on the host; MapReduce as mapper | sort | reducer</a:t>
             </a:r>
             <a:endParaRPr lang="en-US" sz="1400" dirty="0"/>
           </a:p>
         </p:txBody>
       </p:sp>
-      <p:graphicFrame>
-        <p:nvGraphicFramePr>
-          <p:cNvPr id="11" name="Chart 0" descr=""/>
-          <p:cNvGraphicFramePr/>
-          <p:nvPr/>
-        </p:nvGraphicFramePr>
-        <p:xfrm>
-          <a:off x="548640" y="2331720"/>
-          <a:ext cx="6035040" cy="3886200"/>
-        </p:xfrm>
-        <a:graphic xmlns:a="http://schemas.openxmlformats.org/drawingml/2006/main">
-          <a:graphicData uri="http://schemas.openxmlformats.org/drawingml/2006/chart">
-            <c:chart xmlns:c="http://schemas.openxmlformats.org/drawingml/2006/chart" r:id="rId1"/>
-          </a:graphicData>
-        </a:graphic>
-      </p:graphicFrame>
-      <p:graphicFrame>
-        <p:nvGraphicFramePr>
-          <p:cNvPr id="12" name="Chart 1" descr=""/>
-          <p:cNvGraphicFramePr/>
-          <p:nvPr/>
-        </p:nvGraphicFramePr>
-        <p:xfrm>
-          <a:off x="6858000" y="2331720"/>
-          <a:ext cx="4754880" cy="3886200"/>
-        </p:xfrm>
-        <a:graphic xmlns:a="http://schemas.openxmlformats.org/drawingml/2006/main">
-          <a:graphicData uri="http://schemas.openxmlformats.org/drawingml/2006/chart">
-            <c:chart xmlns:c="http://schemas.openxmlformats.org/drawingml/2006/chart" r:id="rId2"/>
-          </a:graphicData>
-        </a:graphic>
-      </p:graphicFrame>
+      <p:sp>
+        <p:nvSpPr>
+          <p:cNvPr id="24" name="Text 22"/>
+          <p:cNvSpPr txBox="1"/>
+          <p:nvPr/>
+        </p:nvSpPr>
+        <p:spPr>
+          <a:xfrm>
+            <a:off x="548640" y="5669280"/>
+            <a:ext cx="5943600" cy="365760"/>
+          </a:xfrm>
+          <a:prstGeom prst="rect">
+            <a:avLst/>
+          </a:prstGeom>
+          <a:noFill/>
+          <a:ln/>
+        </p:spPr>
+        <p:txBody>
+          <a:bodyPr wrap="square" lIns="0" tIns="0" rIns="0" bIns="0" rtlCol="0" anchor="ctr"/>
+          <a:lstStyle/>
+          <a:p>
+            <a:pPr indent="0" marL="0">
+              <a:buNone/>
+            </a:pPr>
+            <a:r>
+              <a:rPr lang="en-US" sz="1500" dirty="0">
+                <a:solidFill>
+                  <a:srgbClr val="6B7686"/>
+                </a:solidFill>
+              </a:rPr>
+              <a:t>Then open http://localhost:5000</a:t>
+            </a:r>
+            <a:endParaRPr lang="en-US" sz="1500" dirty="0"/>
+          </a:p>
+        </p:txBody>
+      </p:sp>
       <p:sp>
         <p:nvSpPr>
           <p:cNvPr id="25" name="Slide Number Placeholder 0"/>
@@ -6276,7 +9007,7 @@
                   <a:srgbClr val="1B2533"/>
                 </a:solidFill>
               </a:rPr>
-              <a:t>How we know it works</a:t>
+              <a:t>What the pipeline found</a:t>
             </a:r>
             <a:endParaRPr lang="en-US" sz="3200" dirty="0"/>
           </a:p>
@@ -6284,65 +9015,14 @@
       </p:sp>
       <p:sp>
         <p:nvSpPr>
-          <p:cNvPr id="3" name="Shape 1"/>
-          <p:cNvSpPr/>
-          <p:nvPr/>
-        </p:nvSpPr>
-        <p:spPr>
-          <a:xfrm>
-            <a:off x="548640" y="1280160"/>
-            <a:ext cx="5440680" cy="1005840"/>
-          </a:xfrm>
-          <a:prstGeom prst="roundRect">
-            <a:avLst>
-              <a:gd name="adj" fmla="val 7273"/>
-            </a:avLst>
-          </a:prstGeom>
-          <a:solidFill>
-            <a:srgbClr val="F4F6F9"/>
-          </a:solidFill>
-          <a:ln w="12700">
-            <a:solidFill>
-              <a:srgbClr val="F4F6F9"/>
-            </a:solidFill>
-            <a:prstDash val="solid"/>
-          </a:ln>
-        </p:spPr>
-      </p:sp>
-      <p:pic>
-        <p:nvPicPr>
-          <p:cNvPr id="4" name="Image 0" descr="preencoded.png">    </p:cNvPr>
-          <p:cNvPicPr>
-            <a:picLocks noChangeAspect="1"/>
-          </p:cNvPicPr>
-          <p:nvPr/>
-        </p:nvPicPr>
-        <p:blipFill>
-          <a:blip r:embed="rId1"/>
-          <a:stretch>
-            <a:fillRect/>
-          </a:stretch>
-        </p:blipFill>
-        <p:spPr>
-          <a:xfrm>
-            <a:off x="749808" y="1554480"/>
-            <a:ext cx="457200" cy="457200"/>
-          </a:xfrm>
-          <a:prstGeom prst="rect">
-            <a:avLst/>
-          </a:prstGeom>
-        </p:spPr>
-      </p:pic>
-      <p:sp>
-        <p:nvSpPr>
-          <p:cNvPr id="5" name="Text 2"/>
+          <p:cNvPr id="3" name="Text 1"/>
           <p:cNvSpPr txBox="1"/>
           <p:nvPr/>
         </p:nvSpPr>
         <p:spPr>
           <a:xfrm>
-            <a:off x="1371600" y="1280160"/>
-            <a:ext cx="4480560" cy="1005840"/>
+            <a:off x="548640" y="1143000"/>
+            <a:ext cx="2560320" cy="685800"/>
           </a:xfrm>
           <a:prstGeom prst="rect">
             <a:avLst/>
@@ -6358,15 +9038,37 @@
               <a:buNone/>
             </a:pPr>
             <a:r>
-              <a:rPr lang="en-US" sz="1600" b="1" dirty="0">
-                <a:solidFill>
-                  <a:srgbClr val="1B2533"/>
-                </a:solidFill>
-              </a:rPr>
-              <a:t>Spark jobs 1–5</a:t>
-            </a:r>
-            <a:endParaRPr lang="en-US" sz="1600" dirty="0"/>
-          </a:p>
+              <a:rPr lang="en-US" sz="3600" b="1" dirty="0">
+                <a:solidFill>
+                  <a:srgbClr val="12355B"/>
+                </a:solidFill>
+              </a:rPr>
+              <a:t>2.20B</a:t>
+            </a:r>
+            <a:endParaRPr lang="en-US" sz="3600" dirty="0"/>
+          </a:p>
+        </p:txBody>
+      </p:sp>
+      <p:sp>
+        <p:nvSpPr>
+          <p:cNvPr id="4" name="Text 2"/>
+          <p:cNvSpPr txBox="1"/>
+          <p:nvPr/>
+        </p:nvSpPr>
+        <p:spPr>
+          <a:xfrm>
+            <a:off x="548640" y="1783080"/>
+            <a:ext cx="2560320" cy="320040"/>
+          </a:xfrm>
+          <a:prstGeom prst="rect">
+            <a:avLst/>
+          </a:prstGeom>
+          <a:noFill/>
+          <a:ln/>
+        </p:spPr>
+        <p:txBody>
+          <a:bodyPr wrap="square" lIns="0" tIns="0" rIns="0" bIns="0" rtlCol="0" anchor="ctr"/>
+          <a:lstStyle/>
           <a:p>
             <a:pPr indent="0" marL="0">
               <a:buNone/>
@@ -6377,73 +9079,22 @@
                   <a:srgbClr val="6B7686"/>
                 </a:solidFill>
               </a:rPr>
-              <a:t>match an independent pandas recomputation</a:t>
-            </a:r>
-            <a:endParaRPr lang="en-US" sz="1600" dirty="0"/>
-          </a:p>
-        </p:txBody>
-      </p:sp>
-      <p:sp>
-        <p:nvSpPr>
-          <p:cNvPr id="6" name="Shape 3"/>
-          <p:cNvSpPr/>
-          <p:nvPr/>
-        </p:nvSpPr>
-        <p:spPr>
-          <a:xfrm>
-            <a:off x="6172200" y="1280160"/>
-            <a:ext cx="5440680" cy="1005840"/>
-          </a:xfrm>
-          <a:prstGeom prst="roundRect">
-            <a:avLst>
-              <a:gd name="adj" fmla="val 7273"/>
-            </a:avLst>
-          </a:prstGeom>
-          <a:solidFill>
-            <a:srgbClr val="F4F6F9"/>
-          </a:solidFill>
-          <a:ln w="12700">
-            <a:solidFill>
-              <a:srgbClr val="F4F6F9"/>
-            </a:solidFill>
-            <a:prstDash val="solid"/>
-          </a:ln>
-        </p:spPr>
-      </p:sp>
-      <p:pic>
-        <p:nvPicPr>
-          <p:cNvPr id="7" name="Image 1" descr="preencoded.png">    </p:cNvPr>
-          <p:cNvPicPr>
-            <a:picLocks noChangeAspect="1"/>
-          </p:cNvPicPr>
-          <p:nvPr/>
-        </p:nvPicPr>
-        <p:blipFill>
-          <a:blip r:embed="rId2"/>
-          <a:stretch>
-            <a:fillRect/>
-          </a:stretch>
-        </p:blipFill>
-        <p:spPr>
-          <a:xfrm>
-            <a:off x="6373368" y="1554480"/>
-            <a:ext cx="457200" cy="457200"/>
-          </a:xfrm>
-          <a:prstGeom prst="rect">
-            <a:avLst/>
-          </a:prstGeom>
-        </p:spPr>
-      </p:pic>
-      <p:sp>
-        <p:nvSpPr>
-          <p:cNvPr id="8" name="Text 4"/>
+              <a:t>cases</a:t>
+            </a:r>
+            <a:endParaRPr lang="en-US" sz="1400" dirty="0"/>
+          </a:p>
+        </p:txBody>
+      </p:sp>
+      <p:sp>
+        <p:nvSpPr>
+          <p:cNvPr id="5" name="Text 3"/>
           <p:cNvSpPr txBox="1"/>
           <p:nvPr/>
         </p:nvSpPr>
         <p:spPr>
           <a:xfrm>
-            <a:off x="6995160" y="1280160"/>
-            <a:ext cx="4480560" cy="1005840"/>
+            <a:off x="3364992" y="1143000"/>
+            <a:ext cx="2560320" cy="685800"/>
           </a:xfrm>
           <a:prstGeom prst="rect">
             <a:avLst/>
@@ -6459,15 +9110,37 @@
               <a:buNone/>
             </a:pPr>
             <a:r>
-              <a:rPr lang="en-US" sz="1600" b="1" dirty="0">
-                <a:solidFill>
-                  <a:srgbClr val="1B2533"/>
-                </a:solidFill>
-              </a:rPr>
-              <a:t>MapReduce on YARN</a:t>
-            </a:r>
-            <a:endParaRPr lang="en-US" sz="1600" dirty="0"/>
-          </a:p>
+              <a:rPr lang="en-US" sz="3600" b="1" dirty="0">
+                <a:solidFill>
+                  <a:srgbClr val="D1495B"/>
+                </a:solidFill>
+              </a:rPr>
+              <a:t>34.1M</a:t>
+            </a:r>
+            <a:endParaRPr lang="en-US" sz="3600" dirty="0"/>
+          </a:p>
+        </p:txBody>
+      </p:sp>
+      <p:sp>
+        <p:nvSpPr>
+          <p:cNvPr id="6" name="Text 4"/>
+          <p:cNvSpPr txBox="1"/>
+          <p:nvPr/>
+        </p:nvSpPr>
+        <p:spPr>
+          <a:xfrm>
+            <a:off x="3364992" y="1783080"/>
+            <a:ext cx="2560320" cy="320040"/>
+          </a:xfrm>
+          <a:prstGeom prst="rect">
+            <a:avLst/>
+          </a:prstGeom>
+          <a:noFill/>
+          <a:ln/>
+        </p:spPr>
+        <p:txBody>
+          <a:bodyPr wrap="square" lIns="0" tIns="0" rIns="0" bIns="0" rtlCol="0" anchor="ctr"/>
+          <a:lstStyle/>
           <a:p>
             <a:pPr indent="0" marL="0">
               <a:buNone/>
@@ -6478,73 +9151,22 @@
                   <a:srgbClr val="6B7686"/>
                 </a:solidFill>
               </a:rPr>
-              <a:t>identical to the local pipe output</a:t>
-            </a:r>
-            <a:endParaRPr lang="en-US" sz="1600" dirty="0"/>
-          </a:p>
-        </p:txBody>
-      </p:sp>
-      <p:sp>
-        <p:nvSpPr>
-          <p:cNvPr id="9" name="Shape 5"/>
-          <p:cNvSpPr/>
-          <p:nvPr/>
-        </p:nvSpPr>
-        <p:spPr>
-          <a:xfrm>
-            <a:off x="548640" y="2468880"/>
-            <a:ext cx="5440680" cy="1005840"/>
-          </a:xfrm>
-          <a:prstGeom prst="roundRect">
-            <a:avLst>
-              <a:gd name="adj" fmla="val 7273"/>
-            </a:avLst>
-          </a:prstGeom>
-          <a:solidFill>
-            <a:srgbClr val="F4F6F9"/>
-          </a:solidFill>
-          <a:ln w="12700">
-            <a:solidFill>
-              <a:srgbClr val="F4F6F9"/>
-            </a:solidFill>
-            <a:prstDash val="solid"/>
-          </a:ln>
-        </p:spPr>
-      </p:sp>
-      <p:pic>
-        <p:nvPicPr>
-          <p:cNvPr id="10" name="Image 2" descr="preencoded.png">    </p:cNvPr>
-          <p:cNvPicPr>
-            <a:picLocks noChangeAspect="1"/>
-          </p:cNvPicPr>
-          <p:nvPr/>
-        </p:nvPicPr>
-        <p:blipFill>
-          <a:blip r:embed="rId3"/>
-          <a:stretch>
-            <a:fillRect/>
-          </a:stretch>
-        </p:blipFill>
-        <p:spPr>
-          <a:xfrm>
-            <a:off x="749808" y="2743200"/>
-            <a:ext cx="457200" cy="457200"/>
-          </a:xfrm>
-          <a:prstGeom prst="rect">
-            <a:avLst/>
-          </a:prstGeom>
-        </p:spPr>
-      </p:pic>
-      <p:sp>
-        <p:nvSpPr>
-          <p:cNvPr id="11" name="Text 6"/>
+              <a:t>deaths</a:t>
+            </a:r>
+            <a:endParaRPr lang="en-US" sz="1400" dirty="0"/>
+          </a:p>
+        </p:txBody>
+      </p:sp>
+      <p:sp>
+        <p:nvSpPr>
+          <p:cNvPr id="7" name="Text 5"/>
           <p:cNvSpPr txBox="1"/>
           <p:nvPr/>
         </p:nvSpPr>
         <p:spPr>
           <a:xfrm>
-            <a:off x="1371600" y="2468880"/>
-            <a:ext cx="4480560" cy="1005840"/>
+            <a:off x="6181344" y="1143000"/>
+            <a:ext cx="2560320" cy="685800"/>
           </a:xfrm>
           <a:prstGeom prst="rect">
             <a:avLst/>
@@ -6560,15 +9182,37 @@
               <a:buNone/>
             </a:pPr>
             <a:r>
-              <a:rPr lang="en-US" sz="1600" b="1" dirty="0">
-                <a:solidFill>
-                  <a:srgbClr val="1B2533"/>
-                </a:solidFill>
-              </a:rPr>
-              <a:t>Split handling</a:t>
-            </a:r>
-            <a:endParaRPr lang="en-US" sz="1600" dirty="0"/>
-          </a:p>
+              <a:rPr lang="en-US" sz="3600" b="1" dirty="0">
+                <a:solidFill>
+                  <a:srgbClr val="12355B"/>
+                </a:solidFill>
+              </a:rPr>
+              <a:t>1.55%</a:t>
+            </a:r>
+            <a:endParaRPr lang="en-US" sz="3600" dirty="0"/>
+          </a:p>
+        </p:txBody>
+      </p:sp>
+      <p:sp>
+        <p:nvSpPr>
+          <p:cNvPr id="8" name="Text 6"/>
+          <p:cNvSpPr txBox="1"/>
+          <p:nvPr/>
+        </p:nvSpPr>
+        <p:spPr>
+          <a:xfrm>
+            <a:off x="6181344" y="1783080"/>
+            <a:ext cx="2560320" cy="320040"/>
+          </a:xfrm>
+          <a:prstGeom prst="rect">
+            <a:avLst/>
+          </a:prstGeom>
+          <a:noFill/>
+          <a:ln/>
+        </p:spPr>
+        <p:txBody>
+          <a:bodyPr wrap="square" lIns="0" tIns="0" rIns="0" bIns="0" rtlCol="0" anchor="ctr"/>
+          <a:lstStyle/>
           <a:p>
             <a:pPr indent="0" marL="0">
               <a:buNone/>
@@ -6579,73 +9223,22 @@
                   <a:srgbClr val="6B7686"/>
                 </a:solidFill>
               </a:rPr>
-              <a:t>two halves of the file give the same totals</a:t>
-            </a:r>
-            <a:endParaRPr lang="en-US" sz="1600" dirty="0"/>
-          </a:p>
-        </p:txBody>
-      </p:sp>
-      <p:sp>
-        <p:nvSpPr>
-          <p:cNvPr id="12" name="Shape 7"/>
-          <p:cNvSpPr/>
-          <p:nvPr/>
-        </p:nvSpPr>
-        <p:spPr>
-          <a:xfrm>
-            <a:off x="6172200" y="2468880"/>
-            <a:ext cx="5440680" cy="1005840"/>
-          </a:xfrm>
-          <a:prstGeom prst="roundRect">
-            <a:avLst>
-              <a:gd name="adj" fmla="val 7273"/>
-            </a:avLst>
-          </a:prstGeom>
-          <a:solidFill>
-            <a:srgbClr val="F4F6F9"/>
-          </a:solidFill>
-          <a:ln w="12700">
-            <a:solidFill>
-              <a:srgbClr val="F4F6F9"/>
-            </a:solidFill>
-            <a:prstDash val="solid"/>
-          </a:ln>
-        </p:spPr>
-      </p:sp>
-      <p:pic>
-        <p:nvPicPr>
-          <p:cNvPr id="13" name="Image 3" descr="preencoded.png">    </p:cNvPr>
-          <p:cNvPicPr>
-            <a:picLocks noChangeAspect="1"/>
-          </p:cNvPicPr>
-          <p:nvPr/>
-        </p:nvPicPr>
-        <p:blipFill>
-          <a:blip r:embed="rId4"/>
-          <a:stretch>
-            <a:fillRect/>
-          </a:stretch>
-        </p:blipFill>
-        <p:spPr>
-          <a:xfrm>
-            <a:off x="6373368" y="2743200"/>
-            <a:ext cx="457200" cy="457200"/>
-          </a:xfrm>
-          <a:prstGeom prst="rect">
-            <a:avLst/>
-          </a:prstGeom>
-        </p:spPr>
-      </p:pic>
-      <p:sp>
-        <p:nvSpPr>
-          <p:cNvPr id="14" name="Text 8"/>
+              <a:t>global CFR</a:t>
+            </a:r>
+            <a:endParaRPr lang="en-US" sz="1400" dirty="0"/>
+          </a:p>
+        </p:txBody>
+      </p:sp>
+      <p:sp>
+        <p:nvSpPr>
+          <p:cNvPr id="9" name="Text 7"/>
           <p:cNvSpPr txBox="1"/>
           <p:nvPr/>
         </p:nvSpPr>
         <p:spPr>
           <a:xfrm>
-            <a:off x="6995160" y="2468880"/>
-            <a:ext cx="4480560" cy="1005840"/>
+            <a:off x="8997696" y="1143000"/>
+            <a:ext cx="2560320" cy="685800"/>
           </a:xfrm>
           <a:prstGeom prst="rect">
             <a:avLst/>
@@ -6661,15 +9254,37 @@
               <a:buNone/>
             </a:pPr>
             <a:r>
-              <a:rPr lang="en-US" sz="1600" b="1" dirty="0">
-                <a:solidFill>
-                  <a:srgbClr val="1B2533"/>
-                </a:solidFill>
-              </a:rPr>
-              <a:t>MapReduce vs Spark</a:t>
-            </a:r>
-            <a:endParaRPr lang="en-US" sz="1600" dirty="0"/>
-          </a:p>
+              <a:rPr lang="en-US" sz="3600" b="1" dirty="0">
+                <a:solidFill>
+                  <a:srgbClr val="12355B"/>
+                </a:solidFill>
+              </a:rPr>
+              <a:t>2.5M</a:t>
+            </a:r>
+            <a:endParaRPr lang="en-US" sz="3600" dirty="0"/>
+          </a:p>
+        </p:txBody>
+      </p:sp>
+      <p:sp>
+        <p:nvSpPr>
+          <p:cNvPr id="10" name="Text 8"/>
+          <p:cNvSpPr txBox="1"/>
+          <p:nvPr/>
+        </p:nvSpPr>
+        <p:spPr>
+          <a:xfrm>
+            <a:off x="8997696" y="1783080"/>
+            <a:ext cx="2560320" cy="320040"/>
+          </a:xfrm>
+          <a:prstGeom prst="rect">
+            <a:avLst/>
+          </a:prstGeom>
+          <a:noFill/>
+          <a:ln/>
+        </p:spPr>
+        <p:txBody>
+          <a:bodyPr wrap="square" lIns="0" tIns="0" rIns="0" bIns="0" rtlCol="0" anchor="ctr"/>
+          <a:lstStyle/>
           <a:p>
             <a:pPr indent="0" marL="0">
               <a:buNone/>
@@ -6680,452 +9295,44 @@
                   <a:srgbClr val="6B7686"/>
                 </a:solidFill>
               </a:rPr>
-              <a:t>sum of new cases = max of total cases</a:t>
-            </a:r>
-            <a:endParaRPr lang="en-US" sz="1600" dirty="0"/>
-          </a:p>
-        </p:txBody>
-      </p:sp>
-      <p:sp>
-        <p:nvSpPr>
-          <p:cNvPr id="15" name="Shape 9"/>
-          <p:cNvSpPr/>
-          <p:nvPr/>
-        </p:nvSpPr>
-        <p:spPr>
-          <a:xfrm>
-            <a:off x="548640" y="3657600"/>
-            <a:ext cx="5440680" cy="1005840"/>
-          </a:xfrm>
-          <a:prstGeom prst="roundRect">
-            <a:avLst>
-              <a:gd name="adj" fmla="val 7273"/>
-            </a:avLst>
-          </a:prstGeom>
-          <a:solidFill>
-            <a:srgbClr val="F4F6F9"/>
-          </a:solidFill>
-          <a:ln w="12700">
-            <a:solidFill>
-              <a:srgbClr val="F4F6F9"/>
-            </a:solidFill>
-            <a:prstDash val="solid"/>
-          </a:ln>
-        </p:spPr>
-      </p:sp>
-      <p:pic>
-        <p:nvPicPr>
-          <p:cNvPr id="16" name="Image 4" descr="preencoded.png">    </p:cNvPr>
-          <p:cNvPicPr>
-            <a:picLocks noChangeAspect="1"/>
-          </p:cNvPicPr>
-          <p:nvPr/>
-        </p:nvPicPr>
-        <p:blipFill>
-          <a:blip r:embed="rId5"/>
-          <a:stretch>
-            <a:fillRect/>
-          </a:stretch>
-        </p:blipFill>
-        <p:spPr>
-          <a:xfrm>
-            <a:off x="749808" y="3931920"/>
-            <a:ext cx="457200" cy="457200"/>
-          </a:xfrm>
-          <a:prstGeom prst="rect">
-            <a:avLst/>
-          </a:prstGeom>
-        </p:spPr>
-      </p:pic>
-      <p:sp>
-        <p:nvSpPr>
-          <p:cNvPr id="17" name="Text 10"/>
-          <p:cNvSpPr txBox="1"/>
-          <p:nvPr/>
-        </p:nvSpPr>
-        <p:spPr>
-          <a:xfrm>
-            <a:off x="1371600" y="3657600"/>
-            <a:ext cx="4480560" cy="1005840"/>
-          </a:xfrm>
-          <a:prstGeom prst="rect">
-            <a:avLst/>
-          </a:prstGeom>
-          <a:noFill/>
-          <a:ln/>
-        </p:spPr>
-        <p:txBody>
-          <a:bodyPr wrap="square" lIns="0" tIns="0" rIns="0" bIns="0" rtlCol="0" anchor="ctr"/>
-          <a:lstStyle/>
-          <a:p>
-            <a:pPr indent="0" marL="0">
-              <a:buNone/>
-            </a:pPr>
-            <a:r>
-              <a:rPr lang="en-US" sz="1600" b="1" dirty="0">
-                <a:solidFill>
-                  <a:srgbClr val="1B2533"/>
-                </a:solidFill>
-              </a:rPr>
-              <a:t>HDFS</a:t>
-            </a:r>
-            <a:endParaRPr lang="en-US" sz="1600" dirty="0"/>
-          </a:p>
-          <a:p>
-            <a:pPr indent="0" marL="0">
-              <a:buNone/>
-            </a:pPr>
-            <a:r>
-              <a:rPr lang="en-US" sz="1400" dirty="0">
-                <a:solidFill>
-                  <a:srgbClr val="6B7686"/>
-                </a:solidFill>
-              </a:rPr>
-              <a:t>2 live DataNodes, replication 2</a:t>
-            </a:r>
-            <a:endParaRPr lang="en-US" sz="1600" dirty="0"/>
-          </a:p>
-        </p:txBody>
-      </p:sp>
-      <p:sp>
-        <p:nvSpPr>
-          <p:cNvPr id="18" name="Shape 11"/>
-          <p:cNvSpPr/>
-          <p:nvPr/>
-        </p:nvSpPr>
-        <p:spPr>
-          <a:xfrm>
-            <a:off x="6172200" y="3657600"/>
-            <a:ext cx="5440680" cy="1005840"/>
-          </a:xfrm>
-          <a:prstGeom prst="roundRect">
-            <a:avLst>
-              <a:gd name="adj" fmla="val 7273"/>
-            </a:avLst>
-          </a:prstGeom>
-          <a:solidFill>
-            <a:srgbClr val="F4F6F9"/>
-          </a:solidFill>
-          <a:ln w="12700">
-            <a:solidFill>
-              <a:srgbClr val="F4F6F9"/>
-            </a:solidFill>
-            <a:prstDash val="solid"/>
-          </a:ln>
-        </p:spPr>
-      </p:sp>
-      <p:pic>
-        <p:nvPicPr>
-          <p:cNvPr id="19" name="Image 5" descr="preencoded.png">    </p:cNvPr>
-          <p:cNvPicPr>
-            <a:picLocks noChangeAspect="1"/>
-          </p:cNvPicPr>
-          <p:nvPr/>
-        </p:nvPicPr>
-        <p:blipFill>
-          <a:blip r:embed="rId6"/>
-          <a:stretch>
-            <a:fillRect/>
-          </a:stretch>
-        </p:blipFill>
-        <p:spPr>
-          <a:xfrm>
-            <a:off x="6373368" y="3931920"/>
-            <a:ext cx="457200" cy="457200"/>
-          </a:xfrm>
-          <a:prstGeom prst="rect">
-            <a:avLst/>
-          </a:prstGeom>
-        </p:spPr>
-      </p:pic>
-      <p:sp>
-        <p:nvSpPr>
-          <p:cNvPr id="20" name="Text 12"/>
-          <p:cNvSpPr txBox="1"/>
-          <p:nvPr/>
-        </p:nvSpPr>
-        <p:spPr>
-          <a:xfrm>
-            <a:off x="6995160" y="3657600"/>
-            <a:ext cx="4480560" cy="1005840"/>
-          </a:xfrm>
-          <a:prstGeom prst="rect">
-            <a:avLst/>
-          </a:prstGeom>
-          <a:noFill/>
-          <a:ln/>
-        </p:spPr>
-        <p:txBody>
-          <a:bodyPr wrap="square" lIns="0" tIns="0" rIns="0" bIns="0" rtlCol="0" anchor="ctr"/>
-          <a:lstStyle/>
-          <a:p>
-            <a:pPr indent="0" marL="0">
-              <a:buNone/>
-            </a:pPr>
-            <a:r>
-              <a:rPr lang="en-US" sz="1600" b="1" dirty="0">
-                <a:solidFill>
-                  <a:srgbClr val="1B2533"/>
-                </a:solidFill>
-              </a:rPr>
-              <a:t>YARN</a:t>
-            </a:r>
-            <a:endParaRPr lang="en-US" sz="1600" dirty="0"/>
-          </a:p>
-          <a:p>
-            <a:pPr indent="0" marL="0">
-              <a:buNone/>
-            </a:pPr>
-            <a:r>
-              <a:rPr lang="en-US" sz="1400" dirty="0">
-                <a:solidFill>
-                  <a:srgbClr val="6B7686"/>
-                </a:solidFill>
-              </a:rPr>
-              <a:t>2 NodeManagers, 2 maps + 1 reduce</a:t>
-            </a:r>
-            <a:endParaRPr lang="en-US" sz="1600" dirty="0"/>
-          </a:p>
-        </p:txBody>
-      </p:sp>
-      <p:sp>
-        <p:nvSpPr>
-          <p:cNvPr id="21" name="Shape 13"/>
-          <p:cNvSpPr/>
-          <p:nvPr/>
-        </p:nvSpPr>
-        <p:spPr>
-          <a:xfrm>
-            <a:off x="548640" y="4846320"/>
-            <a:ext cx="5440680" cy="1005840"/>
-          </a:xfrm>
-          <a:prstGeom prst="roundRect">
-            <a:avLst>
-              <a:gd name="adj" fmla="val 7273"/>
-            </a:avLst>
-          </a:prstGeom>
-          <a:solidFill>
-            <a:srgbClr val="F4F6F9"/>
-          </a:solidFill>
-          <a:ln w="12700">
-            <a:solidFill>
-              <a:srgbClr val="F4F6F9"/>
-            </a:solidFill>
-            <a:prstDash val="solid"/>
-          </a:ln>
-        </p:spPr>
-      </p:sp>
-      <p:pic>
-        <p:nvPicPr>
-          <p:cNvPr id="22" name="Image 6" descr="preencoded.png">    </p:cNvPr>
-          <p:cNvPicPr>
-            <a:picLocks noChangeAspect="1"/>
-          </p:cNvPicPr>
-          <p:nvPr/>
-        </p:nvPicPr>
-        <p:blipFill>
-          <a:blip r:embed="rId7"/>
-          <a:stretch>
-            <a:fillRect/>
-          </a:stretch>
-        </p:blipFill>
-        <p:spPr>
-          <a:xfrm>
-            <a:off x="749808" y="5120640"/>
-            <a:ext cx="457200" cy="457200"/>
-          </a:xfrm>
-          <a:prstGeom prst="rect">
-            <a:avLst/>
-          </a:prstGeom>
-        </p:spPr>
-      </p:pic>
-      <p:sp>
-        <p:nvSpPr>
-          <p:cNvPr id="23" name="Text 14"/>
-          <p:cNvSpPr txBox="1"/>
-          <p:nvPr/>
-        </p:nvSpPr>
-        <p:spPr>
-          <a:xfrm>
-            <a:off x="1371600" y="4846320"/>
-            <a:ext cx="4480560" cy="1005840"/>
-          </a:xfrm>
-          <a:prstGeom prst="rect">
-            <a:avLst/>
-          </a:prstGeom>
-          <a:noFill/>
-          <a:ln/>
-        </p:spPr>
-        <p:txBody>
-          <a:bodyPr wrap="square" lIns="0" tIns="0" rIns="0" bIns="0" rtlCol="0" anchor="ctr"/>
-          <a:lstStyle/>
-          <a:p>
-            <a:pPr indent="0" marL="0">
-              <a:buNone/>
-            </a:pPr>
-            <a:r>
-              <a:rPr lang="en-US" sz="1600" b="1" dirty="0">
-                <a:solidFill>
-                  <a:srgbClr val="1B2533"/>
-                </a:solidFill>
-              </a:rPr>
-              <a:t>Spark cluster</a:t>
-            </a:r>
-            <a:endParaRPr lang="en-US" sz="1600" dirty="0"/>
-          </a:p>
-          <a:p>
-            <a:pPr indent="0" marL="0">
-              <a:buNone/>
-            </a:pPr>
-            <a:r>
-              <a:rPr lang="en-US" sz="1400" dirty="0">
-                <a:solidFill>
-                  <a:srgbClr val="6B7686"/>
-                </a:solidFill>
-              </a:rPr>
-              <a:t>2 workers alive, app finished on 4 cores</a:t>
-            </a:r>
-            <a:endParaRPr lang="en-US" sz="1600" dirty="0"/>
-          </a:p>
-        </p:txBody>
-      </p:sp>
-      <p:sp>
-        <p:nvSpPr>
-          <p:cNvPr id="24" name="Shape 15"/>
-          <p:cNvSpPr/>
-          <p:nvPr/>
-        </p:nvSpPr>
-        <p:spPr>
-          <a:xfrm>
-            <a:off x="6172200" y="4846320"/>
-            <a:ext cx="5440680" cy="1005840"/>
-          </a:xfrm>
-          <a:prstGeom prst="roundRect">
-            <a:avLst>
-              <a:gd name="adj" fmla="val 7273"/>
-            </a:avLst>
-          </a:prstGeom>
-          <a:solidFill>
-            <a:srgbClr val="F4F6F9"/>
-          </a:solidFill>
-          <a:ln w="12700">
-            <a:solidFill>
-              <a:srgbClr val="F4F6F9"/>
-            </a:solidFill>
-            <a:prstDash val="solid"/>
-          </a:ln>
-        </p:spPr>
-      </p:sp>
-      <p:pic>
-        <p:nvPicPr>
-          <p:cNvPr id="25" name="Image 7" descr="preencoded.png">    </p:cNvPr>
-          <p:cNvPicPr>
-            <a:picLocks noChangeAspect="1"/>
-          </p:cNvPicPr>
-          <p:nvPr/>
-        </p:nvPicPr>
-        <p:blipFill>
-          <a:blip r:embed="rId8"/>
-          <a:stretch>
-            <a:fillRect/>
-          </a:stretch>
-        </p:blipFill>
-        <p:spPr>
-          <a:xfrm>
-            <a:off x="6373368" y="5120640"/>
-            <a:ext cx="457200" cy="457200"/>
-          </a:xfrm>
-          <a:prstGeom prst="rect">
-            <a:avLst/>
-          </a:prstGeom>
-        </p:spPr>
-      </p:pic>
-      <p:sp>
-        <p:nvSpPr>
-          <p:cNvPr id="26" name="Text 16"/>
-          <p:cNvSpPr txBox="1"/>
-          <p:nvPr/>
-        </p:nvSpPr>
-        <p:spPr>
-          <a:xfrm>
-            <a:off x="6995160" y="4846320"/>
-            <a:ext cx="4480560" cy="1005840"/>
-          </a:xfrm>
-          <a:prstGeom prst="rect">
-            <a:avLst/>
-          </a:prstGeom>
-          <a:noFill/>
-          <a:ln/>
-        </p:spPr>
-        <p:txBody>
-          <a:bodyPr wrap="square" lIns="0" tIns="0" rIns="0" bIns="0" rtlCol="0" anchor="ctr"/>
-          <a:lstStyle/>
-          <a:p>
-            <a:pPr indent="0" marL="0">
-              <a:buNone/>
-            </a:pPr>
-            <a:r>
-              <a:rPr lang="en-US" sz="1600" b="1" dirty="0">
-                <a:solidFill>
-                  <a:srgbClr val="1B2533"/>
-                </a:solidFill>
-              </a:rPr>
-              <a:t>Dashboard</a:t>
-            </a:r>
-            <a:endParaRPr lang="en-US" sz="1600" dirty="0"/>
-          </a:p>
-          <a:p>
-            <a:pPr indent="0" marL="0">
-              <a:buNone/>
-            </a:pPr>
-            <a:r>
-              <a:rPr lang="en-US" sz="1400" dirty="0">
-                <a:solidFill>
-                  <a:srgbClr val="6B7686"/>
-                </a:solidFill>
-              </a:rPr>
-              <a:t>all routes 200, all views render, no JS errors</a:t>
-            </a:r>
-            <a:endParaRPr lang="en-US" sz="1600" dirty="0"/>
-          </a:p>
-        </p:txBody>
-      </p:sp>
-      <p:sp>
-        <p:nvSpPr>
-          <p:cNvPr id="27" name="Text 17"/>
-          <p:cNvSpPr txBox="1"/>
-          <p:nvPr/>
-        </p:nvSpPr>
-        <p:spPr>
-          <a:xfrm>
-            <a:off x="548640" y="6035040"/>
-            <a:ext cx="11064240" cy="320040"/>
-          </a:xfrm>
-          <a:prstGeom prst="rect">
-            <a:avLst/>
-          </a:prstGeom>
-          <a:noFill/>
-          <a:ln/>
-        </p:spPr>
-        <p:txBody>
-          <a:bodyPr wrap="square" lIns="0" tIns="0" rIns="0" bIns="0" rtlCol="0" anchor="ctr"/>
-          <a:lstStyle/>
-          <a:p>
-            <a:pPr indent="0" marL="0">
-              <a:buNone/>
-            </a:pPr>
-            <a:r>
-              <a:rPr lang="en-US" sz="1300" i="1" dirty="0">
-                <a:solidFill>
-                  <a:srgbClr val="6B7686"/>
-                </a:solidFill>
-              </a:rPr>
-              <a:t>Final check: cluster torn down with its volumes and rebuilt from scratch with run_all.sh.</a:t>
-            </a:r>
-            <a:endParaRPr lang="en-US" sz="1300" dirty="0"/>
-          </a:p>
-        </p:txBody>
-      </p:sp>
+              <a:t>peak 7-day avg</a:t>
+            </a:r>
+            <a:endParaRPr lang="en-US" sz="1400" dirty="0"/>
+          </a:p>
+        </p:txBody>
+      </p:sp>
+      <p:graphicFrame>
+        <p:nvGraphicFramePr>
+          <p:cNvPr id="11" name="Chart 0" descr=""/>
+          <p:cNvGraphicFramePr/>
+          <p:nvPr/>
+        </p:nvGraphicFramePr>
+        <p:xfrm>
+          <a:off x="548640" y="2331720"/>
+          <a:ext cx="6035040" cy="3886200"/>
+        </p:xfrm>
+        <a:graphic xmlns:a="http://schemas.openxmlformats.org/drawingml/2006/main">
+          <a:graphicData uri="http://schemas.openxmlformats.org/drawingml/2006/chart">
+            <c:chart xmlns:c="http://schemas.openxmlformats.org/drawingml/2006/chart" r:id="rId1"/>
+          </a:graphicData>
+        </a:graphic>
+      </p:graphicFrame>
+      <p:graphicFrame>
+        <p:nvGraphicFramePr>
+          <p:cNvPr id="12" name="Chart 1" descr=""/>
+          <p:cNvGraphicFramePr/>
+          <p:nvPr/>
+        </p:nvGraphicFramePr>
+        <p:xfrm>
+          <a:off x="6858000" y="2331720"/>
+          <a:ext cx="4754880" cy="3886200"/>
+        </p:xfrm>
+        <a:graphic xmlns:a="http://schemas.openxmlformats.org/drawingml/2006/main">
+          <a:graphicData uri="http://schemas.openxmlformats.org/drawingml/2006/chart">
+            <c:chart xmlns:c="http://schemas.openxmlformats.org/drawingml/2006/chart" r:id="rId2"/>
+          </a:graphicData>
+        </a:graphic>
+      </p:graphicFrame>
       <p:sp>
         <p:nvSpPr>
           <p:cNvPr id="25" name="Slide Number Placeholder 0"/>
@@ -7228,61 +9435,55 @@
                   <a:srgbClr val="1B2533"/>
                 </a:solidFill>
               </a:rPr>
-              <a:t>Limits and next steps</a:t>
+              <a:t>Four waves, recovered by Spark Job 3</a:t>
             </a:r>
             <a:endParaRPr lang="en-US" sz="3200" dirty="0"/>
           </a:p>
         </p:txBody>
       </p:sp>
-      <p:sp>
-        <p:nvSpPr>
-          <p:cNvPr id="3" name="Shape 1"/>
+      <p:graphicFrame>
+        <p:nvGraphicFramePr>
+          <p:cNvPr id="3" name="Chart 0" descr=""/>
+          <p:cNvGraphicFramePr/>
+          <p:nvPr/>
+        </p:nvGraphicFramePr>
+        <p:xfrm>
+          <a:off x="411480" y="1143000"/>
+          <a:ext cx="8229600" cy="5029200"/>
+        </p:xfrm>
+        <a:graphic xmlns:a="http://schemas.openxmlformats.org/drawingml/2006/main">
+          <a:graphicData uri="http://schemas.openxmlformats.org/drawingml/2006/chart">
+            <c:chart xmlns:c="http://schemas.openxmlformats.org/drawingml/2006/chart" r:id="rId1"/>
+          </a:graphicData>
+        </a:graphic>
+      </p:graphicFrame>
+      <p:sp>
+        <p:nvSpPr>
+          <p:cNvPr id="4" name="Shape 1"/>
           <p:cNvSpPr/>
           <p:nvPr/>
         </p:nvSpPr>
         <p:spPr>
           <a:xfrm>
-            <a:off x="548640" y="1325880"/>
-            <a:ext cx="685800" cy="685800"/>
-          </a:xfrm>
-          <a:prstGeom prst="ellipse">
-            <a:avLst/>
+            <a:off x="8961120" y="1234440"/>
+            <a:ext cx="2697480" cy="1417320"/>
+          </a:xfrm>
+          <a:prstGeom prst="roundRect">
+            <a:avLst>
+              <a:gd name="adj" fmla="val 6452"/>
+            </a:avLst>
           </a:prstGeom>
           <a:solidFill>
-            <a:srgbClr val="E6ECF3"/>
+            <a:srgbClr val="F4F6F9"/>
           </a:solidFill>
           <a:ln w="12700">
             <a:solidFill>
-              <a:srgbClr val="E6ECF3"/>
+              <a:srgbClr val="F4F6F9"/>
             </a:solidFill>
             <a:prstDash val="solid"/>
           </a:ln>
         </p:spPr>
       </p:sp>
-      <p:pic>
-        <p:nvPicPr>
-          <p:cNvPr id="4" name="Image 0" descr="preencoded.png">    </p:cNvPr>
-          <p:cNvPicPr>
-            <a:picLocks noChangeAspect="1"/>
-          </p:cNvPicPr>
-          <p:nvPr/>
-        </p:nvPicPr>
-        <p:blipFill>
-          <a:blip r:embed="rId1"/>
-          <a:stretch>
-            <a:fillRect/>
-          </a:stretch>
-        </p:blipFill>
-        <p:spPr>
-          <a:xfrm>
-            <a:off x="699516" y="1476756"/>
-            <a:ext cx="384048" cy="384048"/>
-          </a:xfrm>
-          <a:prstGeom prst="rect">
-            <a:avLst/>
-          </a:prstGeom>
-        </p:spPr>
-      </p:pic>
       <p:sp>
         <p:nvSpPr>
           <p:cNvPr id="5" name="Text 2"/>
@@ -7291,8 +9492,8 @@
         </p:nvSpPr>
         <p:spPr>
           <a:xfrm>
-            <a:off x="548640" y="2148840"/>
-            <a:ext cx="3474720" cy="411480"/>
+            <a:off x="9144000" y="1344168"/>
+            <a:ext cx="2377440" cy="594360"/>
           </a:xfrm>
           <a:prstGeom prst="rect">
             <a:avLst/>
@@ -7308,14 +9509,14 @@
               <a:buNone/>
             </a:pPr>
             <a:r>
-              <a:rPr lang="en-US" sz="1800" b="1" dirty="0">
-                <a:solidFill>
-                  <a:srgbClr val="1B2533"/>
-                </a:solidFill>
-              </a:rPr>
-              <a:t>Synthetic data</a:t>
-            </a:r>
-            <a:endParaRPr lang="en-US" sz="1800" dirty="0"/>
+              <a:rPr lang="en-US" sz="3000" b="1" dirty="0">
+                <a:solidFill>
+                  <a:srgbClr val="2F6DB5"/>
+                </a:solidFill>
+              </a:rPr>
+              <a:t>2.5M</a:t>
+            </a:r>
+            <a:endParaRPr lang="en-US" sz="3000" dirty="0"/>
           </a:p>
         </p:txBody>
       </p:sp>
@@ -7327,8 +9528,8 @@
         </p:nvSpPr>
         <p:spPr>
           <a:xfrm>
-            <a:off x="548640" y="2578608"/>
-            <a:ext cx="3474720" cy="822960"/>
+            <a:off x="9144000" y="1947672"/>
+            <a:ext cx="2377440" cy="594360"/>
           </a:xfrm>
           <a:prstGeom prst="rect">
             <a:avLst/>
@@ -7344,14 +9545,28 @@
               <a:buNone/>
             </a:pPr>
             <a:r>
-              <a:rPr lang="en-US" sz="1500" dirty="0">
+              <a:rPr lang="en-US" sz="1300" dirty="0">
+                <a:solidFill>
+                  <a:srgbClr val="1B2533"/>
+                </a:solidFill>
+              </a:rPr>
+              <a:t>peak 7-day average</a:t>
+            </a:r>
+            <a:endParaRPr lang="en-US" sz="1300" dirty="0"/>
+          </a:p>
+          <a:p>
+            <a:pPr indent="0" marL="0">
+              <a:buNone/>
+            </a:pPr>
+            <a:r>
+              <a:rPr lang="en-US" sz="1200" dirty="0">
                 <a:solidFill>
                   <a:srgbClr val="6B7686"/>
                 </a:solidFill>
               </a:rPr>
-              <a:t>Swap in the real OWID file; the code needs no change.</a:t>
-            </a:r>
-            <a:endParaRPr lang="en-US" sz="1500" dirty="0"/>
+              <a:t>2023-06-22</a:t>
+            </a:r>
+            <a:endParaRPr lang="en-US" sz="1300" dirty="0"/>
           </a:p>
         </p:txBody>
       </p:sp>
@@ -7363,57 +9578,35 @@
         </p:nvSpPr>
         <p:spPr>
           <a:xfrm>
-            <a:off x="4297680" y="1325880"/>
-            <a:ext cx="685800" cy="685800"/>
-          </a:xfrm>
-          <a:prstGeom prst="ellipse">
-            <a:avLst/>
+            <a:off x="8961120" y="2880360"/>
+            <a:ext cx="2697480" cy="1417320"/>
+          </a:xfrm>
+          <a:prstGeom prst="roundRect">
+            <a:avLst>
+              <a:gd name="adj" fmla="val 6452"/>
+            </a:avLst>
           </a:prstGeom>
           <a:solidFill>
-            <a:srgbClr val="E6ECF3"/>
+            <a:srgbClr val="F4F6F9"/>
           </a:solidFill>
           <a:ln w="12700">
             <a:solidFill>
-              <a:srgbClr val="E6ECF3"/>
+              <a:srgbClr val="F4F6F9"/>
             </a:solidFill>
             <a:prstDash val="solid"/>
           </a:ln>
         </p:spPr>
       </p:sp>
-      <p:pic>
-        <p:nvPicPr>
-          <p:cNvPr id="8" name="Image 1" descr="preencoded.png">    </p:cNvPr>
-          <p:cNvPicPr>
-            <a:picLocks noChangeAspect="1"/>
-          </p:cNvPicPr>
-          <p:nvPr/>
-        </p:nvPicPr>
-        <p:blipFill>
-          <a:blip r:embed="rId2"/>
-          <a:stretch>
-            <a:fillRect/>
-          </a:stretch>
-        </p:blipFill>
-        <p:spPr>
-          <a:xfrm>
-            <a:off x="4448556" y="1476756"/>
-            <a:ext cx="384048" cy="384048"/>
-          </a:xfrm>
-          <a:prstGeom prst="rect">
-            <a:avLst/>
-          </a:prstGeom>
-        </p:spPr>
-      </p:pic>
-      <p:sp>
-        <p:nvSpPr>
-          <p:cNvPr id="9" name="Text 5"/>
+      <p:sp>
+        <p:nvSpPr>
+          <p:cNvPr id="8" name="Text 5"/>
           <p:cNvSpPr txBox="1"/>
           <p:nvPr/>
         </p:nvSpPr>
         <p:spPr>
           <a:xfrm>
-            <a:off x="4297680" y="2148840"/>
-            <a:ext cx="3474720" cy="411480"/>
+            <a:off x="9144000" y="2990088"/>
+            <a:ext cx="2377440" cy="594360"/>
           </a:xfrm>
           <a:prstGeom prst="rect">
             <a:avLst/>
@@ -7429,112 +9622,104 @@
               <a:buNone/>
             </a:pPr>
             <a:r>
-              <a:rPr lang="en-US" sz="1800" b="1" dirty="0">
+              <a:rPr lang="en-US" sz="3000" b="1" dirty="0">
+                <a:solidFill>
+                  <a:srgbClr val="12355B"/>
+                </a:solidFill>
+              </a:rPr>
+              <a:t>531K</a:t>
+            </a:r>
+            <a:endParaRPr lang="en-US" sz="3000" dirty="0"/>
+          </a:p>
+        </p:txBody>
+      </p:sp>
+      <p:sp>
+        <p:nvSpPr>
+          <p:cNvPr id="9" name="Text 6"/>
+          <p:cNvSpPr txBox="1"/>
+          <p:nvPr/>
+        </p:nvSpPr>
+        <p:spPr>
+          <a:xfrm>
+            <a:off x="9144000" y="3593592"/>
+            <a:ext cx="2377440" cy="594360"/>
+          </a:xfrm>
+          <a:prstGeom prst="rect">
+            <a:avLst/>
+          </a:prstGeom>
+          <a:noFill/>
+          <a:ln/>
+        </p:spPr>
+        <p:txBody>
+          <a:bodyPr wrap="square" lIns="0" tIns="0" rIns="0" bIns="0" rtlCol="0" anchor="t"/>
+          <a:lstStyle/>
+          <a:p>
+            <a:pPr indent="0" marL="0">
+              <a:buNone/>
+            </a:pPr>
+            <a:r>
+              <a:rPr lang="en-US" sz="1300" dirty="0">
                 <a:solidFill>
                   <a:srgbClr val="1B2533"/>
                 </a:solidFill>
               </a:rPr>
-              <a:t>Spark reads a shared folder</a:t>
-            </a:r>
-            <a:endParaRPr lang="en-US" sz="1800" dirty="0"/>
-          </a:p>
-        </p:txBody>
-      </p:sp>
-      <p:sp>
-        <p:nvSpPr>
-          <p:cNvPr id="10" name="Text 6"/>
-          <p:cNvSpPr txBox="1"/>
-          <p:nvPr/>
-        </p:nvSpPr>
-        <p:spPr>
-          <a:xfrm>
-            <a:off x="4297680" y="2578608"/>
-            <a:ext cx="3474720" cy="822960"/>
-          </a:xfrm>
-          <a:prstGeom prst="rect">
-            <a:avLst/>
-          </a:prstGeom>
-          <a:noFill/>
-          <a:ln/>
-        </p:spPr>
-        <p:txBody>
-          <a:bodyPr wrap="square" lIns="0" tIns="0" rIns="0" bIns="0" rtlCol="0" anchor="t"/>
-          <a:lstStyle/>
+              <a:t>lowest 7-day average</a:t>
+            </a:r>
+            <a:endParaRPr lang="en-US" sz="1300" dirty="0"/>
+          </a:p>
           <a:p>
             <a:pPr indent="0" marL="0">
               <a:buNone/>
             </a:pPr>
             <a:r>
-              <a:rPr lang="en-US" sz="1500" dirty="0">
+              <a:rPr lang="en-US" sz="1200" dirty="0">
                 <a:solidFill>
                   <a:srgbClr val="6B7686"/>
                 </a:solidFill>
               </a:rPr>
-              <a:t>Point COVID_DATA at hdfs:// to use HDFS for Spark too.</a:t>
-            </a:r>
-            <a:endParaRPr lang="en-US" sz="1500" dirty="0"/>
-          </a:p>
-        </p:txBody>
-      </p:sp>
-      <p:sp>
-        <p:nvSpPr>
-          <p:cNvPr id="11" name="Shape 7"/>
+              <a:t>2021-12-09</a:t>
+            </a:r>
+            <a:endParaRPr lang="en-US" sz="1300" dirty="0"/>
+          </a:p>
+        </p:txBody>
+      </p:sp>
+      <p:sp>
+        <p:nvSpPr>
+          <p:cNvPr id="10" name="Shape 7"/>
           <p:cNvSpPr/>
           <p:nvPr/>
         </p:nvSpPr>
         <p:spPr>
           <a:xfrm>
-            <a:off x="8046720" y="1325880"/>
-            <a:ext cx="685800" cy="685800"/>
-          </a:xfrm>
-          <a:prstGeom prst="ellipse">
-            <a:avLst/>
+            <a:off x="8961120" y="4526280"/>
+            <a:ext cx="2697480" cy="1417320"/>
+          </a:xfrm>
+          <a:prstGeom prst="roundRect">
+            <a:avLst>
+              <a:gd name="adj" fmla="val 6452"/>
+            </a:avLst>
           </a:prstGeom>
           <a:solidFill>
-            <a:srgbClr val="E6ECF3"/>
+            <a:srgbClr val="F4F6F9"/>
           </a:solidFill>
           <a:ln w="12700">
             <a:solidFill>
-              <a:srgbClr val="E6ECF3"/>
+              <a:srgbClr val="F4F6F9"/>
             </a:solidFill>
             <a:prstDash val="solid"/>
           </a:ln>
         </p:spPr>
       </p:sp>
-      <p:pic>
-        <p:nvPicPr>
-          <p:cNvPr id="12" name="Image 2" descr="preencoded.png">    </p:cNvPr>
-          <p:cNvPicPr>
-            <a:picLocks noChangeAspect="1"/>
-          </p:cNvPicPr>
-          <p:nvPr/>
-        </p:nvPicPr>
-        <p:blipFill>
-          <a:blip r:embed="rId3"/>
-          <a:stretch>
-            <a:fillRect/>
-          </a:stretch>
-        </p:blipFill>
-        <p:spPr>
-          <a:xfrm>
-            <a:off x="8197596" y="1476756"/>
-            <a:ext cx="384048" cy="384048"/>
-          </a:xfrm>
-          <a:prstGeom prst="rect">
-            <a:avLst/>
-          </a:prstGeom>
-        </p:spPr>
-      </p:pic>
-      <p:sp>
-        <p:nvSpPr>
-          <p:cNvPr id="13" name="Text 8"/>
+      <p:sp>
+        <p:nvSpPr>
+          <p:cNvPr id="11" name="Text 8"/>
           <p:cNvSpPr txBox="1"/>
           <p:nvPr/>
         </p:nvSpPr>
         <p:spPr>
           <a:xfrm>
-            <a:off x="8046720" y="2148840"/>
-            <a:ext cx="3474720" cy="411480"/>
+            <a:off x="9144000" y="4636008"/>
+            <a:ext cx="2377440" cy="594360"/>
           </a:xfrm>
           <a:prstGeom prst="rect">
             <a:avLst/>
@@ -7550,413 +9735,64 @@
               <a:buNone/>
             </a:pPr>
             <a:r>
-              <a:rPr lang="en-US" sz="1800" b="1" dirty="0">
+              <a:rPr lang="en-US" sz="3000" b="1" dirty="0">
+                <a:solidFill>
+                  <a:srgbClr val="12355B"/>
+                </a:solidFill>
+              </a:rPr>
+              <a:t>1.5M</a:t>
+            </a:r>
+            <a:endParaRPr lang="en-US" sz="3000" dirty="0"/>
+          </a:p>
+        </p:txBody>
+      </p:sp>
+      <p:sp>
+        <p:nvSpPr>
+          <p:cNvPr id="12" name="Text 9"/>
+          <p:cNvSpPr txBox="1"/>
+          <p:nvPr/>
+        </p:nvSpPr>
+        <p:spPr>
+          <a:xfrm>
+            <a:off x="9144000" y="5239512"/>
+            <a:ext cx="2377440" cy="594360"/>
+          </a:xfrm>
+          <a:prstGeom prst="rect">
+            <a:avLst/>
+          </a:prstGeom>
+          <a:noFill/>
+          <a:ln/>
+        </p:spPr>
+        <p:txBody>
+          <a:bodyPr wrap="square" lIns="0" tIns="0" rIns="0" bIns="0" rtlCol="0" anchor="t"/>
+          <a:lstStyle/>
+          <a:p>
+            <a:pPr indent="0" marL="0">
+              <a:buNone/>
+            </a:pPr>
+            <a:r>
+              <a:rPr lang="en-US" sz="1300" dirty="0">
                 <a:solidFill>
                   <a:srgbClr val="1B2533"/>
                 </a:solidFill>
               </a:rPr>
-              <a:t>Single-partition window</a:t>
-            </a:r>
-            <a:endParaRPr lang="en-US" sz="1800" dirty="0"/>
-          </a:p>
-        </p:txBody>
-      </p:sp>
-      <p:sp>
-        <p:nvSpPr>
-          <p:cNvPr id="14" name="Text 9"/>
-          <p:cNvSpPr txBox="1"/>
-          <p:nvPr/>
-        </p:nvSpPr>
-        <p:spPr>
-          <a:xfrm>
-            <a:off x="8046720" y="2578608"/>
-            <a:ext cx="3474720" cy="822960"/>
-          </a:xfrm>
-          <a:prstGeom prst="rect">
-            <a:avLst/>
-          </a:prstGeom>
-          <a:noFill/>
-          <a:ln/>
-        </p:spPr>
-        <p:txBody>
-          <a:bodyPr wrap="square" lIns="0" tIns="0" rIns="0" bIns="0" rtlCol="0" anchor="t"/>
-          <a:lstStyle/>
+              <a:t>average daily cases</a:t>
+            </a:r>
+            <a:endParaRPr lang="en-US" sz="1300" dirty="0"/>
+          </a:p>
           <a:p>
             <a:pPr indent="0" marL="0">
               <a:buNone/>
             </a:pPr>
             <a:r>
-              <a:rPr lang="en-US" sz="1500" dirty="0">
+              <a:rPr lang="en-US" sz="1200" dirty="0">
                 <a:solidFill>
                   <a:srgbClr val="6B7686"/>
                 </a:solidFill>
               </a:rPr>
-              <a:t>Fine for 1,440 days; partition it for larger date ranges.</a:t>
-            </a:r>
-            <a:endParaRPr lang="en-US" sz="1500" dirty="0"/>
-          </a:p>
-        </p:txBody>
-      </p:sp>
-      <p:sp>
-        <p:nvSpPr>
-          <p:cNvPr id="15" name="Shape 10"/>
-          <p:cNvSpPr/>
-          <p:nvPr/>
-        </p:nvSpPr>
-        <p:spPr>
-          <a:xfrm>
-            <a:off x="548640" y="3703320"/>
-            <a:ext cx="685800" cy="685800"/>
-          </a:xfrm>
-          <a:prstGeom prst="ellipse">
-            <a:avLst/>
-          </a:prstGeom>
-          <a:solidFill>
-            <a:srgbClr val="E6ECF3"/>
-          </a:solidFill>
-          <a:ln w="12700">
-            <a:solidFill>
-              <a:srgbClr val="E6ECF3"/>
-            </a:solidFill>
-            <a:prstDash val="solid"/>
-          </a:ln>
-        </p:spPr>
-      </p:sp>
-      <p:pic>
-        <p:nvPicPr>
-          <p:cNvPr id="16" name="Image 3" descr="preencoded.png">    </p:cNvPr>
-          <p:cNvPicPr>
-            <a:picLocks noChangeAspect="1"/>
-          </p:cNvPicPr>
-          <p:nvPr/>
-        </p:nvPicPr>
-        <p:blipFill>
-          <a:blip r:embed="rId4"/>
-          <a:stretch>
-            <a:fillRect/>
-          </a:stretch>
-        </p:blipFill>
-        <p:spPr>
-          <a:xfrm>
-            <a:off x="699516" y="3854196"/>
-            <a:ext cx="384048" cy="384048"/>
-          </a:xfrm>
-          <a:prstGeom prst="rect">
-            <a:avLst/>
-          </a:prstGeom>
-        </p:spPr>
-      </p:pic>
-      <p:sp>
-        <p:nvSpPr>
-          <p:cNvPr id="17" name="Text 11"/>
-          <p:cNvSpPr txBox="1"/>
-          <p:nvPr/>
-        </p:nvSpPr>
-        <p:spPr>
-          <a:xfrm>
-            <a:off x="548640" y="4526280"/>
-            <a:ext cx="3474720" cy="411480"/>
-          </a:xfrm>
-          <a:prstGeom prst="rect">
-            <a:avLst/>
-          </a:prstGeom>
-          <a:noFill/>
-          <a:ln/>
-        </p:spPr>
-        <p:txBody>
-          <a:bodyPr wrap="square" lIns="0" tIns="0" rIns="0" bIns="0" rtlCol="0" anchor="ctr"/>
-          <a:lstStyle/>
-          <a:p>
-            <a:pPr indent="0" marL="0">
-              <a:buNone/>
-            </a:pPr>
-            <a:r>
-              <a:rPr lang="en-US" sz="1800" b="1" dirty="0">
-                <a:solidFill>
-                  <a:srgbClr val="1B2533"/>
-                </a:solidFill>
-              </a:rPr>
-              <a:t>Old base images</a:t>
-            </a:r>
-            <a:endParaRPr lang="en-US" sz="1800" dirty="0"/>
-          </a:p>
-        </p:txBody>
-      </p:sp>
-      <p:sp>
-        <p:nvSpPr>
-          <p:cNvPr id="18" name="Text 12"/>
-          <p:cNvSpPr txBox="1"/>
-          <p:nvPr/>
-        </p:nvSpPr>
-        <p:spPr>
-          <a:xfrm>
-            <a:off x="548640" y="4956048"/>
-            <a:ext cx="3474720" cy="822960"/>
-          </a:xfrm>
-          <a:prstGeom prst="rect">
-            <a:avLst/>
-          </a:prstGeom>
-          <a:noFill/>
-          <a:ln/>
-        </p:spPr>
-        <p:txBody>
-          <a:bodyPr wrap="square" lIns="0" tIns="0" rIns="0" bIns="0" rtlCol="0" anchor="t"/>
-          <a:lstStyle/>
-          <a:p>
-            <a:pPr indent="0" marL="0">
-              <a:buNone/>
-            </a:pPr>
-            <a:r>
-              <a:rPr lang="en-US" sz="1500" dirty="0">
-                <a:solidFill>
-                  <a:srgbClr val="6B7686"/>
-                </a:solidFill>
-              </a:rPr>
-              <a:t>Hadoop images date from 2019; Spark comes from Bitnami's legacy archive.</a:t>
-            </a:r>
-            <a:endParaRPr lang="en-US" sz="1500" dirty="0"/>
-          </a:p>
-        </p:txBody>
-      </p:sp>
-      <p:sp>
-        <p:nvSpPr>
-          <p:cNvPr id="19" name="Shape 13"/>
-          <p:cNvSpPr/>
-          <p:nvPr/>
-        </p:nvSpPr>
-        <p:spPr>
-          <a:xfrm>
-            <a:off x="4297680" y="3703320"/>
-            <a:ext cx="685800" cy="685800"/>
-          </a:xfrm>
-          <a:prstGeom prst="ellipse">
-            <a:avLst/>
-          </a:prstGeom>
-          <a:solidFill>
-            <a:srgbClr val="E6ECF3"/>
-          </a:solidFill>
-          <a:ln w="12700">
-            <a:solidFill>
-              <a:srgbClr val="E6ECF3"/>
-            </a:solidFill>
-            <a:prstDash val="solid"/>
-          </a:ln>
-        </p:spPr>
-      </p:sp>
-      <p:pic>
-        <p:nvPicPr>
-          <p:cNvPr id="20" name="Image 4" descr="preencoded.png">    </p:cNvPr>
-          <p:cNvPicPr>
-            <a:picLocks noChangeAspect="1"/>
-          </p:cNvPicPr>
-          <p:nvPr/>
-        </p:nvPicPr>
-        <p:blipFill>
-          <a:blip r:embed="rId5"/>
-          <a:stretch>
-            <a:fillRect/>
-          </a:stretch>
-        </p:blipFill>
-        <p:spPr>
-          <a:xfrm>
-            <a:off x="4448556" y="3854196"/>
-            <a:ext cx="384048" cy="384048"/>
-          </a:xfrm>
-          <a:prstGeom prst="rect">
-            <a:avLst/>
-          </a:prstGeom>
-        </p:spPr>
-      </p:pic>
-      <p:sp>
-        <p:nvSpPr>
-          <p:cNvPr id="21" name="Text 14"/>
-          <p:cNvSpPr txBox="1"/>
-          <p:nvPr/>
-        </p:nvSpPr>
-        <p:spPr>
-          <a:xfrm>
-            <a:off x="4297680" y="4526280"/>
-            <a:ext cx="3474720" cy="411480"/>
-          </a:xfrm>
-          <a:prstGeom prst="rect">
-            <a:avLst/>
-          </a:prstGeom>
-          <a:noFill/>
-          <a:ln/>
-        </p:spPr>
-        <p:txBody>
-          <a:bodyPr wrap="square" lIns="0" tIns="0" rIns="0" bIns="0" rtlCol="0" anchor="ctr"/>
-          <a:lstStyle/>
-          <a:p>
-            <a:pPr indent="0" marL="0">
-              <a:buNone/>
-            </a:pPr>
-            <a:r>
-              <a:rPr lang="en-US" sz="1800" b="1" dirty="0">
-                <a:solidFill>
-                  <a:srgbClr val="1B2533"/>
-                </a:solidFill>
-              </a:rPr>
-              <a:t>One machine</a:t>
-            </a:r>
-            <a:endParaRPr lang="en-US" sz="1800" dirty="0"/>
-          </a:p>
-        </p:txBody>
-      </p:sp>
-      <p:sp>
-        <p:nvSpPr>
-          <p:cNvPr id="22" name="Text 15"/>
-          <p:cNvSpPr txBox="1"/>
-          <p:nvPr/>
-        </p:nvSpPr>
-        <p:spPr>
-          <a:xfrm>
-            <a:off x="4297680" y="4956048"/>
-            <a:ext cx="3474720" cy="822960"/>
-          </a:xfrm>
-          <a:prstGeom prst="rect">
-            <a:avLst/>
-          </a:prstGeom>
-          <a:noFill/>
-          <a:ln/>
-        </p:spPr>
-        <p:txBody>
-          <a:bodyPr wrap="square" lIns="0" tIns="0" rIns="0" bIns="0" rtlCol="0" anchor="t"/>
-          <a:lstStyle/>
-          <a:p>
-            <a:pPr indent="0" marL="0">
-              <a:buNone/>
-            </a:pPr>
-            <a:r>
-              <a:rPr lang="en-US" sz="1500" dirty="0">
-                <a:solidFill>
-                  <a:srgbClr val="6B7686"/>
-                </a:solidFill>
-              </a:rPr>
-              <a:t>Run the same images on several hosts or Kubernetes for real scaling.</a:t>
-            </a:r>
-            <a:endParaRPr lang="en-US" sz="1500" dirty="0"/>
-          </a:p>
-        </p:txBody>
-      </p:sp>
-      <p:sp>
-        <p:nvSpPr>
-          <p:cNvPr id="23" name="Shape 16"/>
-          <p:cNvSpPr/>
-          <p:nvPr/>
-        </p:nvSpPr>
-        <p:spPr>
-          <a:xfrm>
-            <a:off x="8046720" y="3703320"/>
-            <a:ext cx="685800" cy="685800"/>
-          </a:xfrm>
-          <a:prstGeom prst="ellipse">
-            <a:avLst/>
-          </a:prstGeom>
-          <a:solidFill>
-            <a:srgbClr val="E6ECF3"/>
-          </a:solidFill>
-          <a:ln w="12700">
-            <a:solidFill>
-              <a:srgbClr val="E6ECF3"/>
-            </a:solidFill>
-            <a:prstDash val="solid"/>
-          </a:ln>
-        </p:spPr>
-      </p:sp>
-      <p:pic>
-        <p:nvPicPr>
-          <p:cNvPr id="24" name="Image 5" descr="preencoded.png">    </p:cNvPr>
-          <p:cNvPicPr>
-            <a:picLocks noChangeAspect="1"/>
-          </p:cNvPicPr>
-          <p:nvPr/>
-        </p:nvPicPr>
-        <p:blipFill>
-          <a:blip r:embed="rId6"/>
-          <a:stretch>
-            <a:fillRect/>
-          </a:stretch>
-        </p:blipFill>
-        <p:spPr>
-          <a:xfrm>
-            <a:off x="8197596" y="3854196"/>
-            <a:ext cx="384048" cy="384048"/>
-          </a:xfrm>
-          <a:prstGeom prst="rect">
-            <a:avLst/>
-          </a:prstGeom>
-        </p:spPr>
-      </p:pic>
-      <p:sp>
-        <p:nvSpPr>
-          <p:cNvPr id="25" name="Text 17"/>
-          <p:cNvSpPr txBox="1"/>
-          <p:nvPr/>
-        </p:nvSpPr>
-        <p:spPr>
-          <a:xfrm>
-            <a:off x="8046720" y="4526280"/>
-            <a:ext cx="3474720" cy="411480"/>
-          </a:xfrm>
-          <a:prstGeom prst="rect">
-            <a:avLst/>
-          </a:prstGeom>
-          <a:noFill/>
-          <a:ln/>
-        </p:spPr>
-        <p:txBody>
-          <a:bodyPr wrap="square" lIns="0" tIns="0" rIns="0" bIns="0" rtlCol="0" anchor="ctr"/>
-          <a:lstStyle/>
-          <a:p>
-            <a:pPr indent="0" marL="0">
-              <a:buNone/>
-            </a:pPr>
-            <a:r>
-              <a:rPr lang="en-US" sz="1800" b="1" dirty="0">
-                <a:solidFill>
-                  <a:srgbClr val="1B2533"/>
-                </a:solidFill>
-              </a:rPr>
-              <a:t>Read-only dashboard</a:t>
-            </a:r>
-            <a:endParaRPr lang="en-US" sz="1800" dirty="0"/>
-          </a:p>
-        </p:txBody>
-      </p:sp>
-      <p:sp>
-        <p:nvSpPr>
-          <p:cNvPr id="26" name="Text 18"/>
-          <p:cNvSpPr txBox="1"/>
-          <p:nvPr/>
-        </p:nvSpPr>
-        <p:spPr>
-          <a:xfrm>
-            <a:off x="8046720" y="4956048"/>
-            <a:ext cx="3474720" cy="822960"/>
-          </a:xfrm>
-          <a:prstGeom prst="rect">
-            <a:avLst/>
-          </a:prstGeom>
-          <a:noFill/>
-          <a:ln/>
-        </p:spPr>
-        <p:txBody>
-          <a:bodyPr wrap="square" lIns="0" tIns="0" rIns="0" bIns="0" rtlCol="0" anchor="t"/>
-          <a:lstStyle/>
-          <a:p>
-            <a:pPr indent="0" marL="0">
-              <a:buNone/>
-            </a:pPr>
-            <a:r>
-              <a:rPr lang="en-US" sz="1500" dirty="0">
-                <a:solidFill>
-                  <a:srgbClr val="6B7686"/>
-                </a:solidFill>
-              </a:rPr>
-              <a:t>A button that submits the pipeline would make it a control panel.</a:t>
-            </a:r>
-            <a:endParaRPr lang="en-US" sz="1500" dirty="0"/>
+              <a:t>1,440 days</a:t>
+            </a:r>
+            <a:endParaRPr lang="en-US" sz="1300" dirty="0"/>
           </a:p>
         </p:txBody>
       </p:sp>
@@ -8040,6 +9876,1792 @@
         </p:nvSpPr>
         <p:spPr>
           <a:xfrm>
+            <a:off x="548640" y="320040"/>
+            <a:ext cx="11064240" cy="731520"/>
+          </a:xfrm>
+          <a:prstGeom prst="rect">
+            <a:avLst/>
+          </a:prstGeom>
+          <a:noFill/>
+          <a:ln/>
+        </p:spPr>
+        <p:txBody>
+          <a:bodyPr wrap="square" lIns="0" tIns="0" rIns="0" bIns="0" rtlCol="0" anchor="ctr"/>
+          <a:lstStyle/>
+          <a:p>
+            <a:pPr algn="l" indent="0" marL="0">
+              <a:buNone/>
+            </a:pPr>
+            <a:r>
+              <a:rPr lang="en-US" sz="3200" b="1" dirty="0">
+                <a:solidFill>
+                  <a:srgbClr val="1B2533"/>
+                </a:solidFill>
+              </a:rPr>
+              <a:t>How we know it works</a:t>
+            </a:r>
+            <a:endParaRPr lang="en-US" sz="3200" dirty="0"/>
+          </a:p>
+        </p:txBody>
+      </p:sp>
+      <p:sp>
+        <p:nvSpPr>
+          <p:cNvPr id="3" name="Shape 1"/>
+          <p:cNvSpPr/>
+          <p:nvPr/>
+        </p:nvSpPr>
+        <p:spPr>
+          <a:xfrm>
+            <a:off x="548640" y="1280160"/>
+            <a:ext cx="5440680" cy="1005840"/>
+          </a:xfrm>
+          <a:prstGeom prst="roundRect">
+            <a:avLst>
+              <a:gd name="adj" fmla="val 7273"/>
+            </a:avLst>
+          </a:prstGeom>
+          <a:solidFill>
+            <a:srgbClr val="F4F6F9"/>
+          </a:solidFill>
+          <a:ln w="12700">
+            <a:solidFill>
+              <a:srgbClr val="F4F6F9"/>
+            </a:solidFill>
+            <a:prstDash val="solid"/>
+          </a:ln>
+        </p:spPr>
+      </p:sp>
+      <p:pic>
+        <p:nvPicPr>
+          <p:cNvPr id="4" name="Image 0" descr="preencoded.png">    </p:cNvPr>
+          <p:cNvPicPr>
+            <a:picLocks noChangeAspect="1"/>
+          </p:cNvPicPr>
+          <p:nvPr/>
+        </p:nvPicPr>
+        <p:blipFill>
+          <a:blip r:embed="rId1"/>
+          <a:stretch>
+            <a:fillRect/>
+          </a:stretch>
+        </p:blipFill>
+        <p:spPr>
+          <a:xfrm>
+            <a:off x="749808" y="1554480"/>
+            <a:ext cx="457200" cy="457200"/>
+          </a:xfrm>
+          <a:prstGeom prst="rect">
+            <a:avLst/>
+          </a:prstGeom>
+        </p:spPr>
+      </p:pic>
+      <p:sp>
+        <p:nvSpPr>
+          <p:cNvPr id="5" name="Text 2"/>
+          <p:cNvSpPr txBox="1"/>
+          <p:nvPr/>
+        </p:nvSpPr>
+        <p:spPr>
+          <a:xfrm>
+            <a:off x="1371600" y="1280160"/>
+            <a:ext cx="4480560" cy="1005840"/>
+          </a:xfrm>
+          <a:prstGeom prst="rect">
+            <a:avLst/>
+          </a:prstGeom>
+          <a:noFill/>
+          <a:ln/>
+        </p:spPr>
+        <p:txBody>
+          <a:bodyPr wrap="square" lIns="0" tIns="0" rIns="0" bIns="0" rtlCol="0" anchor="ctr"/>
+          <a:lstStyle/>
+          <a:p>
+            <a:pPr indent="0" marL="0">
+              <a:buNone/>
+            </a:pPr>
+            <a:r>
+              <a:rPr lang="en-US" sz="1600" b="1" dirty="0">
+                <a:solidFill>
+                  <a:srgbClr val="1B2533"/>
+                </a:solidFill>
+              </a:rPr>
+              <a:t>Spark jobs 1–5</a:t>
+            </a:r>
+            <a:endParaRPr lang="en-US" sz="1600" dirty="0"/>
+          </a:p>
+          <a:p>
+            <a:pPr indent="0" marL="0">
+              <a:buNone/>
+            </a:pPr>
+            <a:r>
+              <a:rPr lang="en-US" sz="1400" dirty="0">
+                <a:solidFill>
+                  <a:srgbClr val="6B7686"/>
+                </a:solidFill>
+              </a:rPr>
+              <a:t>match an independent pandas recomputation</a:t>
+            </a:r>
+            <a:endParaRPr lang="en-US" sz="1600" dirty="0"/>
+          </a:p>
+        </p:txBody>
+      </p:sp>
+      <p:sp>
+        <p:nvSpPr>
+          <p:cNvPr id="6" name="Shape 3"/>
+          <p:cNvSpPr/>
+          <p:nvPr/>
+        </p:nvSpPr>
+        <p:spPr>
+          <a:xfrm>
+            <a:off x="6172200" y="1280160"/>
+            <a:ext cx="5440680" cy="1005840"/>
+          </a:xfrm>
+          <a:prstGeom prst="roundRect">
+            <a:avLst>
+              <a:gd name="adj" fmla="val 7273"/>
+            </a:avLst>
+          </a:prstGeom>
+          <a:solidFill>
+            <a:srgbClr val="F4F6F9"/>
+          </a:solidFill>
+          <a:ln w="12700">
+            <a:solidFill>
+              <a:srgbClr val="F4F6F9"/>
+            </a:solidFill>
+            <a:prstDash val="solid"/>
+          </a:ln>
+        </p:spPr>
+      </p:sp>
+      <p:pic>
+        <p:nvPicPr>
+          <p:cNvPr id="7" name="Image 1" descr="preencoded.png">    </p:cNvPr>
+          <p:cNvPicPr>
+            <a:picLocks noChangeAspect="1"/>
+          </p:cNvPicPr>
+          <p:nvPr/>
+        </p:nvPicPr>
+        <p:blipFill>
+          <a:blip r:embed="rId2"/>
+          <a:stretch>
+            <a:fillRect/>
+          </a:stretch>
+        </p:blipFill>
+        <p:spPr>
+          <a:xfrm>
+            <a:off x="6373368" y="1554480"/>
+            <a:ext cx="457200" cy="457200"/>
+          </a:xfrm>
+          <a:prstGeom prst="rect">
+            <a:avLst/>
+          </a:prstGeom>
+        </p:spPr>
+      </p:pic>
+      <p:sp>
+        <p:nvSpPr>
+          <p:cNvPr id="8" name="Text 4"/>
+          <p:cNvSpPr txBox="1"/>
+          <p:nvPr/>
+        </p:nvSpPr>
+        <p:spPr>
+          <a:xfrm>
+            <a:off x="6995160" y="1280160"/>
+            <a:ext cx="4480560" cy="1005840"/>
+          </a:xfrm>
+          <a:prstGeom prst="rect">
+            <a:avLst/>
+          </a:prstGeom>
+          <a:noFill/>
+          <a:ln/>
+        </p:spPr>
+        <p:txBody>
+          <a:bodyPr wrap="square" lIns="0" tIns="0" rIns="0" bIns="0" rtlCol="0" anchor="ctr"/>
+          <a:lstStyle/>
+          <a:p>
+            <a:pPr indent="0" marL="0">
+              <a:buNone/>
+            </a:pPr>
+            <a:r>
+              <a:rPr lang="en-US" sz="1600" b="1" dirty="0">
+                <a:solidFill>
+                  <a:srgbClr val="1B2533"/>
+                </a:solidFill>
+              </a:rPr>
+              <a:t>MapReduce on YARN</a:t>
+            </a:r>
+            <a:endParaRPr lang="en-US" sz="1600" dirty="0"/>
+          </a:p>
+          <a:p>
+            <a:pPr indent="0" marL="0">
+              <a:buNone/>
+            </a:pPr>
+            <a:r>
+              <a:rPr lang="en-US" sz="1400" dirty="0">
+                <a:solidFill>
+                  <a:srgbClr val="6B7686"/>
+                </a:solidFill>
+              </a:rPr>
+              <a:t>identical to the local pipe output</a:t>
+            </a:r>
+            <a:endParaRPr lang="en-US" sz="1600" dirty="0"/>
+          </a:p>
+        </p:txBody>
+      </p:sp>
+      <p:sp>
+        <p:nvSpPr>
+          <p:cNvPr id="9" name="Shape 5"/>
+          <p:cNvSpPr/>
+          <p:nvPr/>
+        </p:nvSpPr>
+        <p:spPr>
+          <a:xfrm>
+            <a:off x="548640" y="2468880"/>
+            <a:ext cx="5440680" cy="1005840"/>
+          </a:xfrm>
+          <a:prstGeom prst="roundRect">
+            <a:avLst>
+              <a:gd name="adj" fmla="val 7273"/>
+            </a:avLst>
+          </a:prstGeom>
+          <a:solidFill>
+            <a:srgbClr val="F4F6F9"/>
+          </a:solidFill>
+          <a:ln w="12700">
+            <a:solidFill>
+              <a:srgbClr val="F4F6F9"/>
+            </a:solidFill>
+            <a:prstDash val="solid"/>
+          </a:ln>
+        </p:spPr>
+      </p:sp>
+      <p:pic>
+        <p:nvPicPr>
+          <p:cNvPr id="10" name="Image 2" descr="preencoded.png">    </p:cNvPr>
+          <p:cNvPicPr>
+            <a:picLocks noChangeAspect="1"/>
+          </p:cNvPicPr>
+          <p:nvPr/>
+        </p:nvPicPr>
+        <p:blipFill>
+          <a:blip r:embed="rId3"/>
+          <a:stretch>
+            <a:fillRect/>
+          </a:stretch>
+        </p:blipFill>
+        <p:spPr>
+          <a:xfrm>
+            <a:off x="749808" y="2743200"/>
+            <a:ext cx="457200" cy="457200"/>
+          </a:xfrm>
+          <a:prstGeom prst="rect">
+            <a:avLst/>
+          </a:prstGeom>
+        </p:spPr>
+      </p:pic>
+      <p:sp>
+        <p:nvSpPr>
+          <p:cNvPr id="11" name="Text 6"/>
+          <p:cNvSpPr txBox="1"/>
+          <p:nvPr/>
+        </p:nvSpPr>
+        <p:spPr>
+          <a:xfrm>
+            <a:off x="1371600" y="2468880"/>
+            <a:ext cx="4480560" cy="1005840"/>
+          </a:xfrm>
+          <a:prstGeom prst="rect">
+            <a:avLst/>
+          </a:prstGeom>
+          <a:noFill/>
+          <a:ln/>
+        </p:spPr>
+        <p:txBody>
+          <a:bodyPr wrap="square" lIns="0" tIns="0" rIns="0" bIns="0" rtlCol="0" anchor="ctr"/>
+          <a:lstStyle/>
+          <a:p>
+            <a:pPr indent="0" marL="0">
+              <a:buNone/>
+            </a:pPr>
+            <a:r>
+              <a:rPr lang="en-US" sz="1600" b="1" dirty="0">
+                <a:solidFill>
+                  <a:srgbClr val="1B2533"/>
+                </a:solidFill>
+              </a:rPr>
+              <a:t>Split handling</a:t>
+            </a:r>
+            <a:endParaRPr lang="en-US" sz="1600" dirty="0"/>
+          </a:p>
+          <a:p>
+            <a:pPr indent="0" marL="0">
+              <a:buNone/>
+            </a:pPr>
+            <a:r>
+              <a:rPr lang="en-US" sz="1400" dirty="0">
+                <a:solidFill>
+                  <a:srgbClr val="6B7686"/>
+                </a:solidFill>
+              </a:rPr>
+              <a:t>two halves of the file give the same totals</a:t>
+            </a:r>
+            <a:endParaRPr lang="en-US" sz="1600" dirty="0"/>
+          </a:p>
+        </p:txBody>
+      </p:sp>
+      <p:sp>
+        <p:nvSpPr>
+          <p:cNvPr id="12" name="Shape 7"/>
+          <p:cNvSpPr/>
+          <p:nvPr/>
+        </p:nvSpPr>
+        <p:spPr>
+          <a:xfrm>
+            <a:off x="6172200" y="2468880"/>
+            <a:ext cx="5440680" cy="1005840"/>
+          </a:xfrm>
+          <a:prstGeom prst="roundRect">
+            <a:avLst>
+              <a:gd name="adj" fmla="val 7273"/>
+            </a:avLst>
+          </a:prstGeom>
+          <a:solidFill>
+            <a:srgbClr val="F4F6F9"/>
+          </a:solidFill>
+          <a:ln w="12700">
+            <a:solidFill>
+              <a:srgbClr val="F4F6F9"/>
+            </a:solidFill>
+            <a:prstDash val="solid"/>
+          </a:ln>
+        </p:spPr>
+      </p:sp>
+      <p:pic>
+        <p:nvPicPr>
+          <p:cNvPr id="13" name="Image 3" descr="preencoded.png">    </p:cNvPr>
+          <p:cNvPicPr>
+            <a:picLocks noChangeAspect="1"/>
+          </p:cNvPicPr>
+          <p:nvPr/>
+        </p:nvPicPr>
+        <p:blipFill>
+          <a:blip r:embed="rId4"/>
+          <a:stretch>
+            <a:fillRect/>
+          </a:stretch>
+        </p:blipFill>
+        <p:spPr>
+          <a:xfrm>
+            <a:off x="6373368" y="2743200"/>
+            <a:ext cx="457200" cy="457200"/>
+          </a:xfrm>
+          <a:prstGeom prst="rect">
+            <a:avLst/>
+          </a:prstGeom>
+        </p:spPr>
+      </p:pic>
+      <p:sp>
+        <p:nvSpPr>
+          <p:cNvPr id="14" name="Text 8"/>
+          <p:cNvSpPr txBox="1"/>
+          <p:nvPr/>
+        </p:nvSpPr>
+        <p:spPr>
+          <a:xfrm>
+            <a:off x="6995160" y="2468880"/>
+            <a:ext cx="4480560" cy="1005840"/>
+          </a:xfrm>
+          <a:prstGeom prst="rect">
+            <a:avLst/>
+          </a:prstGeom>
+          <a:noFill/>
+          <a:ln/>
+        </p:spPr>
+        <p:txBody>
+          <a:bodyPr wrap="square" lIns="0" tIns="0" rIns="0" bIns="0" rtlCol="0" anchor="ctr"/>
+          <a:lstStyle/>
+          <a:p>
+            <a:pPr indent="0" marL="0">
+              <a:buNone/>
+            </a:pPr>
+            <a:r>
+              <a:rPr lang="en-US" sz="1600" b="1" dirty="0">
+                <a:solidFill>
+                  <a:srgbClr val="1B2533"/>
+                </a:solidFill>
+              </a:rPr>
+              <a:t>MapReduce vs Spark</a:t>
+            </a:r>
+            <a:endParaRPr lang="en-US" sz="1600" dirty="0"/>
+          </a:p>
+          <a:p>
+            <a:pPr indent="0" marL="0">
+              <a:buNone/>
+            </a:pPr>
+            <a:r>
+              <a:rPr lang="en-US" sz="1400" dirty="0">
+                <a:solidFill>
+                  <a:srgbClr val="6B7686"/>
+                </a:solidFill>
+              </a:rPr>
+              <a:t>sum of new cases = max of total cases</a:t>
+            </a:r>
+            <a:endParaRPr lang="en-US" sz="1600" dirty="0"/>
+          </a:p>
+        </p:txBody>
+      </p:sp>
+      <p:sp>
+        <p:nvSpPr>
+          <p:cNvPr id="15" name="Shape 9"/>
+          <p:cNvSpPr/>
+          <p:nvPr/>
+        </p:nvSpPr>
+        <p:spPr>
+          <a:xfrm>
+            <a:off x="548640" y="3657600"/>
+            <a:ext cx="5440680" cy="1005840"/>
+          </a:xfrm>
+          <a:prstGeom prst="roundRect">
+            <a:avLst>
+              <a:gd name="adj" fmla="val 7273"/>
+            </a:avLst>
+          </a:prstGeom>
+          <a:solidFill>
+            <a:srgbClr val="F4F6F9"/>
+          </a:solidFill>
+          <a:ln w="12700">
+            <a:solidFill>
+              <a:srgbClr val="F4F6F9"/>
+            </a:solidFill>
+            <a:prstDash val="solid"/>
+          </a:ln>
+        </p:spPr>
+      </p:sp>
+      <p:pic>
+        <p:nvPicPr>
+          <p:cNvPr id="16" name="Image 4" descr="preencoded.png">    </p:cNvPr>
+          <p:cNvPicPr>
+            <a:picLocks noChangeAspect="1"/>
+          </p:cNvPicPr>
+          <p:nvPr/>
+        </p:nvPicPr>
+        <p:blipFill>
+          <a:blip r:embed="rId5"/>
+          <a:stretch>
+            <a:fillRect/>
+          </a:stretch>
+        </p:blipFill>
+        <p:spPr>
+          <a:xfrm>
+            <a:off x="749808" y="3931920"/>
+            <a:ext cx="457200" cy="457200"/>
+          </a:xfrm>
+          <a:prstGeom prst="rect">
+            <a:avLst/>
+          </a:prstGeom>
+        </p:spPr>
+      </p:pic>
+      <p:sp>
+        <p:nvSpPr>
+          <p:cNvPr id="17" name="Text 10"/>
+          <p:cNvSpPr txBox="1"/>
+          <p:nvPr/>
+        </p:nvSpPr>
+        <p:spPr>
+          <a:xfrm>
+            <a:off x="1371600" y="3657600"/>
+            <a:ext cx="4480560" cy="1005840"/>
+          </a:xfrm>
+          <a:prstGeom prst="rect">
+            <a:avLst/>
+          </a:prstGeom>
+          <a:noFill/>
+          <a:ln/>
+        </p:spPr>
+        <p:txBody>
+          <a:bodyPr wrap="square" lIns="0" tIns="0" rIns="0" bIns="0" rtlCol="0" anchor="ctr"/>
+          <a:lstStyle/>
+          <a:p>
+            <a:pPr indent="0" marL="0">
+              <a:buNone/>
+            </a:pPr>
+            <a:r>
+              <a:rPr lang="en-US" sz="1600" b="1" dirty="0">
+                <a:solidFill>
+                  <a:srgbClr val="1B2533"/>
+                </a:solidFill>
+              </a:rPr>
+              <a:t>HDFS</a:t>
+            </a:r>
+            <a:endParaRPr lang="en-US" sz="1600" dirty="0"/>
+          </a:p>
+          <a:p>
+            <a:pPr indent="0" marL="0">
+              <a:buNone/>
+            </a:pPr>
+            <a:r>
+              <a:rPr lang="en-US" sz="1400" dirty="0">
+                <a:solidFill>
+                  <a:srgbClr val="6B7686"/>
+                </a:solidFill>
+              </a:rPr>
+              <a:t>2 live DataNodes, replication 2</a:t>
+            </a:r>
+            <a:endParaRPr lang="en-US" sz="1600" dirty="0"/>
+          </a:p>
+        </p:txBody>
+      </p:sp>
+      <p:sp>
+        <p:nvSpPr>
+          <p:cNvPr id="18" name="Shape 11"/>
+          <p:cNvSpPr/>
+          <p:nvPr/>
+        </p:nvSpPr>
+        <p:spPr>
+          <a:xfrm>
+            <a:off x="6172200" y="3657600"/>
+            <a:ext cx="5440680" cy="1005840"/>
+          </a:xfrm>
+          <a:prstGeom prst="roundRect">
+            <a:avLst>
+              <a:gd name="adj" fmla="val 7273"/>
+            </a:avLst>
+          </a:prstGeom>
+          <a:solidFill>
+            <a:srgbClr val="F4F6F9"/>
+          </a:solidFill>
+          <a:ln w="12700">
+            <a:solidFill>
+              <a:srgbClr val="F4F6F9"/>
+            </a:solidFill>
+            <a:prstDash val="solid"/>
+          </a:ln>
+        </p:spPr>
+      </p:sp>
+      <p:pic>
+        <p:nvPicPr>
+          <p:cNvPr id="19" name="Image 5" descr="preencoded.png">    </p:cNvPr>
+          <p:cNvPicPr>
+            <a:picLocks noChangeAspect="1"/>
+          </p:cNvPicPr>
+          <p:nvPr/>
+        </p:nvPicPr>
+        <p:blipFill>
+          <a:blip r:embed="rId6"/>
+          <a:stretch>
+            <a:fillRect/>
+          </a:stretch>
+        </p:blipFill>
+        <p:spPr>
+          <a:xfrm>
+            <a:off x="6373368" y="3931920"/>
+            <a:ext cx="457200" cy="457200"/>
+          </a:xfrm>
+          <a:prstGeom prst="rect">
+            <a:avLst/>
+          </a:prstGeom>
+        </p:spPr>
+      </p:pic>
+      <p:sp>
+        <p:nvSpPr>
+          <p:cNvPr id="20" name="Text 12"/>
+          <p:cNvSpPr txBox="1"/>
+          <p:nvPr/>
+        </p:nvSpPr>
+        <p:spPr>
+          <a:xfrm>
+            <a:off x="6995160" y="3657600"/>
+            <a:ext cx="4480560" cy="1005840"/>
+          </a:xfrm>
+          <a:prstGeom prst="rect">
+            <a:avLst/>
+          </a:prstGeom>
+          <a:noFill/>
+          <a:ln/>
+        </p:spPr>
+        <p:txBody>
+          <a:bodyPr wrap="square" lIns="0" tIns="0" rIns="0" bIns="0" rtlCol="0" anchor="ctr"/>
+          <a:lstStyle/>
+          <a:p>
+            <a:pPr indent="0" marL="0">
+              <a:buNone/>
+            </a:pPr>
+            <a:r>
+              <a:rPr lang="en-US" sz="1600" b="1" dirty="0">
+                <a:solidFill>
+                  <a:srgbClr val="1B2533"/>
+                </a:solidFill>
+              </a:rPr>
+              <a:t>YARN</a:t>
+            </a:r>
+            <a:endParaRPr lang="en-US" sz="1600" dirty="0"/>
+          </a:p>
+          <a:p>
+            <a:pPr indent="0" marL="0">
+              <a:buNone/>
+            </a:pPr>
+            <a:r>
+              <a:rPr lang="en-US" sz="1400" dirty="0">
+                <a:solidFill>
+                  <a:srgbClr val="6B7686"/>
+                </a:solidFill>
+              </a:rPr>
+              <a:t>2 NodeManagers, 2 maps + 1 reduce</a:t>
+            </a:r>
+            <a:endParaRPr lang="en-US" sz="1600" dirty="0"/>
+          </a:p>
+        </p:txBody>
+      </p:sp>
+      <p:sp>
+        <p:nvSpPr>
+          <p:cNvPr id="21" name="Shape 13"/>
+          <p:cNvSpPr/>
+          <p:nvPr/>
+        </p:nvSpPr>
+        <p:spPr>
+          <a:xfrm>
+            <a:off x="548640" y="4846320"/>
+            <a:ext cx="5440680" cy="1005840"/>
+          </a:xfrm>
+          <a:prstGeom prst="roundRect">
+            <a:avLst>
+              <a:gd name="adj" fmla="val 7273"/>
+            </a:avLst>
+          </a:prstGeom>
+          <a:solidFill>
+            <a:srgbClr val="F4F6F9"/>
+          </a:solidFill>
+          <a:ln w="12700">
+            <a:solidFill>
+              <a:srgbClr val="F4F6F9"/>
+            </a:solidFill>
+            <a:prstDash val="solid"/>
+          </a:ln>
+        </p:spPr>
+      </p:sp>
+      <p:pic>
+        <p:nvPicPr>
+          <p:cNvPr id="22" name="Image 6" descr="preencoded.png">    </p:cNvPr>
+          <p:cNvPicPr>
+            <a:picLocks noChangeAspect="1"/>
+          </p:cNvPicPr>
+          <p:nvPr/>
+        </p:nvPicPr>
+        <p:blipFill>
+          <a:blip r:embed="rId7"/>
+          <a:stretch>
+            <a:fillRect/>
+          </a:stretch>
+        </p:blipFill>
+        <p:spPr>
+          <a:xfrm>
+            <a:off x="749808" y="5120640"/>
+            <a:ext cx="457200" cy="457200"/>
+          </a:xfrm>
+          <a:prstGeom prst="rect">
+            <a:avLst/>
+          </a:prstGeom>
+        </p:spPr>
+      </p:pic>
+      <p:sp>
+        <p:nvSpPr>
+          <p:cNvPr id="23" name="Text 14"/>
+          <p:cNvSpPr txBox="1"/>
+          <p:nvPr/>
+        </p:nvSpPr>
+        <p:spPr>
+          <a:xfrm>
+            <a:off x="1371600" y="4846320"/>
+            <a:ext cx="4480560" cy="1005840"/>
+          </a:xfrm>
+          <a:prstGeom prst="rect">
+            <a:avLst/>
+          </a:prstGeom>
+          <a:noFill/>
+          <a:ln/>
+        </p:spPr>
+        <p:txBody>
+          <a:bodyPr wrap="square" lIns="0" tIns="0" rIns="0" bIns="0" rtlCol="0" anchor="ctr"/>
+          <a:lstStyle/>
+          <a:p>
+            <a:pPr indent="0" marL="0">
+              <a:buNone/>
+            </a:pPr>
+            <a:r>
+              <a:rPr lang="en-US" sz="1600" b="1" dirty="0">
+                <a:solidFill>
+                  <a:srgbClr val="1B2533"/>
+                </a:solidFill>
+              </a:rPr>
+              <a:t>Spark cluster</a:t>
+            </a:r>
+            <a:endParaRPr lang="en-US" sz="1600" dirty="0"/>
+          </a:p>
+          <a:p>
+            <a:pPr indent="0" marL="0">
+              <a:buNone/>
+            </a:pPr>
+            <a:r>
+              <a:rPr lang="en-US" sz="1400" dirty="0">
+                <a:solidFill>
+                  <a:srgbClr val="6B7686"/>
+                </a:solidFill>
+              </a:rPr>
+              <a:t>2 workers alive, app finished on 4 cores</a:t>
+            </a:r>
+            <a:endParaRPr lang="en-US" sz="1600" dirty="0"/>
+          </a:p>
+        </p:txBody>
+      </p:sp>
+      <p:sp>
+        <p:nvSpPr>
+          <p:cNvPr id="24" name="Shape 15"/>
+          <p:cNvSpPr/>
+          <p:nvPr/>
+        </p:nvSpPr>
+        <p:spPr>
+          <a:xfrm>
+            <a:off x="6172200" y="4846320"/>
+            <a:ext cx="5440680" cy="1005840"/>
+          </a:xfrm>
+          <a:prstGeom prst="roundRect">
+            <a:avLst>
+              <a:gd name="adj" fmla="val 7273"/>
+            </a:avLst>
+          </a:prstGeom>
+          <a:solidFill>
+            <a:srgbClr val="F4F6F9"/>
+          </a:solidFill>
+          <a:ln w="12700">
+            <a:solidFill>
+              <a:srgbClr val="F4F6F9"/>
+            </a:solidFill>
+            <a:prstDash val="solid"/>
+          </a:ln>
+        </p:spPr>
+      </p:sp>
+      <p:pic>
+        <p:nvPicPr>
+          <p:cNvPr id="25" name="Image 7" descr="preencoded.png">    </p:cNvPr>
+          <p:cNvPicPr>
+            <a:picLocks noChangeAspect="1"/>
+          </p:cNvPicPr>
+          <p:nvPr/>
+        </p:nvPicPr>
+        <p:blipFill>
+          <a:blip r:embed="rId8"/>
+          <a:stretch>
+            <a:fillRect/>
+          </a:stretch>
+        </p:blipFill>
+        <p:spPr>
+          <a:xfrm>
+            <a:off x="6373368" y="5120640"/>
+            <a:ext cx="457200" cy="457200"/>
+          </a:xfrm>
+          <a:prstGeom prst="rect">
+            <a:avLst/>
+          </a:prstGeom>
+        </p:spPr>
+      </p:pic>
+      <p:sp>
+        <p:nvSpPr>
+          <p:cNvPr id="26" name="Text 16"/>
+          <p:cNvSpPr txBox="1"/>
+          <p:nvPr/>
+        </p:nvSpPr>
+        <p:spPr>
+          <a:xfrm>
+            <a:off x="6995160" y="4846320"/>
+            <a:ext cx="4480560" cy="1005840"/>
+          </a:xfrm>
+          <a:prstGeom prst="rect">
+            <a:avLst/>
+          </a:prstGeom>
+          <a:noFill/>
+          <a:ln/>
+        </p:spPr>
+        <p:txBody>
+          <a:bodyPr wrap="square" lIns="0" tIns="0" rIns="0" bIns="0" rtlCol="0" anchor="ctr"/>
+          <a:lstStyle/>
+          <a:p>
+            <a:pPr indent="0" marL="0">
+              <a:buNone/>
+            </a:pPr>
+            <a:r>
+              <a:rPr lang="en-US" sz="1600" b="1" dirty="0">
+                <a:solidFill>
+                  <a:srgbClr val="1B2533"/>
+                </a:solidFill>
+              </a:rPr>
+              <a:t>Dashboard</a:t>
+            </a:r>
+            <a:endParaRPr lang="en-US" sz="1600" dirty="0"/>
+          </a:p>
+          <a:p>
+            <a:pPr indent="0" marL="0">
+              <a:buNone/>
+            </a:pPr>
+            <a:r>
+              <a:rPr lang="en-US" sz="1400" dirty="0">
+                <a:solidFill>
+                  <a:srgbClr val="6B7686"/>
+                </a:solidFill>
+              </a:rPr>
+              <a:t>all routes 200, all views render, no JS errors</a:t>
+            </a:r>
+            <a:endParaRPr lang="en-US" sz="1600" dirty="0"/>
+          </a:p>
+        </p:txBody>
+      </p:sp>
+      <p:sp>
+        <p:nvSpPr>
+          <p:cNvPr id="27" name="Text 17"/>
+          <p:cNvSpPr txBox="1"/>
+          <p:nvPr/>
+        </p:nvSpPr>
+        <p:spPr>
+          <a:xfrm>
+            <a:off x="548640" y="6035040"/>
+            <a:ext cx="11064240" cy="320040"/>
+          </a:xfrm>
+          <a:prstGeom prst="rect">
+            <a:avLst/>
+          </a:prstGeom>
+          <a:noFill/>
+          <a:ln/>
+        </p:spPr>
+        <p:txBody>
+          <a:bodyPr wrap="square" lIns="0" tIns="0" rIns="0" bIns="0" rtlCol="0" anchor="ctr"/>
+          <a:lstStyle/>
+          <a:p>
+            <a:pPr indent="0" marL="0">
+              <a:buNone/>
+            </a:pPr>
+            <a:r>
+              <a:rPr lang="en-US" sz="1300" i="1" dirty="0">
+                <a:solidFill>
+                  <a:srgbClr val="6B7686"/>
+                </a:solidFill>
+              </a:rPr>
+              <a:t>Final check: cluster torn down with its volumes and rebuilt from scratch with run_all.sh.</a:t>
+            </a:r>
+            <a:endParaRPr lang="en-US" sz="1300" dirty="0"/>
+          </a:p>
+        </p:txBody>
+      </p:sp>
+      <p:sp>
+        <p:nvSpPr>
+          <p:cNvPr id="25" name="Slide Number Placeholder 0"/>
+          <p:cNvSpPr>
+            <a:spLocks noGrp="1"/>
+          </p:cNvSpPr>
+          <p:nvPr>
+            <p:ph type="sldNum" sz="quarter" idx="4294967295"/>
+          </p:nvPr>
+        </p:nvSpPr>
+        <p:spPr>
+          <a:xfrm>
+            <a:off x="11155680" y="6400800"/>
+            <a:ext cx="457200" cy="274320"/>
+          </a:xfrm>
+          <a:prstGeom prst="rect">
+            <a:avLst/>
+          </a:prstGeom>
+          <a:extLst>
+            <a:ext uri="{C572A759-6A51-4108-AA02-DFA0A04FC94B}">
+              <ma14:wrappingTextBoxFlag xmlns:ma14="http://schemas.microsoft.com/office/mac/drawingml/2011/main" val="0"/>
+            </a:ext>
+          </a:extLst>
+        </p:spPr>
+        <p:txBody>
+          <a:bodyPr/>
+          <a:lstStyle>
+            <a:lvl1pPr>
+              <a:defRPr sz="1000">
+                <a:solidFill>
+                  <a:srgbClr val="6B7686"/>
+                </a:solidFill>
+              </a:defRPr>
+            </a:lvl1pPr>
+          </a:lstStyle>
+          <a:p>
+            <a:pPr algn="r"/>
+            <a:fld id="{F7021451-1387-4CA6-816F-3879F97B5CBC}" type="slidenum">
+              <a:rPr b="0" lang="en-US"/>
+              <a:t>14</a:t>
+            </a:fld>
+            <a:endParaRPr lang="en-US"/>
+          </a:p>
+        </p:txBody>
+      </p:sp>
+    </p:spTree>
+  </p:cSld>
+  <p:clrMapOvr>
+    <a:masterClrMapping/>
+  </p:clrMapOvr>
+</p:sld>
+</file>
+
+<file path=ppt/slides/slide15.xml><?xml version="1.0" encoding="utf-8"?>
+<p:sld xmlns:a="http://schemas.openxmlformats.org/drawingml/2006/main" xmlns:r="http://schemas.openxmlformats.org/officeDocument/2006/relationships" xmlns:p="http://schemas.openxmlformats.org/presentationml/2006/main">
+  <p:cSld name="Slide 15">
+    <p:spTree>
+      <p:nvGrpSpPr>
+        <p:cNvPr id="1" name=""/>
+        <p:cNvGrpSpPr/>
+        <p:nvPr/>
+      </p:nvGrpSpPr>
+      <p:grpSpPr>
+        <a:xfrm>
+          <a:off x="0" y="0"/>
+          <a:ext cx="0" cy="0"/>
+          <a:chOff x="0" y="0"/>
+          <a:chExt cx="0" cy="0"/>
+        </a:xfrm>
+      </p:grpSpPr>
+      <p:sp>
+        <p:nvSpPr>
+          <p:cNvPr id="2" name="Text 0"/>
+          <p:cNvSpPr/>
+          <p:nvPr>
+            <p:ph idx="100" type="title" hasCustomPrompt="1"/>
+          </p:nvPr>
+        </p:nvSpPr>
+        <p:spPr>
+          <a:xfrm>
+            <a:off x="548640" y="320040"/>
+            <a:ext cx="11064240" cy="731520"/>
+          </a:xfrm>
+          <a:prstGeom prst="rect">
+            <a:avLst/>
+          </a:prstGeom>
+          <a:noFill/>
+          <a:ln/>
+        </p:spPr>
+        <p:txBody>
+          <a:bodyPr wrap="square" lIns="0" tIns="0" rIns="0" bIns="0" rtlCol="0" anchor="ctr"/>
+          <a:lstStyle/>
+          <a:p>
+            <a:pPr algn="l" indent="0" marL="0">
+              <a:buNone/>
+            </a:pPr>
+            <a:r>
+              <a:rPr lang="en-US" sz="3200" b="1" dirty="0">
+                <a:solidFill>
+                  <a:srgbClr val="1B2533"/>
+                </a:solidFill>
+              </a:rPr>
+              <a:t>Limits and next steps</a:t>
+            </a:r>
+            <a:endParaRPr lang="en-US" sz="3200" dirty="0"/>
+          </a:p>
+        </p:txBody>
+      </p:sp>
+      <p:sp>
+        <p:nvSpPr>
+          <p:cNvPr id="3" name="Shape 1"/>
+          <p:cNvSpPr/>
+          <p:nvPr/>
+        </p:nvSpPr>
+        <p:spPr>
+          <a:xfrm>
+            <a:off x="548640" y="1325880"/>
+            <a:ext cx="685800" cy="685800"/>
+          </a:xfrm>
+          <a:prstGeom prst="ellipse">
+            <a:avLst/>
+          </a:prstGeom>
+          <a:solidFill>
+            <a:srgbClr val="E6ECF3"/>
+          </a:solidFill>
+          <a:ln w="12700">
+            <a:solidFill>
+              <a:srgbClr val="E6ECF3"/>
+            </a:solidFill>
+            <a:prstDash val="solid"/>
+          </a:ln>
+        </p:spPr>
+      </p:sp>
+      <p:pic>
+        <p:nvPicPr>
+          <p:cNvPr id="4" name="Image 0" descr="preencoded.png">    </p:cNvPr>
+          <p:cNvPicPr>
+            <a:picLocks noChangeAspect="1"/>
+          </p:cNvPicPr>
+          <p:nvPr/>
+        </p:nvPicPr>
+        <p:blipFill>
+          <a:blip r:embed="rId1"/>
+          <a:stretch>
+            <a:fillRect/>
+          </a:stretch>
+        </p:blipFill>
+        <p:spPr>
+          <a:xfrm>
+            <a:off x="699516" y="1476756"/>
+            <a:ext cx="384048" cy="384048"/>
+          </a:xfrm>
+          <a:prstGeom prst="rect">
+            <a:avLst/>
+          </a:prstGeom>
+        </p:spPr>
+      </p:pic>
+      <p:sp>
+        <p:nvSpPr>
+          <p:cNvPr id="5" name="Text 2"/>
+          <p:cNvSpPr txBox="1"/>
+          <p:nvPr/>
+        </p:nvSpPr>
+        <p:spPr>
+          <a:xfrm>
+            <a:off x="548640" y="2148840"/>
+            <a:ext cx="3474720" cy="411480"/>
+          </a:xfrm>
+          <a:prstGeom prst="rect">
+            <a:avLst/>
+          </a:prstGeom>
+          <a:noFill/>
+          <a:ln/>
+        </p:spPr>
+        <p:txBody>
+          <a:bodyPr wrap="square" lIns="0" tIns="0" rIns="0" bIns="0" rtlCol="0" anchor="ctr"/>
+          <a:lstStyle/>
+          <a:p>
+            <a:pPr indent="0" marL="0">
+              <a:buNone/>
+            </a:pPr>
+            <a:r>
+              <a:rPr lang="en-US" sz="1800" b="1" dirty="0">
+                <a:solidFill>
+                  <a:srgbClr val="1B2533"/>
+                </a:solidFill>
+              </a:rPr>
+              <a:t>Synthetic data</a:t>
+            </a:r>
+            <a:endParaRPr lang="en-US" sz="1800" dirty="0"/>
+          </a:p>
+        </p:txBody>
+      </p:sp>
+      <p:sp>
+        <p:nvSpPr>
+          <p:cNvPr id="6" name="Text 3"/>
+          <p:cNvSpPr txBox="1"/>
+          <p:nvPr/>
+        </p:nvSpPr>
+        <p:spPr>
+          <a:xfrm>
+            <a:off x="548640" y="2578608"/>
+            <a:ext cx="3474720" cy="822960"/>
+          </a:xfrm>
+          <a:prstGeom prst="rect">
+            <a:avLst/>
+          </a:prstGeom>
+          <a:noFill/>
+          <a:ln/>
+        </p:spPr>
+        <p:txBody>
+          <a:bodyPr wrap="square" lIns="0" tIns="0" rIns="0" bIns="0" rtlCol="0" anchor="t"/>
+          <a:lstStyle/>
+          <a:p>
+            <a:pPr indent="0" marL="0">
+              <a:buNone/>
+            </a:pPr>
+            <a:r>
+              <a:rPr lang="en-US" sz="1500" dirty="0">
+                <a:solidFill>
+                  <a:srgbClr val="6B7686"/>
+                </a:solidFill>
+              </a:rPr>
+              <a:t>Swap in the real OWID file; the code needs no change.</a:t>
+            </a:r>
+            <a:endParaRPr lang="en-US" sz="1500" dirty="0"/>
+          </a:p>
+        </p:txBody>
+      </p:sp>
+      <p:sp>
+        <p:nvSpPr>
+          <p:cNvPr id="7" name="Shape 4"/>
+          <p:cNvSpPr/>
+          <p:nvPr/>
+        </p:nvSpPr>
+        <p:spPr>
+          <a:xfrm>
+            <a:off x="4297680" y="1325880"/>
+            <a:ext cx="685800" cy="685800"/>
+          </a:xfrm>
+          <a:prstGeom prst="ellipse">
+            <a:avLst/>
+          </a:prstGeom>
+          <a:solidFill>
+            <a:srgbClr val="E6ECF3"/>
+          </a:solidFill>
+          <a:ln w="12700">
+            <a:solidFill>
+              <a:srgbClr val="E6ECF3"/>
+            </a:solidFill>
+            <a:prstDash val="solid"/>
+          </a:ln>
+        </p:spPr>
+      </p:sp>
+      <p:pic>
+        <p:nvPicPr>
+          <p:cNvPr id="8" name="Image 1" descr="preencoded.png">    </p:cNvPr>
+          <p:cNvPicPr>
+            <a:picLocks noChangeAspect="1"/>
+          </p:cNvPicPr>
+          <p:nvPr/>
+        </p:nvPicPr>
+        <p:blipFill>
+          <a:blip r:embed="rId2"/>
+          <a:stretch>
+            <a:fillRect/>
+          </a:stretch>
+        </p:blipFill>
+        <p:spPr>
+          <a:xfrm>
+            <a:off x="4448556" y="1476756"/>
+            <a:ext cx="384048" cy="384048"/>
+          </a:xfrm>
+          <a:prstGeom prst="rect">
+            <a:avLst/>
+          </a:prstGeom>
+        </p:spPr>
+      </p:pic>
+      <p:sp>
+        <p:nvSpPr>
+          <p:cNvPr id="9" name="Text 5"/>
+          <p:cNvSpPr txBox="1"/>
+          <p:nvPr/>
+        </p:nvSpPr>
+        <p:spPr>
+          <a:xfrm>
+            <a:off x="4297680" y="2148840"/>
+            <a:ext cx="3474720" cy="411480"/>
+          </a:xfrm>
+          <a:prstGeom prst="rect">
+            <a:avLst/>
+          </a:prstGeom>
+          <a:noFill/>
+          <a:ln/>
+        </p:spPr>
+        <p:txBody>
+          <a:bodyPr wrap="square" lIns="0" tIns="0" rIns="0" bIns="0" rtlCol="0" anchor="ctr"/>
+          <a:lstStyle/>
+          <a:p>
+            <a:pPr indent="0" marL="0">
+              <a:buNone/>
+            </a:pPr>
+            <a:r>
+              <a:rPr lang="en-US" sz="1800" b="1" dirty="0">
+                <a:solidFill>
+                  <a:srgbClr val="1B2533"/>
+                </a:solidFill>
+              </a:rPr>
+              <a:t>Spark reads a shared folder</a:t>
+            </a:r>
+            <a:endParaRPr lang="en-US" sz="1800" dirty="0"/>
+          </a:p>
+        </p:txBody>
+      </p:sp>
+      <p:sp>
+        <p:nvSpPr>
+          <p:cNvPr id="10" name="Text 6"/>
+          <p:cNvSpPr txBox="1"/>
+          <p:nvPr/>
+        </p:nvSpPr>
+        <p:spPr>
+          <a:xfrm>
+            <a:off x="4297680" y="2578608"/>
+            <a:ext cx="3474720" cy="822960"/>
+          </a:xfrm>
+          <a:prstGeom prst="rect">
+            <a:avLst/>
+          </a:prstGeom>
+          <a:noFill/>
+          <a:ln/>
+        </p:spPr>
+        <p:txBody>
+          <a:bodyPr wrap="square" lIns="0" tIns="0" rIns="0" bIns="0" rtlCol="0" anchor="t"/>
+          <a:lstStyle/>
+          <a:p>
+            <a:pPr indent="0" marL="0">
+              <a:buNone/>
+            </a:pPr>
+            <a:r>
+              <a:rPr lang="en-US" sz="1500" dirty="0">
+                <a:solidFill>
+                  <a:srgbClr val="6B7686"/>
+                </a:solidFill>
+              </a:rPr>
+              <a:t>Point COVID_DATA at hdfs:// to use HDFS for Spark too.</a:t>
+            </a:r>
+            <a:endParaRPr lang="en-US" sz="1500" dirty="0"/>
+          </a:p>
+        </p:txBody>
+      </p:sp>
+      <p:sp>
+        <p:nvSpPr>
+          <p:cNvPr id="11" name="Shape 7"/>
+          <p:cNvSpPr/>
+          <p:nvPr/>
+        </p:nvSpPr>
+        <p:spPr>
+          <a:xfrm>
+            <a:off x="8046720" y="1325880"/>
+            <a:ext cx="685800" cy="685800"/>
+          </a:xfrm>
+          <a:prstGeom prst="ellipse">
+            <a:avLst/>
+          </a:prstGeom>
+          <a:solidFill>
+            <a:srgbClr val="E6ECF3"/>
+          </a:solidFill>
+          <a:ln w="12700">
+            <a:solidFill>
+              <a:srgbClr val="E6ECF3"/>
+            </a:solidFill>
+            <a:prstDash val="solid"/>
+          </a:ln>
+        </p:spPr>
+      </p:sp>
+      <p:pic>
+        <p:nvPicPr>
+          <p:cNvPr id="12" name="Image 2" descr="preencoded.png">    </p:cNvPr>
+          <p:cNvPicPr>
+            <a:picLocks noChangeAspect="1"/>
+          </p:cNvPicPr>
+          <p:nvPr/>
+        </p:nvPicPr>
+        <p:blipFill>
+          <a:blip r:embed="rId3"/>
+          <a:stretch>
+            <a:fillRect/>
+          </a:stretch>
+        </p:blipFill>
+        <p:spPr>
+          <a:xfrm>
+            <a:off x="8197596" y="1476756"/>
+            <a:ext cx="384048" cy="384048"/>
+          </a:xfrm>
+          <a:prstGeom prst="rect">
+            <a:avLst/>
+          </a:prstGeom>
+        </p:spPr>
+      </p:pic>
+      <p:sp>
+        <p:nvSpPr>
+          <p:cNvPr id="13" name="Text 8"/>
+          <p:cNvSpPr txBox="1"/>
+          <p:nvPr/>
+        </p:nvSpPr>
+        <p:spPr>
+          <a:xfrm>
+            <a:off x="8046720" y="2148840"/>
+            <a:ext cx="3474720" cy="411480"/>
+          </a:xfrm>
+          <a:prstGeom prst="rect">
+            <a:avLst/>
+          </a:prstGeom>
+          <a:noFill/>
+          <a:ln/>
+        </p:spPr>
+        <p:txBody>
+          <a:bodyPr wrap="square" lIns="0" tIns="0" rIns="0" bIns="0" rtlCol="0" anchor="ctr"/>
+          <a:lstStyle/>
+          <a:p>
+            <a:pPr indent="0" marL="0">
+              <a:buNone/>
+            </a:pPr>
+            <a:r>
+              <a:rPr lang="en-US" sz="1800" b="1" dirty="0">
+                <a:solidFill>
+                  <a:srgbClr val="1B2533"/>
+                </a:solidFill>
+              </a:rPr>
+              <a:t>Single-partition window</a:t>
+            </a:r>
+            <a:endParaRPr lang="en-US" sz="1800" dirty="0"/>
+          </a:p>
+        </p:txBody>
+      </p:sp>
+      <p:sp>
+        <p:nvSpPr>
+          <p:cNvPr id="14" name="Text 9"/>
+          <p:cNvSpPr txBox="1"/>
+          <p:nvPr/>
+        </p:nvSpPr>
+        <p:spPr>
+          <a:xfrm>
+            <a:off x="8046720" y="2578608"/>
+            <a:ext cx="3474720" cy="822960"/>
+          </a:xfrm>
+          <a:prstGeom prst="rect">
+            <a:avLst/>
+          </a:prstGeom>
+          <a:noFill/>
+          <a:ln/>
+        </p:spPr>
+        <p:txBody>
+          <a:bodyPr wrap="square" lIns="0" tIns="0" rIns="0" bIns="0" rtlCol="0" anchor="t"/>
+          <a:lstStyle/>
+          <a:p>
+            <a:pPr indent="0" marL="0">
+              <a:buNone/>
+            </a:pPr>
+            <a:r>
+              <a:rPr lang="en-US" sz="1500" dirty="0">
+                <a:solidFill>
+                  <a:srgbClr val="6B7686"/>
+                </a:solidFill>
+              </a:rPr>
+              <a:t>Fine for 1,440 days; partition it for larger date ranges.</a:t>
+            </a:r>
+            <a:endParaRPr lang="en-US" sz="1500" dirty="0"/>
+          </a:p>
+        </p:txBody>
+      </p:sp>
+      <p:sp>
+        <p:nvSpPr>
+          <p:cNvPr id="15" name="Shape 10"/>
+          <p:cNvSpPr/>
+          <p:nvPr/>
+        </p:nvSpPr>
+        <p:spPr>
+          <a:xfrm>
+            <a:off x="548640" y="3703320"/>
+            <a:ext cx="685800" cy="685800"/>
+          </a:xfrm>
+          <a:prstGeom prst="ellipse">
+            <a:avLst/>
+          </a:prstGeom>
+          <a:solidFill>
+            <a:srgbClr val="E6ECF3"/>
+          </a:solidFill>
+          <a:ln w="12700">
+            <a:solidFill>
+              <a:srgbClr val="E6ECF3"/>
+            </a:solidFill>
+            <a:prstDash val="solid"/>
+          </a:ln>
+        </p:spPr>
+      </p:sp>
+      <p:pic>
+        <p:nvPicPr>
+          <p:cNvPr id="16" name="Image 3" descr="preencoded.png">    </p:cNvPr>
+          <p:cNvPicPr>
+            <a:picLocks noChangeAspect="1"/>
+          </p:cNvPicPr>
+          <p:nvPr/>
+        </p:nvPicPr>
+        <p:blipFill>
+          <a:blip r:embed="rId4"/>
+          <a:stretch>
+            <a:fillRect/>
+          </a:stretch>
+        </p:blipFill>
+        <p:spPr>
+          <a:xfrm>
+            <a:off x="699516" y="3854196"/>
+            <a:ext cx="384048" cy="384048"/>
+          </a:xfrm>
+          <a:prstGeom prst="rect">
+            <a:avLst/>
+          </a:prstGeom>
+        </p:spPr>
+      </p:pic>
+      <p:sp>
+        <p:nvSpPr>
+          <p:cNvPr id="17" name="Text 11"/>
+          <p:cNvSpPr txBox="1"/>
+          <p:nvPr/>
+        </p:nvSpPr>
+        <p:spPr>
+          <a:xfrm>
+            <a:off x="548640" y="4526280"/>
+            <a:ext cx="3474720" cy="411480"/>
+          </a:xfrm>
+          <a:prstGeom prst="rect">
+            <a:avLst/>
+          </a:prstGeom>
+          <a:noFill/>
+          <a:ln/>
+        </p:spPr>
+        <p:txBody>
+          <a:bodyPr wrap="square" lIns="0" tIns="0" rIns="0" bIns="0" rtlCol="0" anchor="ctr"/>
+          <a:lstStyle/>
+          <a:p>
+            <a:pPr indent="0" marL="0">
+              <a:buNone/>
+            </a:pPr>
+            <a:r>
+              <a:rPr lang="en-US" sz="1800" b="1" dirty="0">
+                <a:solidFill>
+                  <a:srgbClr val="1B2533"/>
+                </a:solidFill>
+              </a:rPr>
+              <a:t>Old base images</a:t>
+            </a:r>
+            <a:endParaRPr lang="en-US" sz="1800" dirty="0"/>
+          </a:p>
+        </p:txBody>
+      </p:sp>
+      <p:sp>
+        <p:nvSpPr>
+          <p:cNvPr id="18" name="Text 12"/>
+          <p:cNvSpPr txBox="1"/>
+          <p:nvPr/>
+        </p:nvSpPr>
+        <p:spPr>
+          <a:xfrm>
+            <a:off x="548640" y="4956048"/>
+            <a:ext cx="3474720" cy="822960"/>
+          </a:xfrm>
+          <a:prstGeom prst="rect">
+            <a:avLst/>
+          </a:prstGeom>
+          <a:noFill/>
+          <a:ln/>
+        </p:spPr>
+        <p:txBody>
+          <a:bodyPr wrap="square" lIns="0" tIns="0" rIns="0" bIns="0" rtlCol="0" anchor="t"/>
+          <a:lstStyle/>
+          <a:p>
+            <a:pPr indent="0" marL="0">
+              <a:buNone/>
+            </a:pPr>
+            <a:r>
+              <a:rPr lang="en-US" sz="1500" dirty="0">
+                <a:solidFill>
+                  <a:srgbClr val="6B7686"/>
+                </a:solidFill>
+              </a:rPr>
+              <a:t>Hadoop images date from 2019; Spark comes from Bitnami's legacy archive.</a:t>
+            </a:r>
+            <a:endParaRPr lang="en-US" sz="1500" dirty="0"/>
+          </a:p>
+        </p:txBody>
+      </p:sp>
+      <p:sp>
+        <p:nvSpPr>
+          <p:cNvPr id="19" name="Shape 13"/>
+          <p:cNvSpPr/>
+          <p:nvPr/>
+        </p:nvSpPr>
+        <p:spPr>
+          <a:xfrm>
+            <a:off x="4297680" y="3703320"/>
+            <a:ext cx="685800" cy="685800"/>
+          </a:xfrm>
+          <a:prstGeom prst="ellipse">
+            <a:avLst/>
+          </a:prstGeom>
+          <a:solidFill>
+            <a:srgbClr val="E6ECF3"/>
+          </a:solidFill>
+          <a:ln w="12700">
+            <a:solidFill>
+              <a:srgbClr val="E6ECF3"/>
+            </a:solidFill>
+            <a:prstDash val="solid"/>
+          </a:ln>
+        </p:spPr>
+      </p:sp>
+      <p:pic>
+        <p:nvPicPr>
+          <p:cNvPr id="20" name="Image 4" descr="preencoded.png">    </p:cNvPr>
+          <p:cNvPicPr>
+            <a:picLocks noChangeAspect="1"/>
+          </p:cNvPicPr>
+          <p:nvPr/>
+        </p:nvPicPr>
+        <p:blipFill>
+          <a:blip r:embed="rId5"/>
+          <a:stretch>
+            <a:fillRect/>
+          </a:stretch>
+        </p:blipFill>
+        <p:spPr>
+          <a:xfrm>
+            <a:off x="4448556" y="3854196"/>
+            <a:ext cx="384048" cy="384048"/>
+          </a:xfrm>
+          <a:prstGeom prst="rect">
+            <a:avLst/>
+          </a:prstGeom>
+        </p:spPr>
+      </p:pic>
+      <p:sp>
+        <p:nvSpPr>
+          <p:cNvPr id="21" name="Text 14"/>
+          <p:cNvSpPr txBox="1"/>
+          <p:nvPr/>
+        </p:nvSpPr>
+        <p:spPr>
+          <a:xfrm>
+            <a:off x="4297680" y="4526280"/>
+            <a:ext cx="3474720" cy="411480"/>
+          </a:xfrm>
+          <a:prstGeom prst="rect">
+            <a:avLst/>
+          </a:prstGeom>
+          <a:noFill/>
+          <a:ln/>
+        </p:spPr>
+        <p:txBody>
+          <a:bodyPr wrap="square" lIns="0" tIns="0" rIns="0" bIns="0" rtlCol="0" anchor="ctr"/>
+          <a:lstStyle/>
+          <a:p>
+            <a:pPr indent="0" marL="0">
+              <a:buNone/>
+            </a:pPr>
+            <a:r>
+              <a:rPr lang="en-US" sz="1800" b="1" dirty="0">
+                <a:solidFill>
+                  <a:srgbClr val="1B2533"/>
+                </a:solidFill>
+              </a:rPr>
+              <a:t>One machine</a:t>
+            </a:r>
+            <a:endParaRPr lang="en-US" sz="1800" dirty="0"/>
+          </a:p>
+        </p:txBody>
+      </p:sp>
+      <p:sp>
+        <p:nvSpPr>
+          <p:cNvPr id="22" name="Text 15"/>
+          <p:cNvSpPr txBox="1"/>
+          <p:nvPr/>
+        </p:nvSpPr>
+        <p:spPr>
+          <a:xfrm>
+            <a:off x="4297680" y="4956048"/>
+            <a:ext cx="3474720" cy="822960"/>
+          </a:xfrm>
+          <a:prstGeom prst="rect">
+            <a:avLst/>
+          </a:prstGeom>
+          <a:noFill/>
+          <a:ln/>
+        </p:spPr>
+        <p:txBody>
+          <a:bodyPr wrap="square" lIns="0" tIns="0" rIns="0" bIns="0" rtlCol="0" anchor="t"/>
+          <a:lstStyle/>
+          <a:p>
+            <a:pPr indent="0" marL="0">
+              <a:buNone/>
+            </a:pPr>
+            <a:r>
+              <a:rPr lang="en-US" sz="1500" dirty="0">
+                <a:solidFill>
+                  <a:srgbClr val="6B7686"/>
+                </a:solidFill>
+              </a:rPr>
+              <a:t>Run the same images on several hosts or Kubernetes for real scaling.</a:t>
+            </a:r>
+            <a:endParaRPr lang="en-US" sz="1500" dirty="0"/>
+          </a:p>
+        </p:txBody>
+      </p:sp>
+      <p:sp>
+        <p:nvSpPr>
+          <p:cNvPr id="23" name="Shape 16"/>
+          <p:cNvSpPr/>
+          <p:nvPr/>
+        </p:nvSpPr>
+        <p:spPr>
+          <a:xfrm>
+            <a:off x="8046720" y="3703320"/>
+            <a:ext cx="685800" cy="685800"/>
+          </a:xfrm>
+          <a:prstGeom prst="ellipse">
+            <a:avLst/>
+          </a:prstGeom>
+          <a:solidFill>
+            <a:srgbClr val="E6ECF3"/>
+          </a:solidFill>
+          <a:ln w="12700">
+            <a:solidFill>
+              <a:srgbClr val="E6ECF3"/>
+            </a:solidFill>
+            <a:prstDash val="solid"/>
+          </a:ln>
+        </p:spPr>
+      </p:sp>
+      <p:pic>
+        <p:nvPicPr>
+          <p:cNvPr id="24" name="Image 5" descr="preencoded.png">    </p:cNvPr>
+          <p:cNvPicPr>
+            <a:picLocks noChangeAspect="1"/>
+          </p:cNvPicPr>
+          <p:nvPr/>
+        </p:nvPicPr>
+        <p:blipFill>
+          <a:blip r:embed="rId6"/>
+          <a:stretch>
+            <a:fillRect/>
+          </a:stretch>
+        </p:blipFill>
+        <p:spPr>
+          <a:xfrm>
+            <a:off x="8197596" y="3854196"/>
+            <a:ext cx="384048" cy="384048"/>
+          </a:xfrm>
+          <a:prstGeom prst="rect">
+            <a:avLst/>
+          </a:prstGeom>
+        </p:spPr>
+      </p:pic>
+      <p:sp>
+        <p:nvSpPr>
+          <p:cNvPr id="25" name="Text 17"/>
+          <p:cNvSpPr txBox="1"/>
+          <p:nvPr/>
+        </p:nvSpPr>
+        <p:spPr>
+          <a:xfrm>
+            <a:off x="8046720" y="4526280"/>
+            <a:ext cx="3474720" cy="411480"/>
+          </a:xfrm>
+          <a:prstGeom prst="rect">
+            <a:avLst/>
+          </a:prstGeom>
+          <a:noFill/>
+          <a:ln/>
+        </p:spPr>
+        <p:txBody>
+          <a:bodyPr wrap="square" lIns="0" tIns="0" rIns="0" bIns="0" rtlCol="0" anchor="ctr"/>
+          <a:lstStyle/>
+          <a:p>
+            <a:pPr indent="0" marL="0">
+              <a:buNone/>
+            </a:pPr>
+            <a:r>
+              <a:rPr lang="en-US" sz="1800" b="1" dirty="0">
+                <a:solidFill>
+                  <a:srgbClr val="1B2533"/>
+                </a:solidFill>
+              </a:rPr>
+              <a:t>Read-only dashboard</a:t>
+            </a:r>
+            <a:endParaRPr lang="en-US" sz="1800" dirty="0"/>
+          </a:p>
+        </p:txBody>
+      </p:sp>
+      <p:sp>
+        <p:nvSpPr>
+          <p:cNvPr id="26" name="Text 18"/>
+          <p:cNvSpPr txBox="1"/>
+          <p:nvPr/>
+        </p:nvSpPr>
+        <p:spPr>
+          <a:xfrm>
+            <a:off x="8046720" y="4956048"/>
+            <a:ext cx="3474720" cy="822960"/>
+          </a:xfrm>
+          <a:prstGeom prst="rect">
+            <a:avLst/>
+          </a:prstGeom>
+          <a:noFill/>
+          <a:ln/>
+        </p:spPr>
+        <p:txBody>
+          <a:bodyPr wrap="square" lIns="0" tIns="0" rIns="0" bIns="0" rtlCol="0" anchor="t"/>
+          <a:lstStyle/>
+          <a:p>
+            <a:pPr indent="0" marL="0">
+              <a:buNone/>
+            </a:pPr>
+            <a:r>
+              <a:rPr lang="en-US" sz="1500" dirty="0">
+                <a:solidFill>
+                  <a:srgbClr val="6B7686"/>
+                </a:solidFill>
+              </a:rPr>
+              <a:t>A button that submits the pipeline would make it a control panel.</a:t>
+            </a:r>
+            <a:endParaRPr lang="en-US" sz="1500" dirty="0"/>
+          </a:p>
+        </p:txBody>
+      </p:sp>
+      <p:sp>
+        <p:nvSpPr>
+          <p:cNvPr id="25" name="Slide Number Placeholder 0"/>
+          <p:cNvSpPr>
+            <a:spLocks noGrp="1"/>
+          </p:cNvSpPr>
+          <p:nvPr>
+            <p:ph type="sldNum" sz="quarter" idx="4294967295"/>
+          </p:nvPr>
+        </p:nvSpPr>
+        <p:spPr>
+          <a:xfrm>
+            <a:off x="11155680" y="6400800"/>
+            <a:ext cx="457200" cy="274320"/>
+          </a:xfrm>
+          <a:prstGeom prst="rect">
+            <a:avLst/>
+          </a:prstGeom>
+          <a:extLst>
+            <a:ext uri="{C572A759-6A51-4108-AA02-DFA0A04FC94B}">
+              <ma14:wrappingTextBoxFlag xmlns:ma14="http://schemas.microsoft.com/office/mac/drawingml/2011/main" val="0"/>
+            </a:ext>
+          </a:extLst>
+        </p:spPr>
+        <p:txBody>
+          <a:bodyPr/>
+          <a:lstStyle>
+            <a:lvl1pPr>
+              <a:defRPr sz="1000">
+                <a:solidFill>
+                  <a:srgbClr val="6B7686"/>
+                </a:solidFill>
+              </a:defRPr>
+            </a:lvl1pPr>
+          </a:lstStyle>
+          <a:p>
+            <a:pPr algn="r"/>
+            <a:fld id="{F7021451-1387-4CA6-816F-3879F97B5CBC}" type="slidenum">
+              <a:rPr b="0" lang="en-US"/>
+              <a:t>15</a:t>
+            </a:fld>
+            <a:endParaRPr lang="en-US"/>
+          </a:p>
+        </p:txBody>
+      </p:sp>
+    </p:spTree>
+  </p:cSld>
+  <p:clrMapOvr>
+    <a:masterClrMapping/>
+  </p:clrMapOvr>
+</p:sld>
+</file>
+
+<file path=ppt/slides/slide16.xml><?xml version="1.0" encoding="utf-8"?>
+<p:sld xmlns:a="http://schemas.openxmlformats.org/drawingml/2006/main" xmlns:r="http://schemas.openxmlformats.org/officeDocument/2006/relationships" xmlns:p="http://schemas.openxmlformats.org/presentationml/2006/main">
+  <p:cSld name="Slide 16">
+    <p:spTree>
+      <p:nvGrpSpPr>
+        <p:cNvPr id="1" name=""/>
+        <p:cNvGrpSpPr/>
+        <p:nvPr/>
+      </p:nvGrpSpPr>
+      <p:grpSpPr>
+        <a:xfrm>
+          <a:off x="0" y="0"/>
+          <a:ext cx="0" cy="0"/>
+          <a:chOff x="0" y="0"/>
+          <a:chExt cx="0" cy="0"/>
+        </a:xfrm>
+      </p:grpSpPr>
+      <p:sp>
+        <p:nvSpPr>
+          <p:cNvPr id="2" name="Text 0"/>
+          <p:cNvSpPr/>
+          <p:nvPr>
+            <p:ph idx="100" type="title" hasCustomPrompt="1"/>
+          </p:nvPr>
+        </p:nvSpPr>
+        <p:spPr>
+          <a:xfrm>
             <a:off x="731520" y="2103120"/>
             <a:ext cx="10515600" cy="1188720"/>
           </a:xfrm>
@@ -8068,15 +11690,39 @@
           </a:p>
         </p:txBody>
       </p:sp>
-      <p:sp>
-        <p:nvSpPr>
-          <p:cNvPr id="3" name="Text 1"/>
+      <p:pic>
+        <p:nvPicPr>
+          <p:cNvPr id="3" name="Image 0" descr="Global 7-day average curve">    </p:cNvPr>
+          <p:cNvPicPr>
+            <a:picLocks noChangeAspect="1"/>
+          </p:cNvPicPr>
+          <p:nvPr/>
+        </p:nvPicPr>
+        <p:blipFill>
+          <a:blip r:embed="rId1"/>
+          <a:stretch>
+            <a:fillRect/>
+          </a:stretch>
+        </p:blipFill>
+        <p:spPr>
+          <a:xfrm>
+            <a:off x="0" y="4499799"/>
+            <a:ext cx="12188952" cy="2358201"/>
+          </a:xfrm>
+          <a:prstGeom prst="rect">
+            <a:avLst/>
+          </a:prstGeom>
+        </p:spPr>
+      </p:pic>
+      <p:sp>
+        <p:nvSpPr>
+          <p:cNvPr id="4" name="Text 1"/>
           <p:cNvSpPr txBox="1"/>
           <p:nvPr/>
         </p:nvSpPr>
         <p:spPr>
           <a:xfrm>
-            <a:off x="731520" y="5760720"/>
+            <a:off x="731520" y="3429000"/>
             <a:ext cx="10515600" cy="365760"/>
           </a:xfrm>
           <a:prstGeom prst="rect">
@@ -8093,14 +11739,14 @@
               <a:buNone/>
             </a:pPr>
             <a:r>
-              <a:rPr lang="en-US" sz="1400" dirty="0">
-                <a:solidFill>
-                  <a:srgbClr val="9FB3CC"/>
+              <a:rPr lang="en-US" sz="1600" dirty="0">
+                <a:solidFill>
+                  <a:srgbClr val="CADCFC"/>
                 </a:solidFill>
               </a:rPr>
               <a:t>Dashboard  localhost:5000   ·   HDFS  :9870   ·   YARN  :8088   ·   Spark  :8080</a:t>
             </a:r>
-            <a:endParaRPr lang="en-US" sz="1400" dirty="0"/>
+            <a:endParaRPr lang="en-US" sz="1600" dirty="0"/>
           </a:p>
         </p:txBody>
       </p:sp>
@@ -9122,6 +12768,13 @@
             </a:solidFill>
             <a:prstDash val="solid"/>
           </a:ln>
+          <a:effectLst>
+            <a:outerShdw sx="100000" sy="100000" kx="0" ky="0" algn="bl" rotWithShape="0" blurRad="50800" dist="19050" dir="5400000">
+              <a:srgbClr val="1B2533">
+                <a:alpha val="12000"/>
+              </a:srgbClr>
+            </a:outerShdw>
+          </a:effectLst>
         </p:spPr>
       </p:sp>
       <p:sp>
@@ -9205,6 +12858,13 @@
             </a:solidFill>
             <a:prstDash val="solid"/>
           </a:ln>
+          <a:effectLst>
+            <a:outerShdw sx="100000" sy="100000" kx="0" ky="0" algn="bl" rotWithShape="0" blurRad="50800" dist="19050" dir="5400000">
+              <a:srgbClr val="1B2533">
+                <a:alpha val="12000"/>
+              </a:srgbClr>
+            </a:outerShdw>
+          </a:effectLst>
         </p:spPr>
       </p:sp>
       <p:sp>
@@ -9288,6 +12948,13 @@
             </a:solidFill>
             <a:prstDash val="solid"/>
           </a:ln>
+          <a:effectLst>
+            <a:outerShdw sx="100000" sy="100000" kx="0" ky="0" algn="bl" rotWithShape="0" blurRad="50800" dist="19050" dir="5400000">
+              <a:srgbClr val="1B2533">
+                <a:alpha val="12000"/>
+              </a:srgbClr>
+            </a:outerShdw>
+          </a:effectLst>
         </p:spPr>
       </p:sp>
       <p:sp>
@@ -9354,6 +13021,13 @@
             </a:solidFill>
             <a:prstDash val="solid"/>
           </a:ln>
+          <a:effectLst>
+            <a:outerShdw sx="100000" sy="100000" kx="0" ky="0" algn="bl" rotWithShape="0" blurRad="50800" dist="19050" dir="5400000">
+              <a:srgbClr val="1B2533">
+                <a:alpha val="12000"/>
+              </a:srgbClr>
+            </a:outerShdw>
+          </a:effectLst>
         </p:spPr>
       </p:sp>
       <p:sp>
@@ -9420,6 +13094,13 @@
             </a:solidFill>
             <a:prstDash val="solid"/>
           </a:ln>
+          <a:effectLst>
+            <a:outerShdw sx="100000" sy="100000" kx="0" ky="0" algn="bl" rotWithShape="0" blurRad="50800" dist="19050" dir="5400000">
+              <a:srgbClr val="1B2533">
+                <a:alpha val="12000"/>
+              </a:srgbClr>
+            </a:outerShdw>
+          </a:effectLst>
         </p:spPr>
       </p:sp>
       <p:sp>
@@ -9486,6 +13167,13 @@
             </a:solidFill>
             <a:prstDash val="solid"/>
           </a:ln>
+          <a:effectLst>
+            <a:outerShdw sx="100000" sy="100000" kx="0" ky="0" algn="bl" rotWithShape="0" blurRad="50800" dist="19050" dir="5400000">
+              <a:srgbClr val="1B2533">
+                <a:alpha val="12000"/>
+              </a:srgbClr>
+            </a:outerShdw>
+          </a:effectLst>
         </p:spPr>
       </p:sp>
       <p:sp>
@@ -9711,6 +13399,13 @@
             </a:solidFill>
             <a:prstDash val="solid"/>
           </a:ln>
+          <a:effectLst>
+            <a:outerShdw sx="100000" sy="100000" kx="0" ky="0" algn="bl" rotWithShape="0" blurRad="50800" dist="19050" dir="5400000">
+              <a:srgbClr val="1B2533">
+                <a:alpha val="12000"/>
+              </a:srgbClr>
+            </a:outerShdw>
+          </a:effectLst>
         </p:spPr>
       </p:sp>
       <p:sp>
@@ -9794,6 +13489,13 @@
             </a:solidFill>
             <a:prstDash val="solid"/>
           </a:ln>
+          <a:effectLst>
+            <a:outerShdw sx="100000" sy="100000" kx="0" ky="0" algn="bl" rotWithShape="0" blurRad="50800" dist="19050" dir="5400000">
+              <a:srgbClr val="1B2533">
+                <a:alpha val="12000"/>
+              </a:srgbClr>
+            </a:outerShdw>
+          </a:effectLst>
         </p:spPr>
       </p:sp>
       <p:sp>
@@ -9877,6 +13579,13 @@
             </a:solidFill>
             <a:prstDash val="solid"/>
           </a:ln>
+          <a:effectLst>
+            <a:outerShdw sx="100000" sy="100000" kx="0" ky="0" algn="bl" rotWithShape="0" blurRad="50800" dist="19050" dir="5400000">
+              <a:srgbClr val="1B2533">
+                <a:alpha val="12000"/>
+              </a:srgbClr>
+            </a:outerShdw>
+          </a:effectLst>
         </p:spPr>
       </p:sp>
       <p:sp>
@@ -10071,6 +13780,13 @@
             </a:solidFill>
             <a:prstDash val="solid"/>
           </a:ln>
+          <a:effectLst>
+            <a:outerShdw sx="100000" sy="100000" kx="0" ky="0" algn="bl" rotWithShape="0" blurRad="50800" dist="19050" dir="5400000">
+              <a:srgbClr val="1B2533">
+                <a:alpha val="12000"/>
+              </a:srgbClr>
+            </a:outerShdw>
+          </a:effectLst>
         </p:spPr>
       </p:sp>
       <p:sp>
@@ -10154,6 +13870,13 @@
             </a:solidFill>
             <a:prstDash val="solid"/>
           </a:ln>
+          <a:effectLst>
+            <a:outerShdw sx="100000" sy="100000" kx="0" ky="0" algn="bl" rotWithShape="0" blurRad="50800" dist="19050" dir="5400000">
+              <a:srgbClr val="1B2533">
+                <a:alpha val="12000"/>
+              </a:srgbClr>
+            </a:outerShdw>
+          </a:effectLst>
         </p:spPr>
       </p:sp>
       <p:sp>
@@ -10237,6 +13960,13 @@
             </a:solidFill>
             <a:prstDash val="solid"/>
           </a:ln>
+          <a:effectLst>
+            <a:outerShdw sx="100000" sy="100000" kx="0" ky="0" algn="bl" rotWithShape="0" blurRad="50800" dist="19050" dir="5400000">
+              <a:srgbClr val="1B2533">
+                <a:alpha val="12000"/>
+              </a:srgbClr>
+            </a:outerShdw>
+          </a:effectLst>
         </p:spPr>
       </p:sp>
       <p:sp>
@@ -10320,6 +14050,13 @@
             </a:solidFill>
             <a:prstDash val="solid"/>
           </a:ln>
+          <a:effectLst>
+            <a:outerShdw sx="100000" sy="100000" kx="0" ky="0" algn="bl" rotWithShape="0" blurRad="50800" dist="19050" dir="5400000">
+              <a:srgbClr val="1B2533">
+                <a:alpha val="12000"/>
+              </a:srgbClr>
+            </a:outerShdw>
+          </a:effectLst>
         </p:spPr>
       </p:sp>
       <p:sp>
@@ -10403,6 +14140,13 @@
             </a:solidFill>
             <a:prstDash val="solid"/>
           </a:ln>
+          <a:effectLst>
+            <a:outerShdw sx="100000" sy="100000" kx="0" ky="0" algn="bl" rotWithShape="0" blurRad="50800" dist="19050" dir="5400000">
+              <a:srgbClr val="1B2533">
+                <a:alpha val="12000"/>
+              </a:srgbClr>
+            </a:outerShdw>
+          </a:effectLst>
         </p:spPr>
       </p:sp>
       <p:sp>
@@ -11320,6 +15064,13 @@
             </a:solidFill>
             <a:prstDash val="solid"/>
           </a:ln>
+          <a:effectLst>
+            <a:outerShdw sx="100000" sy="100000" kx="0" ky="0" algn="bl" rotWithShape="0" blurRad="50800" dist="19050" dir="5400000">
+              <a:srgbClr val="1B2533">
+                <a:alpha val="12000"/>
+              </a:srgbClr>
+            </a:outerShdw>
+          </a:effectLst>
         </p:spPr>
       </p:sp>
       <p:sp>
@@ -11444,6 +15195,13 @@
             </a:solidFill>
             <a:prstDash val="solid"/>
           </a:ln>
+          <a:effectLst>
+            <a:outerShdw sx="100000" sy="100000" kx="0" ky="0" algn="bl" rotWithShape="0" blurRad="50800" dist="19050" dir="5400000">
+              <a:srgbClr val="1B2533">
+                <a:alpha val="12000"/>
+              </a:srgbClr>
+            </a:outerShdw>
+          </a:effectLst>
         </p:spPr>
       </p:sp>
       <p:sp>
@@ -11568,6 +15326,13 @@
             </a:solidFill>
             <a:prstDash val="solid"/>
           </a:ln>
+          <a:effectLst>
+            <a:outerShdw sx="100000" sy="100000" kx="0" ky="0" algn="bl" rotWithShape="0" blurRad="50800" dist="19050" dir="5400000">
+              <a:srgbClr val="1B2533">
+                <a:alpha val="12000"/>
+              </a:srgbClr>
+            </a:outerShdw>
+          </a:effectLst>
         </p:spPr>
       </p:sp>
       <p:sp>
@@ -11692,6 +15457,13 @@
             </a:solidFill>
             <a:prstDash val="solid"/>
           </a:ln>
+          <a:effectLst>
+            <a:outerShdw sx="100000" sy="100000" kx="0" ky="0" algn="bl" rotWithShape="0" blurRad="50800" dist="19050" dir="5400000">
+              <a:srgbClr val="1B2533">
+                <a:alpha val="12000"/>
+              </a:srgbClr>
+            </a:outerShdw>
+          </a:effectLst>
         </p:spPr>
       </p:sp>
       <p:sp>
@@ -11816,6 +15588,13 @@
             </a:solidFill>
             <a:prstDash val="solid"/>
           </a:ln>
+          <a:effectLst>
+            <a:outerShdw sx="100000" sy="100000" kx="0" ky="0" algn="bl" rotWithShape="0" blurRad="50800" dist="19050" dir="5400000">
+              <a:srgbClr val="1B2533">
+                <a:alpha val="12000"/>
+              </a:srgbClr>
+            </a:outerShdw>
+          </a:effectLst>
         </p:spPr>
       </p:sp>
       <p:sp>
@@ -11940,6 +15719,13 @@
             </a:solidFill>
             <a:prstDash val="solid"/>
           </a:ln>
+          <a:effectLst>
+            <a:outerShdw sx="100000" sy="100000" kx="0" ky="0" algn="bl" rotWithShape="0" blurRad="50800" dist="19050" dir="5400000">
+              <a:srgbClr val="1B2533">
+                <a:alpha val="12000"/>
+              </a:srgbClr>
+            </a:outerShdw>
+          </a:effectLst>
         </p:spPr>
       </p:sp>
       <p:sp>
@@ -13544,6 +17330,13 @@
             </a:solidFill>
             <a:prstDash val="solid"/>
           </a:ln>
+          <a:effectLst>
+            <a:outerShdw sx="100000" sy="100000" kx="0" ky="0" algn="bl" rotWithShape="0" blurRad="50800" dist="19050" dir="5400000">
+              <a:srgbClr val="1B2533">
+                <a:alpha val="12000"/>
+              </a:srgbClr>
+            </a:outerShdw>
+          </a:effectLst>
         </p:spPr>
       </p:sp>
       <p:sp>
@@ -13627,6 +17420,13 @@
             </a:solidFill>
             <a:prstDash val="solid"/>
           </a:ln>
+          <a:effectLst>
+            <a:outerShdw sx="100000" sy="100000" kx="0" ky="0" algn="bl" rotWithShape="0" blurRad="50800" dist="19050" dir="5400000">
+              <a:srgbClr val="1B2533">
+                <a:alpha val="12000"/>
+              </a:srgbClr>
+            </a:outerShdw>
+          </a:effectLst>
         </p:spPr>
       </p:sp>
       <p:sp>
@@ -13710,6 +17510,13 @@
             </a:solidFill>
             <a:prstDash val="solid"/>
           </a:ln>
+          <a:effectLst>
+            <a:outerShdw sx="100000" sy="100000" kx="0" ky="0" algn="bl" rotWithShape="0" blurRad="50800" dist="19050" dir="5400000">
+              <a:srgbClr val="1B2533">
+                <a:alpha val="12000"/>
+              </a:srgbClr>
+            </a:outerShdw>
+          </a:effectLst>
         </p:spPr>
       </p:sp>
       <p:sp>
@@ -13793,6 +17600,13 @@
             </a:solidFill>
             <a:prstDash val="solid"/>
           </a:ln>
+          <a:effectLst>
+            <a:outerShdw sx="100000" sy="100000" kx="0" ky="0" algn="bl" rotWithShape="0" blurRad="50800" dist="19050" dir="5400000">
+              <a:srgbClr val="1B2533">
+                <a:alpha val="12000"/>
+              </a:srgbClr>
+            </a:outerShdw>
+          </a:effectLst>
         </p:spPr>
       </p:sp>
       <p:sp>
@@ -13876,6 +17690,13 @@
             </a:solidFill>
             <a:prstDash val="solid"/>
           </a:ln>
+          <a:effectLst>
+            <a:outerShdw sx="100000" sy="100000" kx="0" ky="0" algn="bl" rotWithShape="0" blurRad="50800" dist="19050" dir="5400000">
+              <a:srgbClr val="1B2533">
+                <a:alpha val="12000"/>
+              </a:srgbClr>
+            </a:outerShdw>
+          </a:effectLst>
         </p:spPr>
       </p:sp>
       <p:sp>
@@ -13959,6 +17780,13 @@
             </a:solidFill>
             <a:prstDash val="solid"/>
           </a:ln>
+          <a:effectLst>
+            <a:outerShdw sx="100000" sy="100000" kx="0" ky="0" algn="bl" rotWithShape="0" blurRad="50800" dist="19050" dir="5400000">
+              <a:srgbClr val="1B2533">
+                <a:alpha val="12000"/>
+              </a:srgbClr>
+            </a:outerShdw>
+          </a:effectLst>
         </p:spPr>
       </p:sp>
       <p:sp>
@@ -14042,6 +17870,13 @@
             </a:solidFill>
             <a:prstDash val="solid"/>
           </a:ln>
+          <a:effectLst>
+            <a:outerShdw sx="100000" sy="100000" kx="0" ky="0" algn="bl" rotWithShape="0" blurRad="50800" dist="19050" dir="5400000">
+              <a:srgbClr val="1B2533">
+                <a:alpha val="12000"/>
+              </a:srgbClr>
+            </a:outerShdw>
+          </a:effectLst>
         </p:spPr>
       </p:sp>
       <p:sp>
@@ -14500,6 +18335,13 @@
             </a:solidFill>
             <a:prstDash val="solid"/>
           </a:ln>
+          <a:effectLst>
+            <a:outerShdw sx="100000" sy="100000" kx="0" ky="0" algn="bl" rotWithShape="0" blurRad="50800" dist="19050" dir="5400000">
+              <a:srgbClr val="1B2533">
+                <a:alpha val="12000"/>
+              </a:srgbClr>
+            </a:outerShdw>
+          </a:effectLst>
         </p:spPr>
       </p:sp>
       <p:sp>
@@ -14583,6 +18425,13 @@
             </a:solidFill>
             <a:prstDash val="solid"/>
           </a:ln>
+          <a:effectLst>
+            <a:outerShdw sx="100000" sy="100000" kx="0" ky="0" algn="bl" rotWithShape="0" blurRad="50800" dist="19050" dir="5400000">
+              <a:srgbClr val="1B2533">
+                <a:alpha val="12000"/>
+              </a:srgbClr>
+            </a:outerShdw>
+          </a:effectLst>
         </p:spPr>
       </p:sp>
       <p:sp>
@@ -14666,6 +18515,13 @@
             </a:solidFill>
             <a:prstDash val="solid"/>
           </a:ln>
+          <a:effectLst>
+            <a:outerShdw sx="100000" sy="100000" kx="0" ky="0" algn="bl" rotWithShape="0" blurRad="50800" dist="19050" dir="5400000">
+              <a:srgbClr val="1B2533">
+                <a:alpha val="12000"/>
+              </a:srgbClr>
+            </a:outerShdw>
+          </a:effectLst>
         </p:spPr>
       </p:sp>
       <p:sp>
@@ -15700,13 +19556,14 @@
         </p:nvPicPr>
         <p:blipFill>
           <a:blip r:embed="rId1"/>
-          <a:srcRect l="0" r="0" t="0" b="4472"/>
-          <a:stretch/>
+          <a:stretch>
+            <a:fillRect/>
+          </a:stretch>
         </p:blipFill>
         <p:spPr>
           <a:xfrm>
-            <a:off x="548640" y="1188720"/>
-            <a:ext cx="6766560" cy="4937760"/>
+            <a:off x="411480" y="1097280"/>
+            <a:ext cx="6903720" cy="5219886"/>
           </a:xfrm>
           <a:prstGeom prst="rect">
             <a:avLst/>
@@ -15716,28 +19573,6 @@
       <p:sp>
         <p:nvSpPr>
           <p:cNvPr id="4" name="Shape 1"/>
-          <p:cNvSpPr/>
-          <p:nvPr/>
-        </p:nvSpPr>
-        <p:spPr>
-          <a:xfrm>
-            <a:off x="548640" y="1188720"/>
-            <a:ext cx="6766560" cy="4937760"/>
-          </a:xfrm>
-          <a:prstGeom prst="rect">
-            <a:avLst/>
-          </a:prstGeom>
-          <a:ln w="12700">
-            <a:solidFill>
-              <a:srgbClr val="D5DCE5"/>
-            </a:solidFill>
-            <a:prstDash val="solid"/>
-          </a:ln>
-        </p:spPr>
-      </p:sp>
-      <p:sp>
-        <p:nvSpPr>
-          <p:cNvPr id="5" name="Shape 2"/>
           <p:cNvSpPr/>
           <p:nvPr/>
         </p:nvSpPr>
@@ -15764,7 +19599,7 @@
       </p:sp>
       <p:sp>
         <p:nvSpPr>
-          <p:cNvPr id="6" name="Text 3"/>
+          <p:cNvPr id="5" name="Text 2"/>
           <p:cNvSpPr txBox="1"/>
           <p:nvPr/>
         </p:nvSpPr>
@@ -15814,7 +19649,7 @@
       </p:sp>
       <p:sp>
         <p:nvSpPr>
-          <p:cNvPr id="7" name="Shape 4"/>
+          <p:cNvPr id="6" name="Shape 3"/>
           <p:cNvSpPr/>
           <p:nvPr/>
         </p:nvSpPr>
@@ -15841,7 +19676,7 @@
       </p:sp>
       <p:sp>
         <p:nvSpPr>
-          <p:cNvPr id="8" name="Text 5"/>
+          <p:cNvPr id="7" name="Text 4"/>
           <p:cNvSpPr txBox="1"/>
           <p:nvPr/>
         </p:nvSpPr>
@@ -15891,7 +19726,7 @@
       </p:sp>
       <p:sp>
         <p:nvSpPr>
-          <p:cNvPr id="9" name="Shape 6"/>
+          <p:cNvPr id="8" name="Shape 5"/>
           <p:cNvSpPr/>
           <p:nvPr/>
         </p:nvSpPr>
@@ -15918,7 +19753,7 @@
       </p:sp>
       <p:sp>
         <p:nvSpPr>
-          <p:cNvPr id="10" name="Text 7"/>
+          <p:cNvPr id="9" name="Text 6"/>
           <p:cNvSpPr txBox="1"/>
           <p:nvPr/>
         </p:nvSpPr>
@@ -15968,7 +19803,7 @@
       </p:sp>
       <p:sp>
         <p:nvSpPr>
-          <p:cNvPr id="11" name="Shape 8"/>
+          <p:cNvPr id="10" name="Shape 7"/>
           <p:cNvSpPr/>
           <p:nvPr/>
         </p:nvSpPr>
@@ -15995,7 +19830,7 @@
       </p:sp>
       <p:sp>
         <p:nvSpPr>
-          <p:cNvPr id="12" name="Text 9"/>
+          <p:cNvPr id="11" name="Text 8"/>
           <p:cNvSpPr txBox="1"/>
           <p:nvPr/>
         </p:nvSpPr>
@@ -16045,7 +19880,7 @@
       </p:sp>
       <p:sp>
         <p:nvSpPr>
-          <p:cNvPr id="13" name="Shape 10"/>
+          <p:cNvPr id="12" name="Shape 9"/>
           <p:cNvSpPr/>
           <p:nvPr/>
         </p:nvSpPr>
@@ -16072,7 +19907,7 @@
       </p:sp>
       <p:sp>
         <p:nvSpPr>
-          <p:cNvPr id="14" name="Text 11"/>
+          <p:cNvPr id="13" name="Text 10"/>
           <p:cNvSpPr txBox="1"/>
           <p:nvPr/>
         </p:nvSpPr>
@@ -16122,7 +19957,7 @@
       </p:sp>
       <p:sp>
         <p:nvSpPr>
-          <p:cNvPr id="15" name="Shape 12"/>
+          <p:cNvPr id="14" name="Shape 11"/>
           <p:cNvSpPr/>
           <p:nvPr/>
         </p:nvSpPr>
@@ -16149,7 +19984,7 @@
       </p:sp>
       <p:sp>
         <p:nvSpPr>
-          <p:cNvPr id="16" name="Text 13"/>
+          <p:cNvPr id="15" name="Text 12"/>
           <p:cNvSpPr txBox="1"/>
           <p:nvPr/>
         </p:nvSpPr>
